--- a/Reconciliation_Platform_Technical_Architecture_Overview.pptx
+++ b/Reconciliation_Platform_Technical_Architecture_Overview.pptx
@@ -6,7 +6,7 @@
     <p:sldMasterId id="2157483763" r:id="rId2"/>
   </p:sldMasterIdLst>
   <p:notesMasterIdLst>
-    <p:notesMasterId r:id="rId23"/>
+    <p:notesMasterId r:id="rId25"/>
   </p:notesMasterIdLst>
   <p:sldIdLst>
     <p:sldId id="256" r:id="rId3"/>
@@ -28,7 +28,9 @@
     <p:sldId id="289" r:id="rId19"/>
     <p:sldId id="290" r:id="rId20"/>
     <p:sldId id="291" r:id="rId21"/>
-    <p:sldId id="273" r:id="rId22"/>
+    <p:sldId id="292" r:id="rId22"/>
+    <p:sldId id="294" r:id="rId23"/>
+    <p:sldId id="273" r:id="rId24"/>
   </p:sldIdLst>
   <p:sldSz cx="12192000" cy="6858000"/>
   <p:notesSz cx="6858000" cy="9144000"/>
@@ -25046,58 +25048,6 @@
       </p:sp>
       <p:sp>
         <p:nvSpPr>
-          <p:cNvPr id="10" name="TextBox 9">
-            <a:extLst>
-              <a:ext uri="{FF2B5EF4-FFF2-40B4-BE49-F238E27FC236}">
-                <a16:creationId xmlns:a16="http://schemas.microsoft.com/office/drawing/2014/main" id="{B62CD319-3397-4AF5-0733-9B3BABFDCF53}"/>
-              </a:ext>
-            </a:extLst>
-          </p:cNvPr>
-          <p:cNvSpPr txBox="1"/>
-          <p:nvPr/>
-        </p:nvSpPr>
-        <p:spPr>
-          <a:xfrm>
-            <a:off x="508000" y="145160"/>
-            <a:ext cx="4445000" cy="499809"/>
-          </a:xfrm>
-          <a:prstGeom prst="rect">
-            <a:avLst/>
-          </a:prstGeom>
-          <a:noFill/>
-          <a:ln w="15875">
-            <a:solidFill>
-              <a:srgbClr val="D6E8F6"/>
-            </a:solidFill>
-          </a:ln>
-          <a:effectLst>
-            <a:outerShdw blurRad="63500" dist="28398" dir="3806086" rotWithShape="0">
-              <a:srgbClr val="B9CCE0">
-                <a:alpha val="22000"/>
-              </a:srgbClr>
-            </a:outerShdw>
-          </a:effectLst>
-        </p:spPr>
-        <p:txBody>
-          <a:bodyPr vert="horz" wrap="square" lIns="101600" tIns="63500" rIns="101600" bIns="63500" rtlCol="0">
-            <a:normAutofit/>
-          </a:bodyPr>
-          <a:lstStyle/>
-          <a:p>
-            <a:r>
-              <a:rPr lang="en-US" sz="1000" b="1">
-                <a:solidFill>
-                  <a:srgbClr val="566982"/>
-                </a:solidFill>
-                <a:latin typeface="Aptos" panose="020B0004020202020204" pitchFamily="34" charset="0"/>
-              </a:rPr>
-              <a:t>OVERVIEW</a:t>
-            </a:r>
-          </a:p>
-        </p:txBody>
-      </p:sp>
-      <p:sp>
-        <p:nvSpPr>
           <p:cNvPr id="11" name="TextBox 10">
             <a:extLst>
               <a:ext uri="{FF2B5EF4-FFF2-40B4-BE49-F238E27FC236}">
@@ -27053,6 +27003,744 @@
 </file>
 
 <file path=ppt/slides/slide20.xml><?xml version="1.0" encoding="utf-8"?>
+<p:sld xmlns:a="http://schemas.openxmlformats.org/drawingml/2006/main" xmlns:r="http://schemas.openxmlformats.org/officeDocument/2006/relationships" xmlns:p="http://schemas.openxmlformats.org/presentationml/2006/main">
+  <p:cSld>
+    <p:spTree>
+      <p:nvGrpSpPr>
+        <p:cNvPr id="1" name="">
+          <a:extLst>
+            <a:ext uri="{FF2B5EF4-FFF2-40B4-BE49-F238E27FC236}">
+              <a16:creationId xmlns:a16="http://schemas.microsoft.com/office/drawing/2014/main" id="{A465C63E-72D8-19D7-52C1-1E0BA1046DF9}"/>
+            </a:ext>
+          </a:extLst>
+        </p:cNvPr>
+        <p:cNvGrpSpPr/>
+        <p:nvPr/>
+      </p:nvGrpSpPr>
+      <p:grpSpPr>
+        <a:xfrm>
+          <a:off x="0" y="0"/>
+          <a:ext cx="0" cy="0"/>
+          <a:chOff x="0" y="0"/>
+          <a:chExt cx="0" cy="0"/>
+        </a:xfrm>
+      </p:grpSpPr>
+      <p:sp>
+        <p:nvSpPr>
+          <p:cNvPr id="38" name="codex_template_header_band">
+            <a:extLst>
+              <a:ext uri="{FF2B5EF4-FFF2-40B4-BE49-F238E27FC236}">
+                <a16:creationId xmlns:a16="http://schemas.microsoft.com/office/drawing/2014/main" id="{D9E2D62E-3817-8430-EFCC-85082EFAFACA}"/>
+              </a:ext>
+            </a:extLst>
+          </p:cNvPr>
+          <p:cNvSpPr/>
+          <p:nvPr/>
+        </p:nvSpPr>
+        <p:spPr>
+          <a:xfrm>
+            <a:off x="0" y="-313562"/>
+            <a:ext cx="12192000" cy="1439925"/>
+          </a:xfrm>
+          <a:prstGeom prst="rect">
+            <a:avLst/>
+          </a:prstGeom>
+          <a:solidFill>
+            <a:srgbClr val="ECF7FF">
+              <a:alpha val="95000"/>
+            </a:srgbClr>
+          </a:solidFill>
+          <a:ln w="25400" cap="flat" cmpd="sng" algn="ctr">
+            <a:noFill/>
+            <a:prstDash val="solid"/>
+          </a:ln>
+          <a:effectLst/>
+          <a:extLst>
+            <a:ext uri="{91240B29-F687-4F45-9708-019B960494DF}">
+              <a14:hiddenLine xmlns:a14="http://schemas.microsoft.com/office/drawing/2010/main" w="25400" cap="flat" cmpd="sng" algn="ctr">
+                <a:solidFill>
+                  <a:schemeClr val="accent1">
+                    <a:shade val="15000"/>
+                  </a:schemeClr>
+                </a:solidFill>
+                <a:prstDash val="solid"/>
+              </a14:hiddenLine>
+            </a:ext>
+          </a:extLst>
+        </p:spPr>
+        <p:style>
+          <a:lnRef idx="2">
+            <a:schemeClr val="accent1">
+              <a:shade val="15000"/>
+            </a:schemeClr>
+          </a:lnRef>
+          <a:fillRef idx="1">
+            <a:schemeClr val="accent1"/>
+          </a:fillRef>
+          <a:effectRef idx="0">
+            <a:schemeClr val="accent1"/>
+          </a:effectRef>
+          <a:fontRef idx="minor">
+            <a:schemeClr val="lt1"/>
+          </a:fontRef>
+        </p:style>
+        <p:txBody>
+          <a:bodyPr rtlCol="0" anchor="ctr"/>
+          <a:lstStyle/>
+          <a:p>
+            <a:pPr algn="ctr"/>
+            <a:endParaRPr lang="en-US"/>
+          </a:p>
+        </p:txBody>
+      </p:sp>
+      <p:sp>
+        <p:nvSpPr>
+          <p:cNvPr id="11" name="TextBox 10">
+            <a:extLst>
+              <a:ext uri="{FF2B5EF4-FFF2-40B4-BE49-F238E27FC236}">
+                <a16:creationId xmlns:a16="http://schemas.microsoft.com/office/drawing/2014/main" id="{CF2796E5-8C7E-B4AF-C4F1-28CC9800AD49}"/>
+              </a:ext>
+            </a:extLst>
+          </p:cNvPr>
+          <p:cNvSpPr txBox="1"/>
+          <p:nvPr/>
+        </p:nvSpPr>
+        <p:spPr>
+          <a:xfrm>
+            <a:off x="812800" y="683225"/>
+            <a:ext cx="10414000" cy="944951"/>
+          </a:xfrm>
+          <a:prstGeom prst="rect">
+            <a:avLst/>
+          </a:prstGeom>
+          <a:solidFill>
+            <a:scrgbClr r="0" g="0" b="0">
+              <a:alpha val="0"/>
+            </a:scrgbClr>
+          </a:solidFill>
+          <a:ln w="15875">
+            <a:noFill/>
+          </a:ln>
+          <a:effectLst/>
+        </p:spPr>
+        <p:txBody>
+          <a:bodyPr vert="horz" wrap="square" lIns="0" tIns="0" rIns="0" bIns="0" rtlCol="0">
+            <a:noAutofit/>
+          </a:bodyPr>
+          <a:lstStyle/>
+          <a:p>
+            <a:r>
+              <a:rPr lang="en-US" sz="2800" b="1" dirty="0">
+                <a:solidFill>
+                  <a:srgbClr val="142D4E"/>
+                </a:solidFill>
+                <a:latin typeface="Aptos Display" panose="020B0004020202020204" pitchFamily="34" charset="0"/>
+              </a:rPr>
+              <a:t>Grafana Dashboard</a:t>
+            </a:r>
+          </a:p>
+        </p:txBody>
+      </p:sp>
+      <p:sp>
+        <p:nvSpPr>
+          <p:cNvPr id="40" name="codex_template_top_accent">
+            <a:extLst>
+              <a:ext uri="{FF2B5EF4-FFF2-40B4-BE49-F238E27FC236}">
+                <a16:creationId xmlns:a16="http://schemas.microsoft.com/office/drawing/2014/main" id="{3628B112-F0E9-072F-7B3F-9605E118FC85}"/>
+              </a:ext>
+            </a:extLst>
+          </p:cNvPr>
+          <p:cNvSpPr/>
+          <p:nvPr/>
+        </p:nvSpPr>
+        <p:spPr>
+          <a:xfrm>
+            <a:off x="0" y="-34296"/>
+            <a:ext cx="12192000" cy="157493"/>
+          </a:xfrm>
+          <a:prstGeom prst="rect">
+            <a:avLst/>
+          </a:prstGeom>
+          <a:solidFill>
+            <a:srgbClr val="00A9E0"/>
+          </a:solidFill>
+          <a:ln w="25400" cap="flat" cmpd="sng" algn="ctr">
+            <a:noFill/>
+            <a:prstDash val="solid"/>
+          </a:ln>
+          <a:effectLst/>
+          <a:extLst>
+            <a:ext uri="{91240B29-F687-4F45-9708-019B960494DF}">
+              <a14:hiddenLine xmlns:a14="http://schemas.microsoft.com/office/drawing/2010/main" w="25400" cap="flat" cmpd="sng" algn="ctr">
+                <a:solidFill>
+                  <a:schemeClr val="accent1">
+                    <a:shade val="15000"/>
+                  </a:schemeClr>
+                </a:solidFill>
+                <a:prstDash val="solid"/>
+              </a14:hiddenLine>
+            </a:ext>
+          </a:extLst>
+        </p:spPr>
+        <p:style>
+          <a:lnRef idx="2">
+            <a:schemeClr val="accent1">
+              <a:shade val="15000"/>
+            </a:schemeClr>
+          </a:lnRef>
+          <a:fillRef idx="1">
+            <a:schemeClr val="accent1"/>
+          </a:fillRef>
+          <a:effectRef idx="0">
+            <a:schemeClr val="accent1"/>
+          </a:effectRef>
+          <a:fontRef idx="minor">
+            <a:schemeClr val="lt1"/>
+          </a:fontRef>
+        </p:style>
+        <p:txBody>
+          <a:bodyPr rtlCol="0" anchor="ctr"/>
+          <a:lstStyle/>
+          <a:p>
+            <a:pPr algn="ctr"/>
+            <a:endParaRPr lang="en-US"/>
+          </a:p>
+        </p:txBody>
+      </p:sp>
+      <p:sp>
+        <p:nvSpPr>
+          <p:cNvPr id="42" name="codex_template_footer">
+            <a:extLst>
+              <a:ext uri="{FF2B5EF4-FFF2-40B4-BE49-F238E27FC236}">
+                <a16:creationId xmlns:a16="http://schemas.microsoft.com/office/drawing/2014/main" id="{8A335B5A-8CDB-6A54-F73C-41AB35F5A382}"/>
+              </a:ext>
+            </a:extLst>
+          </p:cNvPr>
+          <p:cNvSpPr txBox="1"/>
+          <p:nvPr/>
+        </p:nvSpPr>
+        <p:spPr>
+          <a:xfrm>
+            <a:off x="355600" y="6470086"/>
+            <a:ext cx="10668000" cy="381673"/>
+          </a:xfrm>
+          <a:prstGeom prst="rect">
+            <a:avLst/>
+          </a:prstGeom>
+          <a:noFill/>
+        </p:spPr>
+        <p:txBody>
+          <a:bodyPr vert="horz" rtlCol="0">
+            <a:spAutoFit/>
+          </a:bodyPr>
+          <a:lstStyle/>
+          <a:p>
+            <a:r>
+              <a:rPr lang="en-US" sz="800">
+                <a:solidFill>
+                  <a:srgbClr val="566982"/>
+                </a:solidFill>
+                <a:latin typeface="Aptos" panose="020B0004020202020204" pitchFamily="34" charset="0"/>
+              </a:rPr>
+              <a:t>Enterprise Reconciliation Platform | Principal Engineer / Architect Assessment</a:t>
+            </a:r>
+          </a:p>
+        </p:txBody>
+      </p:sp>
+      <p:sp>
+        <p:nvSpPr>
+          <p:cNvPr id="43" name="codex_template_slide_number">
+            <a:extLst>
+              <a:ext uri="{FF2B5EF4-FFF2-40B4-BE49-F238E27FC236}">
+                <a16:creationId xmlns:a16="http://schemas.microsoft.com/office/drawing/2014/main" id="{4BDD8E65-4C07-E4C6-E3B7-B2C57C23E6B8}"/>
+              </a:ext>
+            </a:extLst>
+          </p:cNvPr>
+          <p:cNvSpPr txBox="1"/>
+          <p:nvPr/>
+        </p:nvSpPr>
+        <p:spPr>
+          <a:xfrm>
+            <a:off x="11557000" y="6470086"/>
+            <a:ext cx="355600" cy="381673"/>
+          </a:xfrm>
+          <a:prstGeom prst="rect">
+            <a:avLst/>
+          </a:prstGeom>
+          <a:noFill/>
+        </p:spPr>
+        <p:txBody>
+          <a:bodyPr vert="horz" rtlCol="0">
+            <a:spAutoFit/>
+          </a:bodyPr>
+          <a:lstStyle/>
+          <a:p>
+            <a:r>
+              <a:rPr lang="en-US" sz="800">
+                <a:solidFill>
+                  <a:srgbClr val="566982"/>
+                </a:solidFill>
+                <a:latin typeface="Aptos" panose="020B0004020202020204" pitchFamily="34" charset="0"/>
+              </a:rPr>
+              <a:t>20</a:t>
+            </a:r>
+          </a:p>
+        </p:txBody>
+      </p:sp>
+      <p:cxnSp>
+        <p:nvCxnSpPr>
+          <p:cNvPr id="44" name="codex_template_title_rule">
+            <a:extLst>
+              <a:ext uri="{FF2B5EF4-FFF2-40B4-BE49-F238E27FC236}">
+                <a16:creationId xmlns:a16="http://schemas.microsoft.com/office/drawing/2014/main" id="{7DE4E7BD-FE88-5424-9492-FB18636805CD}"/>
+              </a:ext>
+            </a:extLst>
+          </p:cNvPr>
+          <p:cNvCxnSpPr/>
+          <p:nvPr/>
+        </p:nvCxnSpPr>
+        <p:spPr>
+          <a:xfrm>
+            <a:off x="812800" y="1218659"/>
+            <a:ext cx="4648200" cy="0"/>
+          </a:xfrm>
+          <a:prstGeom prst="line">
+            <a:avLst/>
+          </a:prstGeom>
+          <a:ln w="27940">
+            <a:solidFill>
+              <a:srgbClr val="00A9E0"/>
+            </a:solidFill>
+          </a:ln>
+        </p:spPr>
+        <p:style>
+          <a:lnRef idx="1">
+            <a:schemeClr val="accent1"/>
+          </a:lnRef>
+          <a:fillRef idx="0">
+            <a:schemeClr val="accent1"/>
+          </a:fillRef>
+          <a:effectRef idx="0">
+            <a:schemeClr val="accent1"/>
+          </a:effectRef>
+          <a:fontRef idx="minor">
+            <a:schemeClr val="tx1"/>
+          </a:fontRef>
+        </p:style>
+      </p:cxnSp>
+      <p:pic>
+        <p:nvPicPr>
+          <p:cNvPr id="15" name="Picture 14">
+            <a:extLst>
+              <a:ext uri="{FF2B5EF4-FFF2-40B4-BE49-F238E27FC236}">
+                <a16:creationId xmlns:a16="http://schemas.microsoft.com/office/drawing/2014/main" id="{6A514BF7-AD42-61C1-928F-22C1D402BB97}"/>
+              </a:ext>
+            </a:extLst>
+          </p:cNvPr>
+          <p:cNvPicPr>
+            <a:picLocks noChangeAspect="1"/>
+          </p:cNvPicPr>
+          <p:nvPr/>
+        </p:nvPicPr>
+        <p:blipFill>
+          <a:blip r:embed="rId2"/>
+          <a:stretch>
+            <a:fillRect/>
+          </a:stretch>
+        </p:blipFill>
+        <p:spPr>
+          <a:xfrm>
+            <a:off x="812800" y="1310956"/>
+            <a:ext cx="10227013" cy="5182969"/>
+          </a:xfrm>
+          <a:prstGeom prst="rect">
+            <a:avLst/>
+          </a:prstGeom>
+        </p:spPr>
+      </p:pic>
+    </p:spTree>
+    <p:extLst>
+      <p:ext uri="{BB962C8B-B14F-4D97-AF65-F5344CB8AC3E}">
+        <p14:creationId xmlns:p14="http://schemas.microsoft.com/office/powerpoint/2010/main" val="3046374882"/>
+      </p:ext>
+    </p:extLst>
+  </p:cSld>
+  <p:clrMapOvr>
+    <a:masterClrMapping/>
+  </p:clrMapOvr>
+</p:sld>
+</file>
+
+<file path=ppt/slides/slide21.xml><?xml version="1.0" encoding="utf-8"?>
+<p:sld xmlns:a="http://schemas.openxmlformats.org/drawingml/2006/main" xmlns:r="http://schemas.openxmlformats.org/officeDocument/2006/relationships" xmlns:p="http://schemas.openxmlformats.org/presentationml/2006/main">
+  <p:cSld>
+    <p:spTree>
+      <p:nvGrpSpPr>
+        <p:cNvPr id="1" name="">
+          <a:extLst>
+            <a:ext uri="{FF2B5EF4-FFF2-40B4-BE49-F238E27FC236}">
+              <a16:creationId xmlns:a16="http://schemas.microsoft.com/office/drawing/2014/main" id="{C345B54E-C617-8EFB-DCA2-069A912E138E}"/>
+            </a:ext>
+          </a:extLst>
+        </p:cNvPr>
+        <p:cNvGrpSpPr/>
+        <p:nvPr/>
+      </p:nvGrpSpPr>
+      <p:grpSpPr>
+        <a:xfrm>
+          <a:off x="0" y="0"/>
+          <a:ext cx="0" cy="0"/>
+          <a:chOff x="0" y="0"/>
+          <a:chExt cx="0" cy="0"/>
+        </a:xfrm>
+      </p:grpSpPr>
+      <p:sp>
+        <p:nvSpPr>
+          <p:cNvPr id="38" name="codex_template_header_band">
+            <a:extLst>
+              <a:ext uri="{FF2B5EF4-FFF2-40B4-BE49-F238E27FC236}">
+                <a16:creationId xmlns:a16="http://schemas.microsoft.com/office/drawing/2014/main" id="{27A6F93A-D128-0099-1094-01DCE4AB5B7C}"/>
+              </a:ext>
+            </a:extLst>
+          </p:cNvPr>
+          <p:cNvSpPr/>
+          <p:nvPr/>
+        </p:nvSpPr>
+        <p:spPr>
+          <a:xfrm>
+            <a:off x="0" y="-313562"/>
+            <a:ext cx="12192000" cy="1439925"/>
+          </a:xfrm>
+          <a:prstGeom prst="rect">
+            <a:avLst/>
+          </a:prstGeom>
+          <a:solidFill>
+            <a:srgbClr val="ECF7FF">
+              <a:alpha val="95000"/>
+            </a:srgbClr>
+          </a:solidFill>
+          <a:ln w="25400" cap="flat" cmpd="sng" algn="ctr">
+            <a:noFill/>
+            <a:prstDash val="solid"/>
+          </a:ln>
+          <a:effectLst/>
+          <a:extLst>
+            <a:ext uri="{91240B29-F687-4F45-9708-019B960494DF}">
+              <a14:hiddenLine xmlns:a14="http://schemas.microsoft.com/office/drawing/2010/main" w="25400" cap="flat" cmpd="sng" algn="ctr">
+                <a:solidFill>
+                  <a:schemeClr val="accent1">
+                    <a:shade val="15000"/>
+                  </a:schemeClr>
+                </a:solidFill>
+                <a:prstDash val="solid"/>
+              </a14:hiddenLine>
+            </a:ext>
+          </a:extLst>
+        </p:spPr>
+        <p:style>
+          <a:lnRef idx="2">
+            <a:schemeClr val="accent1">
+              <a:shade val="15000"/>
+            </a:schemeClr>
+          </a:lnRef>
+          <a:fillRef idx="1">
+            <a:schemeClr val="accent1"/>
+          </a:fillRef>
+          <a:effectRef idx="0">
+            <a:schemeClr val="accent1"/>
+          </a:effectRef>
+          <a:fontRef idx="minor">
+            <a:schemeClr val="lt1"/>
+          </a:fontRef>
+        </p:style>
+        <p:txBody>
+          <a:bodyPr rtlCol="0" anchor="ctr"/>
+          <a:lstStyle/>
+          <a:p>
+            <a:pPr algn="ctr"/>
+            <a:endParaRPr lang="en-US"/>
+          </a:p>
+        </p:txBody>
+      </p:sp>
+      <p:sp>
+        <p:nvSpPr>
+          <p:cNvPr id="11" name="TextBox 10">
+            <a:extLst>
+              <a:ext uri="{FF2B5EF4-FFF2-40B4-BE49-F238E27FC236}">
+                <a16:creationId xmlns:a16="http://schemas.microsoft.com/office/drawing/2014/main" id="{835052C0-E9D3-B22C-5F49-354F2E60E1CC}"/>
+              </a:ext>
+            </a:extLst>
+          </p:cNvPr>
+          <p:cNvSpPr txBox="1"/>
+          <p:nvPr/>
+        </p:nvSpPr>
+        <p:spPr>
+          <a:xfrm>
+            <a:off x="812800" y="683225"/>
+            <a:ext cx="10414000" cy="944951"/>
+          </a:xfrm>
+          <a:prstGeom prst="rect">
+            <a:avLst/>
+          </a:prstGeom>
+          <a:solidFill>
+            <a:scrgbClr r="0" g="0" b="0">
+              <a:alpha val="0"/>
+            </a:scrgbClr>
+          </a:solidFill>
+          <a:ln w="15875">
+            <a:noFill/>
+          </a:ln>
+          <a:effectLst/>
+        </p:spPr>
+        <p:txBody>
+          <a:bodyPr vert="horz" wrap="square" lIns="0" tIns="0" rIns="0" bIns="0" rtlCol="0">
+            <a:noAutofit/>
+          </a:bodyPr>
+          <a:lstStyle/>
+          <a:p>
+            <a:r>
+              <a:rPr lang="en-US" sz="2800" b="1" dirty="0">
+                <a:solidFill>
+                  <a:srgbClr val="142D4E"/>
+                </a:solidFill>
+                <a:latin typeface="Aptos Display" panose="020B0004020202020204" pitchFamily="34" charset="0"/>
+              </a:rPr>
+              <a:t>Grafana Dashboard</a:t>
+            </a:r>
+          </a:p>
+        </p:txBody>
+      </p:sp>
+      <p:sp>
+        <p:nvSpPr>
+          <p:cNvPr id="40" name="codex_template_top_accent">
+            <a:extLst>
+              <a:ext uri="{FF2B5EF4-FFF2-40B4-BE49-F238E27FC236}">
+                <a16:creationId xmlns:a16="http://schemas.microsoft.com/office/drawing/2014/main" id="{7F199F18-44E3-5B18-434C-1614310EFDB3}"/>
+              </a:ext>
+            </a:extLst>
+          </p:cNvPr>
+          <p:cNvSpPr/>
+          <p:nvPr/>
+        </p:nvSpPr>
+        <p:spPr>
+          <a:xfrm>
+            <a:off x="0" y="-34296"/>
+            <a:ext cx="12192000" cy="157493"/>
+          </a:xfrm>
+          <a:prstGeom prst="rect">
+            <a:avLst/>
+          </a:prstGeom>
+          <a:solidFill>
+            <a:srgbClr val="00A9E0"/>
+          </a:solidFill>
+          <a:ln w="25400" cap="flat" cmpd="sng" algn="ctr">
+            <a:noFill/>
+            <a:prstDash val="solid"/>
+          </a:ln>
+          <a:effectLst/>
+          <a:extLst>
+            <a:ext uri="{91240B29-F687-4F45-9708-019B960494DF}">
+              <a14:hiddenLine xmlns:a14="http://schemas.microsoft.com/office/drawing/2010/main" w="25400" cap="flat" cmpd="sng" algn="ctr">
+                <a:solidFill>
+                  <a:schemeClr val="accent1">
+                    <a:shade val="15000"/>
+                  </a:schemeClr>
+                </a:solidFill>
+                <a:prstDash val="solid"/>
+              </a14:hiddenLine>
+            </a:ext>
+          </a:extLst>
+        </p:spPr>
+        <p:style>
+          <a:lnRef idx="2">
+            <a:schemeClr val="accent1">
+              <a:shade val="15000"/>
+            </a:schemeClr>
+          </a:lnRef>
+          <a:fillRef idx="1">
+            <a:schemeClr val="accent1"/>
+          </a:fillRef>
+          <a:effectRef idx="0">
+            <a:schemeClr val="accent1"/>
+          </a:effectRef>
+          <a:fontRef idx="minor">
+            <a:schemeClr val="lt1"/>
+          </a:fontRef>
+        </p:style>
+        <p:txBody>
+          <a:bodyPr rtlCol="0" anchor="ctr"/>
+          <a:lstStyle/>
+          <a:p>
+            <a:pPr algn="ctr"/>
+            <a:endParaRPr lang="en-US"/>
+          </a:p>
+        </p:txBody>
+      </p:sp>
+      <p:sp>
+        <p:nvSpPr>
+          <p:cNvPr id="42" name="codex_template_footer">
+            <a:extLst>
+              <a:ext uri="{FF2B5EF4-FFF2-40B4-BE49-F238E27FC236}">
+                <a16:creationId xmlns:a16="http://schemas.microsoft.com/office/drawing/2014/main" id="{C41B9876-0BB1-649C-D632-B4D34897C01B}"/>
+              </a:ext>
+            </a:extLst>
+          </p:cNvPr>
+          <p:cNvSpPr txBox="1"/>
+          <p:nvPr/>
+        </p:nvSpPr>
+        <p:spPr>
+          <a:xfrm>
+            <a:off x="355600" y="6470086"/>
+            <a:ext cx="10668000" cy="381673"/>
+          </a:xfrm>
+          <a:prstGeom prst="rect">
+            <a:avLst/>
+          </a:prstGeom>
+          <a:noFill/>
+        </p:spPr>
+        <p:txBody>
+          <a:bodyPr vert="horz" rtlCol="0">
+            <a:spAutoFit/>
+          </a:bodyPr>
+          <a:lstStyle/>
+          <a:p>
+            <a:r>
+              <a:rPr lang="en-US" sz="800">
+                <a:solidFill>
+                  <a:srgbClr val="566982"/>
+                </a:solidFill>
+                <a:latin typeface="Aptos" panose="020B0004020202020204" pitchFamily="34" charset="0"/>
+              </a:rPr>
+              <a:t>Enterprise Reconciliation Platform | Principal Engineer / Architect Assessment</a:t>
+            </a:r>
+          </a:p>
+        </p:txBody>
+      </p:sp>
+      <p:sp>
+        <p:nvSpPr>
+          <p:cNvPr id="43" name="codex_template_slide_number">
+            <a:extLst>
+              <a:ext uri="{FF2B5EF4-FFF2-40B4-BE49-F238E27FC236}">
+                <a16:creationId xmlns:a16="http://schemas.microsoft.com/office/drawing/2014/main" id="{05EA4441-396F-95A7-567B-F33FCF76514A}"/>
+              </a:ext>
+            </a:extLst>
+          </p:cNvPr>
+          <p:cNvSpPr txBox="1"/>
+          <p:nvPr/>
+        </p:nvSpPr>
+        <p:spPr>
+          <a:xfrm>
+            <a:off x="11557000" y="6470086"/>
+            <a:ext cx="355600" cy="381673"/>
+          </a:xfrm>
+          <a:prstGeom prst="rect">
+            <a:avLst/>
+          </a:prstGeom>
+          <a:noFill/>
+        </p:spPr>
+        <p:txBody>
+          <a:bodyPr vert="horz" rtlCol="0">
+            <a:spAutoFit/>
+          </a:bodyPr>
+          <a:lstStyle/>
+          <a:p>
+            <a:r>
+              <a:rPr lang="en-US" sz="800">
+                <a:solidFill>
+                  <a:srgbClr val="566982"/>
+                </a:solidFill>
+                <a:latin typeface="Aptos" panose="020B0004020202020204" pitchFamily="34" charset="0"/>
+              </a:rPr>
+              <a:t>20</a:t>
+            </a:r>
+          </a:p>
+        </p:txBody>
+      </p:sp>
+      <p:cxnSp>
+        <p:nvCxnSpPr>
+          <p:cNvPr id="44" name="codex_template_title_rule">
+            <a:extLst>
+              <a:ext uri="{FF2B5EF4-FFF2-40B4-BE49-F238E27FC236}">
+                <a16:creationId xmlns:a16="http://schemas.microsoft.com/office/drawing/2014/main" id="{419AF9DA-D6D0-9F58-B2C1-7189AEB8395D}"/>
+              </a:ext>
+            </a:extLst>
+          </p:cNvPr>
+          <p:cNvCxnSpPr/>
+          <p:nvPr/>
+        </p:nvCxnSpPr>
+        <p:spPr>
+          <a:xfrm>
+            <a:off x="812800" y="1218659"/>
+            <a:ext cx="4648200" cy="0"/>
+          </a:xfrm>
+          <a:prstGeom prst="line">
+            <a:avLst/>
+          </a:prstGeom>
+          <a:ln w="27940">
+            <a:solidFill>
+              <a:srgbClr val="00A9E0"/>
+            </a:solidFill>
+          </a:ln>
+        </p:spPr>
+        <p:style>
+          <a:lnRef idx="1">
+            <a:schemeClr val="accent1"/>
+          </a:lnRef>
+          <a:fillRef idx="0">
+            <a:schemeClr val="accent1"/>
+          </a:fillRef>
+          <a:effectRef idx="0">
+            <a:schemeClr val="accent1"/>
+          </a:effectRef>
+          <a:fontRef idx="minor">
+            <a:schemeClr val="tx1"/>
+          </a:fontRef>
+        </p:style>
+      </p:cxnSp>
+      <p:pic>
+        <p:nvPicPr>
+          <p:cNvPr id="3" name="Picture 2">
+            <a:extLst>
+              <a:ext uri="{FF2B5EF4-FFF2-40B4-BE49-F238E27FC236}">
+                <a16:creationId xmlns:a16="http://schemas.microsoft.com/office/drawing/2014/main" id="{0AB9025C-5FB3-0CB9-56CB-D139A29F2E20}"/>
+              </a:ext>
+            </a:extLst>
+          </p:cNvPr>
+          <p:cNvPicPr>
+            <a:picLocks noChangeAspect="1"/>
+          </p:cNvPicPr>
+          <p:nvPr/>
+        </p:nvPicPr>
+        <p:blipFill>
+          <a:blip r:embed="rId2"/>
+          <a:stretch>
+            <a:fillRect/>
+          </a:stretch>
+        </p:blipFill>
+        <p:spPr>
+          <a:xfrm>
+            <a:off x="812800" y="1454024"/>
+            <a:ext cx="10344826" cy="4923765"/>
+          </a:xfrm>
+          <a:prstGeom prst="rect">
+            <a:avLst/>
+          </a:prstGeom>
+        </p:spPr>
+      </p:pic>
+    </p:spTree>
+    <p:extLst>
+      <p:ext uri="{BB962C8B-B14F-4D97-AF65-F5344CB8AC3E}">
+        <p14:creationId xmlns:p14="http://schemas.microsoft.com/office/powerpoint/2010/main" val="2605003993"/>
+      </p:ext>
+    </p:extLst>
+  </p:cSld>
+  <p:clrMapOvr>
+    <a:masterClrMapping/>
+  </p:clrMapOvr>
+</p:sld>
+</file>
+
+<file path=ppt/slides/slide22.xml><?xml version="1.0" encoding="utf-8"?>
 <p:sld xmlns:a="http://schemas.openxmlformats.org/drawingml/2006/main" xmlns:r="http://schemas.openxmlformats.org/officeDocument/2006/relationships" xmlns:p="http://schemas.openxmlformats.org/presentationml/2006/main">
   <p:cSld>
     <p:spTree>
@@ -33157,7 +33845,7 @@
         <p:spPr>
           <a:xfrm>
             <a:off x="1365250" y="2927746"/>
-            <a:ext cx="4635500" cy="1231106"/>
+            <a:ext cx="4105477" cy="1231106"/>
           </a:xfrm>
           <a:prstGeom prst="rect">
             <a:avLst/>

--- a/Reconciliation_Platform_Technical_Architecture_Overview.pptx
+++ b/Reconciliation_Platform_Technical_Architecture_Overview.pptx
@@ -15443,7 +15443,7 @@
 </file>
 
 <file path=ppt/slides/slide1.xml><?xml version="1.0" encoding="utf-8"?>
-<p:sld xmlns:a="http://schemas.openxmlformats.org/drawingml/2006/main" xmlns:r="http://schemas.openxmlformats.org/officeDocument/2006/relationships" xmlns:p="http://schemas.openxmlformats.org/presentationml/2006/main">
+<p:sld xmlns:a="http://schemas.openxmlformats.org/drawingml/2006/main" xmlns:ns2="http://schemas.microsoft.com/office/drawing/2014/main" xmlns:ns3="http://schemas.microsoft.com/office/drawing/2010/main" xmlns:p="http://schemas.openxmlformats.org/presentationml/2006/main">
   <p:cSld>
     <p:bg>
       <p:bgPr>
@@ -15474,7 +15474,7 @@
           <p:cNvPr id="10" name="codex_template_right_wash">
             <a:extLst>
               <a:ext uri="{FF2B5EF4-FFF2-40B4-BE49-F238E27FC236}">
-                <a16:creationId xmlns:a16="http://schemas.microsoft.com/office/drawing/2014/main" id="{7C28D89D-9EED-8BD6-B855-EFE08F512EB9}"/>
+                <ns2:creationId id="{7C28D89D-9EED-8BD6-B855-EFE08F512EB9}"/>
               </a:ext>
             </a:extLst>
           </p:cNvPr>
@@ -15496,19 +15496,18 @@
           </a:solidFill>
           <a:ln w="25400" cap="flat" cmpd="sng" algn="ctr">
             <a:noFill/>
-            <a:prstDash val="solid"/>
           </a:ln>
           <a:effectLst/>
           <a:extLst>
             <a:ext uri="{91240B29-F687-4F45-9708-019B960494DF}">
-              <a14:hiddenLine xmlns:a14="http://schemas.microsoft.com/office/drawing/2010/main" w="25400" cap="flat" cmpd="sng" algn="ctr">
+              <ns3:hiddenLine w="25400" cap="flat" cmpd="sng" algn="ctr">
                 <a:solidFill>
                   <a:schemeClr val="accent1">
                     <a:shade val="15000"/>
                   </a:schemeClr>
                 </a:solidFill>
                 <a:prstDash val="solid"/>
-              </a14:hiddenLine>
+              </ns3:hiddenLine>
             </a:ext>
           </a:extLst>
         </p:spPr>
@@ -15542,7 +15541,7 @@
           <p:cNvPr id="9" name="codex_template_header_band">
             <a:extLst>
               <a:ext uri="{FF2B5EF4-FFF2-40B4-BE49-F238E27FC236}">
-                <a16:creationId xmlns:a16="http://schemas.microsoft.com/office/drawing/2014/main" id="{FAED20DF-A56C-6F85-1DDB-5175CC5D3734}"/>
+                <ns2:creationId id="{FAED20DF-A56C-6F85-1DDB-5175CC5D3734}"/>
               </a:ext>
             </a:extLst>
           </p:cNvPr>
@@ -15564,19 +15563,18 @@
           </a:solidFill>
           <a:ln w="25400" cap="flat" cmpd="sng" algn="ctr">
             <a:noFill/>
-            <a:prstDash val="solid"/>
           </a:ln>
           <a:effectLst/>
           <a:extLst>
             <a:ext uri="{91240B29-F687-4F45-9708-019B960494DF}">
-              <a14:hiddenLine xmlns:a14="http://schemas.microsoft.com/office/drawing/2010/main" w="25400" cap="flat" cmpd="sng" algn="ctr">
+              <ns3:hiddenLine w="25400" cap="flat" cmpd="sng" algn="ctr">
                 <a:solidFill>
                   <a:schemeClr val="accent1">
                     <a:shade val="15000"/>
                   </a:schemeClr>
                 </a:solidFill>
                 <a:prstDash val="solid"/>
-              </a14:hiddenLine>
+              </ns3:hiddenLine>
             </a:ext>
           </a:extLst>
         </p:spPr>
@@ -15610,7 +15608,7 @@
           <p:cNvPr id="7" name="codex_template_background">
             <a:extLst>
               <a:ext uri="{FF2B5EF4-FFF2-40B4-BE49-F238E27FC236}">
-                <a16:creationId xmlns:a16="http://schemas.microsoft.com/office/drawing/2014/main" id="{9010C6DA-44AD-C6A9-652E-FED666D7DA23}"/>
+                <ns2:creationId id="{9010C6DA-44AD-C6A9-652E-FED666D7DA23}"/>
               </a:ext>
             </a:extLst>
           </p:cNvPr>
@@ -15630,19 +15628,18 @@
           </a:solidFill>
           <a:ln w="25400" cap="flat" cmpd="sng" algn="ctr">
             <a:noFill/>
-            <a:prstDash val="solid"/>
           </a:ln>
           <a:effectLst/>
           <a:extLst>
             <a:ext uri="{91240B29-F687-4F45-9708-019B960494DF}">
-              <a14:hiddenLine xmlns:a14="http://schemas.microsoft.com/office/drawing/2010/main" w="25400" cap="flat" cmpd="sng" algn="ctr">
+              <ns3:hiddenLine w="25400" cap="flat" cmpd="sng" algn="ctr">
                 <a:solidFill>
                   <a:schemeClr val="accent1">
                     <a:shade val="15000"/>
                   </a:schemeClr>
                 </a:solidFill>
                 <a:prstDash val="solid"/>
-              </a14:hiddenLine>
+              </ns3:hiddenLine>
             </a:ext>
           </a:extLst>
         </p:spPr>
@@ -15676,7 +15673,7 @@
           <p:cNvPr id="11" name="codex_template_top_accent">
             <a:extLst>
               <a:ext uri="{FF2B5EF4-FFF2-40B4-BE49-F238E27FC236}">
-                <a16:creationId xmlns:a16="http://schemas.microsoft.com/office/drawing/2014/main" id="{C55C2CAD-DF7A-E085-C2C0-7709C6505C6A}"/>
+                <ns2:creationId id="{C55C2CAD-DF7A-E085-C2C0-7709C6505C6A}"/>
               </a:ext>
             </a:extLst>
           </p:cNvPr>
@@ -15696,19 +15693,18 @@
           </a:solidFill>
           <a:ln w="25400" cap="flat" cmpd="sng" algn="ctr">
             <a:noFill/>
-            <a:prstDash val="solid"/>
           </a:ln>
           <a:effectLst/>
           <a:extLst>
             <a:ext uri="{91240B29-F687-4F45-9708-019B960494DF}">
-              <a14:hiddenLine xmlns:a14="http://schemas.microsoft.com/office/drawing/2010/main" w="25400" cap="flat" cmpd="sng" algn="ctr">
+              <ns3:hiddenLine w="25400" cap="flat" cmpd="sng" algn="ctr">
                 <a:solidFill>
                   <a:schemeClr val="accent1">
                     <a:shade val="15000"/>
                   </a:schemeClr>
                 </a:solidFill>
                 <a:prstDash val="solid"/>
-              </a14:hiddenLine>
+              </ns3:hiddenLine>
             </a:ext>
           </a:extLst>
         </p:spPr>
@@ -15742,7 +15738,7 @@
           <p:cNvPr id="12" name="codex_template_header_line">
             <a:extLst>
               <a:ext uri="{FF2B5EF4-FFF2-40B4-BE49-F238E27FC236}">
-                <a16:creationId xmlns:a16="http://schemas.microsoft.com/office/drawing/2014/main" id="{6B552112-F23E-8EF5-A746-83A124FEF3B6}"/>
+                <ns2:creationId id="{6B552112-F23E-8EF5-A746-83A124FEF3B6}"/>
               </a:ext>
             </a:extLst>
           </p:cNvPr>
@@ -15783,7 +15779,7 @@
           <p:cNvPr id="13" name="codex_template_footer">
             <a:extLst>
               <a:ext uri="{FF2B5EF4-FFF2-40B4-BE49-F238E27FC236}">
-                <a16:creationId xmlns:a16="http://schemas.microsoft.com/office/drawing/2014/main" id="{F568119D-C3E2-0328-0DFA-C4E086771A9C}"/>
+                <ns2:creationId id="{F568119D-C3E2-0328-0DFA-C4E086771A9C}"/>
               </a:ext>
             </a:extLst>
           </p:cNvPr>
@@ -15823,7 +15819,7 @@
           <p:cNvPr id="14" name="codex_template_slide_number">
             <a:extLst>
               <a:ext uri="{FF2B5EF4-FFF2-40B4-BE49-F238E27FC236}">
-                <a16:creationId xmlns:a16="http://schemas.microsoft.com/office/drawing/2014/main" id="{53053DDA-87AB-D745-787D-158B10953BAE}"/>
+                <ns2:creationId id="{53053DDA-87AB-D745-787D-158B10953BAE}"/>
               </a:ext>
             </a:extLst>
           </p:cNvPr>
@@ -15863,7 +15859,7 @@
           <p:cNvPr id="15" name="TextBox 14">
             <a:extLst>
               <a:ext uri="{FF2B5EF4-FFF2-40B4-BE49-F238E27FC236}">
-                <a16:creationId xmlns:a16="http://schemas.microsoft.com/office/drawing/2014/main" id="{11DD7235-11B4-CA34-1C7F-3AE4DABC867A}"/>
+                <ns2:creationId id="{11DD7235-11B4-CA34-1C7F-3AE4DABC867A}"/>
               </a:ext>
             </a:extLst>
           </p:cNvPr>
@@ -15903,7 +15899,7 @@
           <p:cNvPr id="16" name="Straight Connector 15">
             <a:extLst>
               <a:ext uri="{FF2B5EF4-FFF2-40B4-BE49-F238E27FC236}">
-                <a16:creationId xmlns:a16="http://schemas.microsoft.com/office/drawing/2014/main" id="{D5023623-F96C-984D-42A6-74A34E2FEE9F}"/>
+                <ns2:creationId id="{D5023623-F96C-984D-42A6-74A34E2FEE9F}"/>
               </a:ext>
             </a:extLst>
           </p:cNvPr>
@@ -15944,7 +15940,7 @@
           <p:cNvPr id="17" name="TextBox 16">
             <a:extLst>
               <a:ext uri="{FF2B5EF4-FFF2-40B4-BE49-F238E27FC236}">
-                <a16:creationId xmlns:a16="http://schemas.microsoft.com/office/drawing/2014/main" id="{7702080C-47D2-4597-AD69-74AAF9EE6E43}"/>
+                <ns2:creationId id="{7702080C-47D2-4597-AD69-74AAF9EE6E43}"/>
               </a:ext>
             </a:extLst>
           </p:cNvPr>
@@ -15995,7 +15991,7 @@
           <p:cNvPr id="18" name="TextBox 17">
             <a:extLst>
               <a:ext uri="{FF2B5EF4-FFF2-40B4-BE49-F238E27FC236}">
-                <a16:creationId xmlns:a16="http://schemas.microsoft.com/office/drawing/2014/main" id="{674F6952-ECC0-7627-48AB-8A57BC37823E}"/>
+                <ns2:creationId id="{674F6952-ECC0-7627-48AB-8A57BC37823E}"/>
               </a:ext>
             </a:extLst>
           </p:cNvPr>
@@ -16039,7 +16035,7 @@
 </file>
 
 <file path=ppt/slides/slide10.xml><?xml version="1.0" encoding="utf-8"?>
-<p:sld xmlns:a="http://schemas.openxmlformats.org/drawingml/2006/main" xmlns:r="http://schemas.openxmlformats.org/officeDocument/2006/relationships" xmlns:p="http://schemas.openxmlformats.org/presentationml/2006/main">
+<p:sld xmlns:a="http://schemas.openxmlformats.org/drawingml/2006/main" xmlns:ns2="http://schemas.microsoft.com/office/drawing/2014/main" xmlns:ns3="http://schemas.microsoft.com/office/drawing/2010/main" xmlns:ns4="http://schemas.microsoft.com/office/powerpoint/2010/main" xmlns:p="http://schemas.openxmlformats.org/presentationml/2006/main">
   <p:cSld>
     <p:spTree>
       <p:nvGrpSpPr>
@@ -16060,7 +16056,7 @@
           <p:cNvPr id="28" name="codex_template_right_wash">
             <a:extLst>
               <a:ext uri="{FF2B5EF4-FFF2-40B4-BE49-F238E27FC236}">
-                <a16:creationId xmlns:a16="http://schemas.microsoft.com/office/drawing/2014/main" id="{E29900C0-4573-0C87-0993-870D2CAE2B90}"/>
+                <ns2:creationId id="{E29900C0-4573-0C87-0993-870D2CAE2B90}"/>
               </a:ext>
             </a:extLst>
           </p:cNvPr>
@@ -16082,19 +16078,18 @@
           </a:solidFill>
           <a:ln w="25400" cap="flat" cmpd="sng" algn="ctr">
             <a:noFill/>
-            <a:prstDash val="solid"/>
           </a:ln>
           <a:effectLst/>
           <a:extLst>
             <a:ext uri="{91240B29-F687-4F45-9708-019B960494DF}">
-              <a14:hiddenLine xmlns:a14="http://schemas.microsoft.com/office/drawing/2010/main" w="25400" cap="flat" cmpd="sng" algn="ctr">
+              <ns3:hiddenLine w="25400" cap="flat" cmpd="sng" algn="ctr">
                 <a:solidFill>
                   <a:schemeClr val="accent1">
                     <a:shade val="15000"/>
                   </a:schemeClr>
                 </a:solidFill>
                 <a:prstDash val="solid"/>
-              </a14:hiddenLine>
+              </ns3:hiddenLine>
             </a:ext>
           </a:extLst>
         </p:spPr>
@@ -16128,7 +16123,7 @@
           <p:cNvPr id="27" name="codex_template_header_band">
             <a:extLst>
               <a:ext uri="{FF2B5EF4-FFF2-40B4-BE49-F238E27FC236}">
-                <a16:creationId xmlns:a16="http://schemas.microsoft.com/office/drawing/2014/main" id="{4E5BA983-4732-E826-587D-8846727C904B}"/>
+                <ns2:creationId id="{4E5BA983-4732-E826-587D-8846727C904B}"/>
               </a:ext>
             </a:extLst>
           </p:cNvPr>
@@ -16150,19 +16145,18 @@
           </a:solidFill>
           <a:ln w="25400" cap="flat" cmpd="sng" algn="ctr">
             <a:noFill/>
-            <a:prstDash val="solid"/>
           </a:ln>
           <a:effectLst/>
           <a:extLst>
             <a:ext uri="{91240B29-F687-4F45-9708-019B960494DF}">
-              <a14:hiddenLine xmlns:a14="http://schemas.microsoft.com/office/drawing/2010/main" w="25400" cap="flat" cmpd="sng" algn="ctr">
+              <ns3:hiddenLine w="25400" cap="flat" cmpd="sng" algn="ctr">
                 <a:solidFill>
                   <a:schemeClr val="accent1">
                     <a:shade val="15000"/>
                   </a:schemeClr>
                 </a:solidFill>
                 <a:prstDash val="solid"/>
-              </a14:hiddenLine>
+              </ns3:hiddenLine>
             </a:ext>
           </a:extLst>
         </p:spPr>
@@ -16196,7 +16190,7 @@
           <p:cNvPr id="26" name="codex_template_background">
             <a:extLst>
               <a:ext uri="{FF2B5EF4-FFF2-40B4-BE49-F238E27FC236}">
-                <a16:creationId xmlns:a16="http://schemas.microsoft.com/office/drawing/2014/main" id="{060C68B8-149D-571C-A9CB-D37D98542FBC}"/>
+                <ns2:creationId id="{060C68B8-149D-571C-A9CB-D37D98542FBC}"/>
               </a:ext>
             </a:extLst>
           </p:cNvPr>
@@ -16216,19 +16210,18 @@
           </a:solidFill>
           <a:ln w="25400" cap="flat" cmpd="sng" algn="ctr">
             <a:noFill/>
-            <a:prstDash val="solid"/>
           </a:ln>
           <a:effectLst/>
           <a:extLst>
             <a:ext uri="{91240B29-F687-4F45-9708-019B960494DF}">
-              <a14:hiddenLine xmlns:a14="http://schemas.microsoft.com/office/drawing/2010/main" w="25400" cap="flat" cmpd="sng" algn="ctr">
+              <ns3:hiddenLine w="25400" cap="flat" cmpd="sng" algn="ctr">
                 <a:solidFill>
                   <a:schemeClr val="accent1">
                     <a:shade val="15000"/>
                   </a:schemeClr>
                 </a:solidFill>
                 <a:prstDash val="solid"/>
-              </a14:hiddenLine>
+              </ns3:hiddenLine>
             </a:ext>
           </a:extLst>
         </p:spPr>
@@ -16262,7 +16255,7 @@
           <p:cNvPr id="11" name="TextBox 10">
             <a:extLst>
               <a:ext uri="{FF2B5EF4-FFF2-40B4-BE49-F238E27FC236}">
-                <a16:creationId xmlns:a16="http://schemas.microsoft.com/office/drawing/2014/main" id="{CD5AB5F2-AE25-65E4-2849-4025349B0CAA}"/>
+                <ns2:creationId id="{CD5AB5F2-AE25-65E4-2849-4025349B0CAA}"/>
               </a:ext>
             </a:extLst>
           </p:cNvPr>
@@ -16310,7 +16303,7 @@
           <p:cNvPr id="14" name="Rectangle: Rounded Corners 13">
             <a:extLst>
               <a:ext uri="{FF2B5EF4-FFF2-40B4-BE49-F238E27FC236}">
-                <a16:creationId xmlns:a16="http://schemas.microsoft.com/office/drawing/2014/main" id="{19DC7CC3-99B2-6E4B-39D3-85665D44B1BE}"/>
+                <ns2:creationId id="{19DC7CC3-99B2-6E4B-39D3-85665D44B1BE}"/>
               </a:ext>
             </a:extLst>
           </p:cNvPr>
@@ -16341,12 +16334,12 @@
           </a:effectLst>
           <a:extLst>
             <a:ext uri="{91240B29-F687-4F45-9708-019B960494DF}">
-              <a14:hiddenLine xmlns:a14="http://schemas.microsoft.com/office/drawing/2010/main" w="15875" cap="flat" cmpd="sng" algn="ctr">
+              <ns3:hiddenLine w="15875" cap="flat" cmpd="sng" algn="ctr">
                 <a:solidFill>
                   <a:srgbClr val="EE9726"/>
                 </a:solidFill>
                 <a:prstDash val="solid"/>
-              </a14:hiddenLine>
+              </ns3:hiddenLine>
             </a:ext>
           </a:extLst>
         </p:spPr>
@@ -16402,7 +16395,7 @@
           <p:cNvPr id="15" name="Rectangle: Rounded Corners 14">
             <a:extLst>
               <a:ext uri="{FF2B5EF4-FFF2-40B4-BE49-F238E27FC236}">
-                <a16:creationId xmlns:a16="http://schemas.microsoft.com/office/drawing/2014/main" id="{8A373127-503C-F6BD-F93D-CC382829620E}"/>
+                <ns2:creationId id="{8A373127-503C-F6BD-F93D-CC382829620E}"/>
               </a:ext>
             </a:extLst>
           </p:cNvPr>
@@ -16433,12 +16426,12 @@
           </a:effectLst>
           <a:extLst>
             <a:ext uri="{91240B29-F687-4F45-9708-019B960494DF}">
-              <a14:hiddenLine xmlns:a14="http://schemas.microsoft.com/office/drawing/2010/main" w="15875" cap="flat" cmpd="sng" algn="ctr">
+              <ns3:hiddenLine w="15875" cap="flat" cmpd="sng" algn="ctr">
                 <a:solidFill>
                   <a:srgbClr val="EE9726"/>
                 </a:solidFill>
                 <a:prstDash val="solid"/>
-              </a14:hiddenLine>
+              </ns3:hiddenLine>
             </a:ext>
           </a:extLst>
         </p:spPr>
@@ -16494,7 +16487,7 @@
           <p:cNvPr id="16" name="Rectangle: Rounded Corners 15">
             <a:extLst>
               <a:ext uri="{FF2B5EF4-FFF2-40B4-BE49-F238E27FC236}">
-                <a16:creationId xmlns:a16="http://schemas.microsoft.com/office/drawing/2014/main" id="{12A77A74-DBAA-094D-394E-524B31199C2E}"/>
+                <ns2:creationId id="{12A77A74-DBAA-094D-394E-524B31199C2E}"/>
               </a:ext>
             </a:extLst>
           </p:cNvPr>
@@ -16525,12 +16518,12 @@
           </a:effectLst>
           <a:extLst>
             <a:ext uri="{91240B29-F687-4F45-9708-019B960494DF}">
-              <a14:hiddenLine xmlns:a14="http://schemas.microsoft.com/office/drawing/2010/main" w="15875" cap="flat" cmpd="sng" algn="ctr">
+              <ns3:hiddenLine w="15875" cap="flat" cmpd="sng" algn="ctr">
                 <a:solidFill>
                   <a:srgbClr val="D54F4F"/>
                 </a:solidFill>
                 <a:prstDash val="solid"/>
-              </a14:hiddenLine>
+              </ns3:hiddenLine>
             </a:ext>
           </a:extLst>
         </p:spPr>
@@ -16586,7 +16579,7 @@
           <p:cNvPr id="17" name="Rectangle: Rounded Corners 16">
             <a:extLst>
               <a:ext uri="{FF2B5EF4-FFF2-40B4-BE49-F238E27FC236}">
-                <a16:creationId xmlns:a16="http://schemas.microsoft.com/office/drawing/2014/main" id="{CBC94CEB-DC37-9919-7854-EF27BD295932}"/>
+                <ns2:creationId id="{CBC94CEB-DC37-9919-7854-EF27BD295932}"/>
               </a:ext>
             </a:extLst>
           </p:cNvPr>
@@ -16617,12 +16610,12 @@
           </a:effectLst>
           <a:extLst>
             <a:ext uri="{91240B29-F687-4F45-9708-019B960494DF}">
-              <a14:hiddenLine xmlns:a14="http://schemas.microsoft.com/office/drawing/2010/main" w="15875" cap="flat" cmpd="sng" algn="ctr">
+              <ns3:hiddenLine w="15875" cap="flat" cmpd="sng" algn="ctr">
                 <a:solidFill>
                   <a:srgbClr val="D54F4F"/>
                 </a:solidFill>
                 <a:prstDash val="solid"/>
-              </a14:hiddenLine>
+              </ns3:hiddenLine>
             </a:ext>
           </a:extLst>
         </p:spPr>
@@ -16678,7 +16671,7 @@
           <p:cNvPr id="18" name="Straight Connector 17">
             <a:extLst>
               <a:ext uri="{FF2B5EF4-FFF2-40B4-BE49-F238E27FC236}">
-                <a16:creationId xmlns:a16="http://schemas.microsoft.com/office/drawing/2014/main" id="{7A37DF9F-AE22-F67E-4BF6-F759FBE2AE54}"/>
+                <ns2:creationId id="{7A37DF9F-AE22-F67E-4BF6-F759FBE2AE54}"/>
               </a:ext>
             </a:extLst>
           </p:cNvPr>
@@ -16720,7 +16713,7 @@
           <p:cNvPr id="19" name="Straight Connector 18">
             <a:extLst>
               <a:ext uri="{FF2B5EF4-FFF2-40B4-BE49-F238E27FC236}">
-                <a16:creationId xmlns:a16="http://schemas.microsoft.com/office/drawing/2014/main" id="{36BEE6D5-A77F-887C-7AB2-E0146FE2E28E}"/>
+                <ns2:creationId id="{36BEE6D5-A77F-887C-7AB2-E0146FE2E28E}"/>
               </a:ext>
             </a:extLst>
           </p:cNvPr>
@@ -16762,7 +16755,7 @@
           <p:cNvPr id="20" name="Straight Connector 19">
             <a:extLst>
               <a:ext uri="{FF2B5EF4-FFF2-40B4-BE49-F238E27FC236}">
-                <a16:creationId xmlns:a16="http://schemas.microsoft.com/office/drawing/2014/main" id="{AD8BEA6F-65B5-7C87-DBF9-9A2D8B25AE83}"/>
+                <ns2:creationId id="{AD8BEA6F-65B5-7C87-DBF9-9A2D8B25AE83}"/>
               </a:ext>
             </a:extLst>
           </p:cNvPr>
@@ -16804,7 +16797,7 @@
           <p:cNvPr id="21" name="Rectangle: Rounded Corners 20">
             <a:extLst>
               <a:ext uri="{FF2B5EF4-FFF2-40B4-BE49-F238E27FC236}">
-                <a16:creationId xmlns:a16="http://schemas.microsoft.com/office/drawing/2014/main" id="{20B9C1A5-CC25-DB3B-BA40-0B9A0BF2C5DB}"/>
+                <ns2:creationId id="{20B9C1A5-CC25-DB3B-BA40-0B9A0BF2C5DB}"/>
               </a:ext>
             </a:extLst>
           </p:cNvPr>
@@ -16835,12 +16828,12 @@
           </a:effectLst>
           <a:extLst>
             <a:ext uri="{91240B29-F687-4F45-9708-019B960494DF}">
-              <a14:hiddenLine xmlns:a14="http://schemas.microsoft.com/office/drawing/2010/main" w="15875" cap="flat" cmpd="sng" algn="ctr">
+              <ns3:hiddenLine w="15875" cap="flat" cmpd="sng" algn="ctr">
                 <a:solidFill>
                   <a:srgbClr val="5B6E86"/>
                 </a:solidFill>
                 <a:prstDash val="solid"/>
-              </a14:hiddenLine>
+              </ns3:hiddenLine>
             </a:ext>
           </a:extLst>
         </p:spPr>
@@ -16956,7 +16949,7 @@
           <p:cNvPr id="22" name="Rectangle: Rounded Corners 21">
             <a:extLst>
               <a:ext uri="{FF2B5EF4-FFF2-40B4-BE49-F238E27FC236}">
-                <a16:creationId xmlns:a16="http://schemas.microsoft.com/office/drawing/2014/main" id="{7D2824E3-12F7-DA24-6CF1-7ECB78E21990}"/>
+                <ns2:creationId id="{7D2824E3-12F7-DA24-6CF1-7ECB78E21990}"/>
               </a:ext>
             </a:extLst>
           </p:cNvPr>
@@ -16987,12 +16980,12 @@
           </a:effectLst>
           <a:extLst>
             <a:ext uri="{91240B29-F687-4F45-9708-019B960494DF}">
-              <a14:hiddenLine xmlns:a14="http://schemas.microsoft.com/office/drawing/2010/main" w="15875" cap="flat" cmpd="sng" algn="ctr">
+              <ns3:hiddenLine w="15875" cap="flat" cmpd="sng" algn="ctr">
                 <a:solidFill>
                   <a:srgbClr val="009988"/>
                 </a:solidFill>
                 <a:prstDash val="solid"/>
-              </a14:hiddenLine>
+              </ns3:hiddenLine>
             </a:ext>
           </a:extLst>
         </p:spPr>
@@ -17096,7 +17089,7 @@
           <p:cNvPr id="23" name="Rectangle: Rounded Corners 22">
             <a:extLst>
               <a:ext uri="{FF2B5EF4-FFF2-40B4-BE49-F238E27FC236}">
-                <a16:creationId xmlns:a16="http://schemas.microsoft.com/office/drawing/2014/main" id="{8811EF0F-C68D-D37A-1AAA-2C073C6E98AD}"/>
+                <ns2:creationId id="{8811EF0F-C68D-D37A-1AAA-2C073C6E98AD}"/>
               </a:ext>
             </a:extLst>
           </p:cNvPr>
@@ -17127,12 +17120,12 @@
           </a:effectLst>
           <a:extLst>
             <a:ext uri="{91240B29-F687-4F45-9708-019B960494DF}">
-              <a14:hiddenLine xmlns:a14="http://schemas.microsoft.com/office/drawing/2010/main" w="15875" cap="flat" cmpd="sng" algn="ctr">
+              <ns3:hiddenLine w="15875" cap="flat" cmpd="sng" algn="ctr">
                 <a:solidFill>
                   <a:srgbClr val="0076D2"/>
                 </a:solidFill>
                 <a:prstDash val="solid"/>
-              </a14:hiddenLine>
+              </ns3:hiddenLine>
             </a:ext>
           </a:extLst>
         </p:spPr>
@@ -17236,7 +17229,7 @@
           <p:cNvPr id="29" name="codex_template_top_accent">
             <a:extLst>
               <a:ext uri="{FF2B5EF4-FFF2-40B4-BE49-F238E27FC236}">
-                <a16:creationId xmlns:a16="http://schemas.microsoft.com/office/drawing/2014/main" id="{ADF3ECAA-8549-4845-2748-A7A66477EEC2}"/>
+                <ns2:creationId id="{ADF3ECAA-8549-4845-2748-A7A66477EEC2}"/>
               </a:ext>
             </a:extLst>
           </p:cNvPr>
@@ -17256,19 +17249,18 @@
           </a:solidFill>
           <a:ln w="25400" cap="flat" cmpd="sng" algn="ctr">
             <a:noFill/>
-            <a:prstDash val="solid"/>
           </a:ln>
           <a:effectLst/>
           <a:extLst>
             <a:ext uri="{91240B29-F687-4F45-9708-019B960494DF}">
-              <a14:hiddenLine xmlns:a14="http://schemas.microsoft.com/office/drawing/2010/main" w="25400" cap="flat" cmpd="sng" algn="ctr">
+              <ns3:hiddenLine w="25400" cap="flat" cmpd="sng" algn="ctr">
                 <a:solidFill>
                   <a:schemeClr val="accent1">
                     <a:shade val="15000"/>
                   </a:schemeClr>
                 </a:solidFill>
                 <a:prstDash val="solid"/>
-              </a14:hiddenLine>
+              </ns3:hiddenLine>
             </a:ext>
           </a:extLst>
         </p:spPr>
@@ -17302,7 +17294,7 @@
           <p:cNvPr id="31" name="codex_template_footer">
             <a:extLst>
               <a:ext uri="{FF2B5EF4-FFF2-40B4-BE49-F238E27FC236}">
-                <a16:creationId xmlns:a16="http://schemas.microsoft.com/office/drawing/2014/main" id="{3372C9D0-81B2-2D19-22E5-77025FFB4BD2}"/>
+                <ns2:creationId id="{3372C9D0-81B2-2D19-22E5-77025FFB4BD2}"/>
               </a:ext>
             </a:extLst>
           </p:cNvPr>
@@ -17342,7 +17334,7 @@
           <p:cNvPr id="32" name="codex_template_slide_number">
             <a:extLst>
               <a:ext uri="{FF2B5EF4-FFF2-40B4-BE49-F238E27FC236}">
-                <a16:creationId xmlns:a16="http://schemas.microsoft.com/office/drawing/2014/main" id="{34D0B6C9-2A59-8C3E-DEF6-688465FFA629}"/>
+                <ns2:creationId id="{34D0B6C9-2A59-8C3E-DEF6-688465FFA629}"/>
               </a:ext>
             </a:extLst>
           </p:cNvPr>
@@ -17382,7 +17374,7 @@
           <p:cNvPr id="33" name="codex_template_title_rule">
             <a:extLst>
               <a:ext uri="{FF2B5EF4-FFF2-40B4-BE49-F238E27FC236}">
-                <a16:creationId xmlns:a16="http://schemas.microsoft.com/office/drawing/2014/main" id="{FAE1221B-A12E-A597-6973-7FBCAD518C0D}"/>
+                <ns2:creationId id="{FAE1221B-A12E-A597-6973-7FBCAD518C0D}"/>
               </a:ext>
             </a:extLst>
           </p:cNvPr>
@@ -17421,7 +17413,7 @@
     </p:spTree>
     <p:extLst>
       <p:ext uri="{BB962C8B-B14F-4D97-AF65-F5344CB8AC3E}">
-        <p14:creationId xmlns:p14="http://schemas.microsoft.com/office/powerpoint/2010/main" val="3297036206"/>
+        <ns4:creationId val="3297036206"/>
       </p:ext>
     </p:extLst>
   </p:cSld>
@@ -17432,7 +17424,7 @@
 </file>
 
 <file path=ppt/slides/slide11.xml><?xml version="1.0" encoding="utf-8"?>
-<p:sld xmlns:a="http://schemas.openxmlformats.org/drawingml/2006/main" xmlns:r="http://schemas.openxmlformats.org/officeDocument/2006/relationships" xmlns:p="http://schemas.openxmlformats.org/presentationml/2006/main">
+<p:sld xmlns:a="http://schemas.openxmlformats.org/drawingml/2006/main" xmlns:ns2="http://schemas.microsoft.com/office/drawing/2014/main" xmlns:ns3="http://schemas.microsoft.com/office/drawing/2010/main" xmlns:ns4="http://schemas.microsoft.com/office/powerpoint/2010/main" xmlns:p="http://schemas.openxmlformats.org/presentationml/2006/main">
   <p:cSld>
     <p:spTree>
       <p:nvGrpSpPr>
@@ -17453,7 +17445,7 @@
           <p:cNvPr id="24" name="codex_template_right_wash">
             <a:extLst>
               <a:ext uri="{FF2B5EF4-FFF2-40B4-BE49-F238E27FC236}">
-                <a16:creationId xmlns:a16="http://schemas.microsoft.com/office/drawing/2014/main" id="{36348014-71FC-79BA-7828-AD39559902FE}"/>
+                <ns2:creationId id="{36348014-71FC-79BA-7828-AD39559902FE}"/>
               </a:ext>
             </a:extLst>
           </p:cNvPr>
@@ -17475,19 +17467,18 @@
           </a:solidFill>
           <a:ln w="25400" cap="flat" cmpd="sng" algn="ctr">
             <a:noFill/>
-            <a:prstDash val="solid"/>
           </a:ln>
           <a:effectLst/>
           <a:extLst>
             <a:ext uri="{91240B29-F687-4F45-9708-019B960494DF}">
-              <a14:hiddenLine xmlns:a14="http://schemas.microsoft.com/office/drawing/2010/main" w="25400" cap="flat" cmpd="sng" algn="ctr">
+              <ns3:hiddenLine w="25400" cap="flat" cmpd="sng" algn="ctr">
                 <a:solidFill>
                   <a:schemeClr val="accent1">
                     <a:shade val="15000"/>
                   </a:schemeClr>
                 </a:solidFill>
                 <a:prstDash val="solid"/>
-              </a14:hiddenLine>
+              </ns3:hiddenLine>
             </a:ext>
           </a:extLst>
         </p:spPr>
@@ -17521,7 +17512,7 @@
           <p:cNvPr id="23" name="codex_template_header_band">
             <a:extLst>
               <a:ext uri="{FF2B5EF4-FFF2-40B4-BE49-F238E27FC236}">
-                <a16:creationId xmlns:a16="http://schemas.microsoft.com/office/drawing/2014/main" id="{8D3D89BB-5CC9-60E0-D200-E6B2328094FB}"/>
+                <ns2:creationId id="{8D3D89BB-5CC9-60E0-D200-E6B2328094FB}"/>
               </a:ext>
             </a:extLst>
           </p:cNvPr>
@@ -17543,19 +17534,18 @@
           </a:solidFill>
           <a:ln w="25400" cap="flat" cmpd="sng" algn="ctr">
             <a:noFill/>
-            <a:prstDash val="solid"/>
           </a:ln>
           <a:effectLst/>
           <a:extLst>
             <a:ext uri="{91240B29-F687-4F45-9708-019B960494DF}">
-              <a14:hiddenLine xmlns:a14="http://schemas.microsoft.com/office/drawing/2010/main" w="25400" cap="flat" cmpd="sng" algn="ctr">
+              <ns3:hiddenLine w="25400" cap="flat" cmpd="sng" algn="ctr">
                 <a:solidFill>
                   <a:schemeClr val="accent1">
                     <a:shade val="15000"/>
                   </a:schemeClr>
                 </a:solidFill>
                 <a:prstDash val="solid"/>
-              </a14:hiddenLine>
+              </ns3:hiddenLine>
             </a:ext>
           </a:extLst>
         </p:spPr>
@@ -17589,7 +17579,7 @@
           <p:cNvPr id="22" name="codex_template_background">
             <a:extLst>
               <a:ext uri="{FF2B5EF4-FFF2-40B4-BE49-F238E27FC236}">
-                <a16:creationId xmlns:a16="http://schemas.microsoft.com/office/drawing/2014/main" id="{2070EC63-9C06-940E-779C-4ECE8B6828F0}"/>
+                <ns2:creationId id="{2070EC63-9C06-940E-779C-4ECE8B6828F0}"/>
               </a:ext>
             </a:extLst>
           </p:cNvPr>
@@ -17609,19 +17599,18 @@
           </a:solidFill>
           <a:ln w="25400" cap="flat" cmpd="sng" algn="ctr">
             <a:noFill/>
-            <a:prstDash val="solid"/>
           </a:ln>
           <a:effectLst/>
           <a:extLst>
             <a:ext uri="{91240B29-F687-4F45-9708-019B960494DF}">
-              <a14:hiddenLine xmlns:a14="http://schemas.microsoft.com/office/drawing/2010/main" w="25400" cap="flat" cmpd="sng" algn="ctr">
+              <ns3:hiddenLine w="25400" cap="flat" cmpd="sng" algn="ctr">
                 <a:solidFill>
                   <a:schemeClr val="accent1">
                     <a:shade val="15000"/>
                   </a:schemeClr>
                 </a:solidFill>
                 <a:prstDash val="solid"/>
-              </a14:hiddenLine>
+              </ns3:hiddenLine>
             </a:ext>
           </a:extLst>
         </p:spPr>
@@ -17655,7 +17644,7 @@
           <p:cNvPr id="11" name="TextBox 10">
             <a:extLst>
               <a:ext uri="{FF2B5EF4-FFF2-40B4-BE49-F238E27FC236}">
-                <a16:creationId xmlns:a16="http://schemas.microsoft.com/office/drawing/2014/main" id="{29491D44-1D1E-00E7-F61C-7B6F61AAA39B}"/>
+                <ns2:creationId id="{29491D44-1D1E-00E7-F61C-7B6F61AAA39B}"/>
               </a:ext>
             </a:extLst>
           </p:cNvPr>
@@ -17703,7 +17692,7 @@
           <p:cNvPr id="14" name="Rectangle: Rounded Corners 13">
             <a:extLst>
               <a:ext uri="{FF2B5EF4-FFF2-40B4-BE49-F238E27FC236}">
-                <a16:creationId xmlns:a16="http://schemas.microsoft.com/office/drawing/2014/main" id="{024B89D3-3E6C-D024-64AE-02E12B940F32}"/>
+                <ns2:creationId id="{024B89D3-3E6C-D024-64AE-02E12B940F32}"/>
               </a:ext>
             </a:extLst>
           </p:cNvPr>
@@ -17722,9 +17711,7 @@
             <a:srgbClr val="E2F1FF"/>
           </a:solidFill>
           <a:ln w="15875">
-            <a:solidFill>
-              <a:srgbClr val="D6E8F6"/>
-            </a:solidFill>
+            <a:noFill/>
           </a:ln>
           <a:effectLst>
             <a:outerShdw blurRad="63500" dist="28398" dir="3806086" rotWithShape="0">
@@ -17769,7 +17756,7 @@
           <p:cNvPr id="15" name="TextBox 14">
             <a:extLst>
               <a:ext uri="{FF2B5EF4-FFF2-40B4-BE49-F238E27FC236}">
-                <a16:creationId xmlns:a16="http://schemas.microsoft.com/office/drawing/2014/main" id="{15C376CF-C3F9-6D2F-5DC0-C8A31B2084E0}"/>
+                <ns2:creationId id="{15C376CF-C3F9-6D2F-5DC0-C8A31B2084E0}"/>
               </a:ext>
             </a:extLst>
           </p:cNvPr>
@@ -17786,9 +17773,7 @@
           </a:prstGeom>
           <a:noFill/>
           <a:ln w="15875">
-            <a:solidFill>
-              <a:srgbClr val="D6E8F6"/>
-            </a:solidFill>
+            <a:noFill/>
           </a:ln>
           <a:effectLst>
             <a:outerShdw blurRad="63500" dist="28398" dir="3806086" rotWithShape="0">
@@ -17912,7 +17897,7 @@
           <p:cNvPr id="16" name="Rectangle: Rounded Corners 15">
             <a:extLst>
               <a:ext uri="{FF2B5EF4-FFF2-40B4-BE49-F238E27FC236}">
-                <a16:creationId xmlns:a16="http://schemas.microsoft.com/office/drawing/2014/main" id="{92B34E90-17D8-8833-4D2E-7D8CAD80D0F7}"/>
+                <ns2:creationId id="{92B34E90-17D8-8833-4D2E-7D8CAD80D0F7}"/>
               </a:ext>
             </a:extLst>
           </p:cNvPr>
@@ -17931,9 +17916,7 @@
             <a:srgbClr val="E1F8F4"/>
           </a:solidFill>
           <a:ln w="15875">
-            <a:solidFill>
-              <a:srgbClr val="D6E8F6"/>
-            </a:solidFill>
+            <a:noFill/>
           </a:ln>
           <a:effectLst>
             <a:outerShdw blurRad="63500" dist="28398" dir="3806086" rotWithShape="0">
@@ -17978,7 +17961,7 @@
           <p:cNvPr id="17" name="TextBox 16">
             <a:extLst>
               <a:ext uri="{FF2B5EF4-FFF2-40B4-BE49-F238E27FC236}">
-                <a16:creationId xmlns:a16="http://schemas.microsoft.com/office/drawing/2014/main" id="{A3AA0220-AEC5-BCB8-D32D-A19C53750083}"/>
+                <ns2:creationId id="{A3AA0220-AEC5-BCB8-D32D-A19C53750083}"/>
               </a:ext>
             </a:extLst>
           </p:cNvPr>
@@ -17995,9 +17978,7 @@
           </a:prstGeom>
           <a:noFill/>
           <a:ln w="15875">
-            <a:solidFill>
-              <a:srgbClr val="D6E8F6"/>
-            </a:solidFill>
+            <a:noFill/>
           </a:ln>
           <a:effectLst>
             <a:outerShdw blurRad="63500" dist="28398" dir="3806086" rotWithShape="0">
@@ -18089,7 +18070,7 @@
           <p:cNvPr id="20" name="TextBox 19">
             <a:extLst>
               <a:ext uri="{FF2B5EF4-FFF2-40B4-BE49-F238E27FC236}">
-                <a16:creationId xmlns:a16="http://schemas.microsoft.com/office/drawing/2014/main" id="{0338A976-1C1C-E342-2706-E4BFBDBA9535}"/>
+                <ns2:creationId id="{0338A976-1C1C-E342-2706-E4BFBDBA9535}"/>
               </a:ext>
             </a:extLst>
           </p:cNvPr>
@@ -18106,9 +18087,7 @@
           </a:prstGeom>
           <a:noFill/>
           <a:ln w="15875">
-            <a:solidFill>
-              <a:srgbClr val="D6E8F6"/>
-            </a:solidFill>
+            <a:noFill/>
           </a:ln>
           <a:effectLst>
             <a:outerShdw blurRad="63500" dist="28398" dir="3806086" rotWithShape="0">
@@ -18142,7 +18121,7 @@
           <p:cNvPr id="21" name="TextBox 20">
             <a:extLst>
               <a:ext uri="{FF2B5EF4-FFF2-40B4-BE49-F238E27FC236}">
-                <a16:creationId xmlns:a16="http://schemas.microsoft.com/office/drawing/2014/main" id="{917F64FA-FB3F-6B58-4959-F4D8E727B7EB}"/>
+                <ns2:creationId id="{917F64FA-FB3F-6B58-4959-F4D8E727B7EB}"/>
               </a:ext>
             </a:extLst>
           </p:cNvPr>
@@ -18159,9 +18138,7 @@
           </a:prstGeom>
           <a:noFill/>
           <a:ln w="15875">
-            <a:solidFill>
-              <a:srgbClr val="D6E8F6"/>
-            </a:solidFill>
+            <a:noFill/>
           </a:ln>
           <a:effectLst>
             <a:outerShdw blurRad="63500" dist="28398" dir="3806086" rotWithShape="0">
@@ -18195,7 +18172,7 @@
           <p:cNvPr id="25" name="codex_template_top_accent">
             <a:extLst>
               <a:ext uri="{FF2B5EF4-FFF2-40B4-BE49-F238E27FC236}">
-                <a16:creationId xmlns:a16="http://schemas.microsoft.com/office/drawing/2014/main" id="{B0E3968F-D7EC-7054-DBD6-61E4748849F6}"/>
+                <ns2:creationId id="{B0E3968F-D7EC-7054-DBD6-61E4748849F6}"/>
               </a:ext>
             </a:extLst>
           </p:cNvPr>
@@ -18215,19 +18192,18 @@
           </a:solidFill>
           <a:ln w="25400" cap="flat" cmpd="sng" algn="ctr">
             <a:noFill/>
-            <a:prstDash val="solid"/>
           </a:ln>
           <a:effectLst/>
           <a:extLst>
             <a:ext uri="{91240B29-F687-4F45-9708-019B960494DF}">
-              <a14:hiddenLine xmlns:a14="http://schemas.microsoft.com/office/drawing/2010/main" w="25400" cap="flat" cmpd="sng" algn="ctr">
+              <ns3:hiddenLine w="25400" cap="flat" cmpd="sng" algn="ctr">
                 <a:solidFill>
                   <a:schemeClr val="accent1">
                     <a:shade val="15000"/>
                   </a:schemeClr>
                 </a:solidFill>
                 <a:prstDash val="solid"/>
-              </a14:hiddenLine>
+              </ns3:hiddenLine>
             </a:ext>
           </a:extLst>
         </p:spPr>
@@ -18261,7 +18237,7 @@
           <p:cNvPr id="27" name="codex_template_footer">
             <a:extLst>
               <a:ext uri="{FF2B5EF4-FFF2-40B4-BE49-F238E27FC236}">
-                <a16:creationId xmlns:a16="http://schemas.microsoft.com/office/drawing/2014/main" id="{8035B898-CE14-6E68-9326-B8EC47D9992E}"/>
+                <ns2:creationId id="{8035B898-CE14-6E68-9326-B8EC47D9992E}"/>
               </a:ext>
             </a:extLst>
           </p:cNvPr>
@@ -18301,7 +18277,7 @@
           <p:cNvPr id="28" name="codex_template_slide_number">
             <a:extLst>
               <a:ext uri="{FF2B5EF4-FFF2-40B4-BE49-F238E27FC236}">
-                <a16:creationId xmlns:a16="http://schemas.microsoft.com/office/drawing/2014/main" id="{97F2A349-012F-3F7C-45CA-CFE1448DC8D4}"/>
+                <ns2:creationId id="{97F2A349-012F-3F7C-45CA-CFE1448DC8D4}"/>
               </a:ext>
             </a:extLst>
           </p:cNvPr>
@@ -18341,7 +18317,7 @@
           <p:cNvPr id="29" name="codex_template_title_rule">
             <a:extLst>
               <a:ext uri="{FF2B5EF4-FFF2-40B4-BE49-F238E27FC236}">
-                <a16:creationId xmlns:a16="http://schemas.microsoft.com/office/drawing/2014/main" id="{2D591C69-491C-A297-090E-DDF2281D1E0A}"/>
+                <ns2:creationId id="{2D591C69-491C-A297-090E-DDF2281D1E0A}"/>
               </a:ext>
             </a:extLst>
           </p:cNvPr>
@@ -18380,7 +18356,7 @@
     </p:spTree>
     <p:extLst>
       <p:ext uri="{BB962C8B-B14F-4D97-AF65-F5344CB8AC3E}">
-        <p14:creationId xmlns:p14="http://schemas.microsoft.com/office/powerpoint/2010/main" val="2832054631"/>
+        <ns4:creationId val="2832054631"/>
       </p:ext>
     </p:extLst>
   </p:cSld>
@@ -18391,7 +18367,7 @@
 </file>
 
 <file path=ppt/slides/slide12.xml><?xml version="1.0" encoding="utf-8"?>
-<p:sld xmlns:a="http://schemas.openxmlformats.org/drawingml/2006/main" xmlns:r="http://schemas.openxmlformats.org/officeDocument/2006/relationships" xmlns:p="http://schemas.openxmlformats.org/presentationml/2006/main">
+<p:sld xmlns:a="http://schemas.openxmlformats.org/drawingml/2006/main" xmlns:ns2="http://schemas.microsoft.com/office/drawing/2014/main" xmlns:ns3="http://schemas.microsoft.com/office/drawing/2010/main" xmlns:ns4="http://schemas.microsoft.com/office/powerpoint/2010/main" xmlns:p="http://schemas.openxmlformats.org/presentationml/2006/main">
   <p:cSld>
     <p:spTree>
       <p:nvGrpSpPr>
@@ -18412,7 +18388,7 @@
           <p:cNvPr id="26" name="codex_template_right_wash">
             <a:extLst>
               <a:ext uri="{FF2B5EF4-FFF2-40B4-BE49-F238E27FC236}">
-                <a16:creationId xmlns:a16="http://schemas.microsoft.com/office/drawing/2014/main" id="{4483516C-C4E4-F58A-BF09-89CC7CAF9E4A}"/>
+                <ns2:creationId id="{4483516C-C4E4-F58A-BF09-89CC7CAF9E4A}"/>
               </a:ext>
             </a:extLst>
           </p:cNvPr>
@@ -18434,19 +18410,18 @@
           </a:solidFill>
           <a:ln w="25400" cap="flat" cmpd="sng" algn="ctr">
             <a:noFill/>
-            <a:prstDash val="solid"/>
           </a:ln>
           <a:effectLst/>
           <a:extLst>
             <a:ext uri="{91240B29-F687-4F45-9708-019B960494DF}">
-              <a14:hiddenLine xmlns:a14="http://schemas.microsoft.com/office/drawing/2010/main" w="25400" cap="flat" cmpd="sng" algn="ctr">
+              <ns3:hiddenLine w="25400" cap="flat" cmpd="sng" algn="ctr">
                 <a:solidFill>
                   <a:schemeClr val="accent1">
                     <a:shade val="15000"/>
                   </a:schemeClr>
                 </a:solidFill>
                 <a:prstDash val="solid"/>
-              </a14:hiddenLine>
+              </ns3:hiddenLine>
             </a:ext>
           </a:extLst>
         </p:spPr>
@@ -18480,7 +18455,7 @@
           <p:cNvPr id="25" name="codex_template_header_band">
             <a:extLst>
               <a:ext uri="{FF2B5EF4-FFF2-40B4-BE49-F238E27FC236}">
-                <a16:creationId xmlns:a16="http://schemas.microsoft.com/office/drawing/2014/main" id="{FAFF33E1-45E0-3C32-7A4F-9AC24BF2504E}"/>
+                <ns2:creationId id="{FAFF33E1-45E0-3C32-7A4F-9AC24BF2504E}"/>
               </a:ext>
             </a:extLst>
           </p:cNvPr>
@@ -18502,19 +18477,18 @@
           </a:solidFill>
           <a:ln w="25400" cap="flat" cmpd="sng" algn="ctr">
             <a:noFill/>
-            <a:prstDash val="solid"/>
           </a:ln>
           <a:effectLst/>
           <a:extLst>
             <a:ext uri="{91240B29-F687-4F45-9708-019B960494DF}">
-              <a14:hiddenLine xmlns:a14="http://schemas.microsoft.com/office/drawing/2010/main" w="25400" cap="flat" cmpd="sng" algn="ctr">
+              <ns3:hiddenLine w="25400" cap="flat" cmpd="sng" algn="ctr">
                 <a:solidFill>
                   <a:schemeClr val="accent1">
                     <a:shade val="15000"/>
                   </a:schemeClr>
                 </a:solidFill>
                 <a:prstDash val="solid"/>
-              </a14:hiddenLine>
+              </ns3:hiddenLine>
             </a:ext>
           </a:extLst>
         </p:spPr>
@@ -18548,7 +18522,7 @@
           <p:cNvPr id="24" name="codex_template_background">
             <a:extLst>
               <a:ext uri="{FF2B5EF4-FFF2-40B4-BE49-F238E27FC236}">
-                <a16:creationId xmlns:a16="http://schemas.microsoft.com/office/drawing/2014/main" id="{DA9377EE-EE2C-52DC-39AC-2BBCCC33CE76}"/>
+                <ns2:creationId id="{DA9377EE-EE2C-52DC-39AC-2BBCCC33CE76}"/>
               </a:ext>
             </a:extLst>
           </p:cNvPr>
@@ -18568,19 +18542,18 @@
           </a:solidFill>
           <a:ln w="25400" cap="flat" cmpd="sng" algn="ctr">
             <a:noFill/>
-            <a:prstDash val="solid"/>
           </a:ln>
           <a:effectLst/>
           <a:extLst>
             <a:ext uri="{91240B29-F687-4F45-9708-019B960494DF}">
-              <a14:hiddenLine xmlns:a14="http://schemas.microsoft.com/office/drawing/2010/main" w="25400" cap="flat" cmpd="sng" algn="ctr">
+              <ns3:hiddenLine w="25400" cap="flat" cmpd="sng" algn="ctr">
                 <a:solidFill>
                   <a:schemeClr val="accent1">
                     <a:shade val="15000"/>
                   </a:schemeClr>
                 </a:solidFill>
                 <a:prstDash val="solid"/>
-              </a14:hiddenLine>
+              </ns3:hiddenLine>
             </a:ext>
           </a:extLst>
         </p:spPr>
@@ -18614,7 +18587,7 @@
           <p:cNvPr id="11" name="TextBox 10">
             <a:extLst>
               <a:ext uri="{FF2B5EF4-FFF2-40B4-BE49-F238E27FC236}">
-                <a16:creationId xmlns:a16="http://schemas.microsoft.com/office/drawing/2014/main" id="{1FF295B1-4A2A-2D6D-6BB5-E04C3E98F500}"/>
+                <ns2:creationId id="{1FF295B1-4A2A-2D6D-6BB5-E04C3E98F500}"/>
               </a:ext>
             </a:extLst>
           </p:cNvPr>
@@ -18662,7 +18635,7 @@
           <p:cNvPr id="14" name="Rectangle: Rounded Corners 13">
             <a:extLst>
               <a:ext uri="{FF2B5EF4-FFF2-40B4-BE49-F238E27FC236}">
-                <a16:creationId xmlns:a16="http://schemas.microsoft.com/office/drawing/2014/main" id="{00564DA2-98FC-70B0-3E37-521BF162E2EC}"/>
+                <ns2:creationId id="{00564DA2-98FC-70B0-3E37-521BF162E2EC}"/>
               </a:ext>
             </a:extLst>
           </p:cNvPr>
@@ -18693,12 +18666,12 @@
           </a:effectLst>
           <a:extLst>
             <a:ext uri="{91240B29-F687-4F45-9708-019B960494DF}">
-              <a14:hiddenLine xmlns:a14="http://schemas.microsoft.com/office/drawing/2010/main" w="15875" cap="flat" cmpd="sng" algn="ctr">
+              <ns3:hiddenLine w="15875" cap="flat" cmpd="sng" algn="ctr">
                 <a:solidFill>
                   <a:srgbClr val="5B6E86"/>
                 </a:solidFill>
                 <a:prstDash val="solid"/>
-              </a14:hiddenLine>
+              </ns3:hiddenLine>
             </a:ext>
           </a:extLst>
         </p:spPr>
@@ -18754,7 +18727,7 @@
           <p:cNvPr id="15" name="Rectangle: Rounded Corners 14">
             <a:extLst>
               <a:ext uri="{FF2B5EF4-FFF2-40B4-BE49-F238E27FC236}">
-                <a16:creationId xmlns:a16="http://schemas.microsoft.com/office/drawing/2014/main" id="{E1DC1863-209E-C7E8-888E-0756E53DC43D}"/>
+                <ns2:creationId id="{E1DC1863-209E-C7E8-888E-0756E53DC43D}"/>
               </a:ext>
             </a:extLst>
           </p:cNvPr>
@@ -18785,12 +18758,12 @@
           </a:effectLst>
           <a:extLst>
             <a:ext uri="{91240B29-F687-4F45-9708-019B960494DF}">
-              <a14:hiddenLine xmlns:a14="http://schemas.microsoft.com/office/drawing/2010/main" w="15875" cap="flat" cmpd="sng" algn="ctr">
+              <ns3:hiddenLine w="15875" cap="flat" cmpd="sng" algn="ctr">
                 <a:solidFill>
                   <a:srgbClr val="0076D2"/>
                 </a:solidFill>
                 <a:prstDash val="solid"/>
-              </a14:hiddenLine>
+              </ns3:hiddenLine>
             </a:ext>
           </a:extLst>
         </p:spPr>
@@ -18870,7 +18843,7 @@
           <p:cNvPr id="16" name="Rectangle: Rounded Corners 15">
             <a:extLst>
               <a:ext uri="{FF2B5EF4-FFF2-40B4-BE49-F238E27FC236}">
-                <a16:creationId xmlns:a16="http://schemas.microsoft.com/office/drawing/2014/main" id="{E4541A70-3F91-C57C-3CCB-0A3D39FE79CC}"/>
+                <ns2:creationId id="{E4541A70-3F91-C57C-3CCB-0A3D39FE79CC}"/>
               </a:ext>
             </a:extLst>
           </p:cNvPr>
@@ -18901,12 +18874,12 @@
           </a:effectLst>
           <a:extLst>
             <a:ext uri="{91240B29-F687-4F45-9708-019B960494DF}">
-              <a14:hiddenLine xmlns:a14="http://schemas.microsoft.com/office/drawing/2010/main" w="15875" cap="flat" cmpd="sng" algn="ctr">
+              <ns3:hiddenLine w="15875" cap="flat" cmpd="sng" algn="ctr">
                 <a:solidFill>
                   <a:srgbClr val="EE9726"/>
                 </a:solidFill>
                 <a:prstDash val="solid"/>
-              </a14:hiddenLine>
+              </ns3:hiddenLine>
             </a:ext>
           </a:extLst>
         </p:spPr>
@@ -18962,7 +18935,7 @@
           <p:cNvPr id="17" name="Rectangle: Rounded Corners 16">
             <a:extLst>
               <a:ext uri="{FF2B5EF4-FFF2-40B4-BE49-F238E27FC236}">
-                <a16:creationId xmlns:a16="http://schemas.microsoft.com/office/drawing/2014/main" id="{DE161DF0-799E-11AC-6674-AD960F057CB8}"/>
+                <ns2:creationId id="{DE161DF0-799E-11AC-6674-AD960F057CB8}"/>
               </a:ext>
             </a:extLst>
           </p:cNvPr>
@@ -18993,12 +18966,12 @@
           </a:effectLst>
           <a:extLst>
             <a:ext uri="{91240B29-F687-4F45-9708-019B960494DF}">
-              <a14:hiddenLine xmlns:a14="http://schemas.microsoft.com/office/drawing/2010/main" w="15875" cap="flat" cmpd="sng" algn="ctr">
+              <ns3:hiddenLine w="15875" cap="flat" cmpd="sng" algn="ctr">
                 <a:solidFill>
                   <a:srgbClr val="009988"/>
                 </a:solidFill>
                 <a:prstDash val="solid"/>
-              </a14:hiddenLine>
+              </ns3:hiddenLine>
             </a:ext>
           </a:extLst>
         </p:spPr>
@@ -19066,7 +19039,7 @@
           <p:cNvPr id="18" name="Straight Connector 17">
             <a:extLst>
               <a:ext uri="{FF2B5EF4-FFF2-40B4-BE49-F238E27FC236}">
-                <a16:creationId xmlns:a16="http://schemas.microsoft.com/office/drawing/2014/main" id="{EA9B4A22-7892-214C-4CD4-162492EE1A1D}"/>
+                <ns2:creationId id="{EA9B4A22-7892-214C-4CD4-162492EE1A1D}"/>
               </a:ext>
             </a:extLst>
           </p:cNvPr>
@@ -19108,7 +19081,7 @@
           <p:cNvPr id="19" name="Straight Connector 18">
             <a:extLst>
               <a:ext uri="{FF2B5EF4-FFF2-40B4-BE49-F238E27FC236}">
-                <a16:creationId xmlns:a16="http://schemas.microsoft.com/office/drawing/2014/main" id="{0F7E1EF6-5B15-8BAB-1A25-327914298483}"/>
+                <ns2:creationId id="{0F7E1EF6-5B15-8BAB-1A25-327914298483}"/>
               </a:ext>
             </a:extLst>
           </p:cNvPr>
@@ -19150,7 +19123,7 @@
           <p:cNvPr id="20" name="Straight Connector 19">
             <a:extLst>
               <a:ext uri="{FF2B5EF4-FFF2-40B4-BE49-F238E27FC236}">
-                <a16:creationId xmlns:a16="http://schemas.microsoft.com/office/drawing/2014/main" id="{65E92A72-75AB-3848-0326-C2E7E66055B1}"/>
+                <ns2:creationId id="{65E92A72-75AB-3848-0326-C2E7E66055B1}"/>
               </a:ext>
             </a:extLst>
           </p:cNvPr>
@@ -19192,7 +19165,7 @@
           <p:cNvPr id="21" name="Rectangle: Rounded Corners 20">
             <a:extLst>
               <a:ext uri="{FF2B5EF4-FFF2-40B4-BE49-F238E27FC236}">
-                <a16:creationId xmlns:a16="http://schemas.microsoft.com/office/drawing/2014/main" id="{B164BC8C-B551-5133-AAB0-D6262D5B2084}"/>
+                <ns2:creationId id="{B164BC8C-B551-5133-AAB0-D6262D5B2084}"/>
               </a:ext>
             </a:extLst>
           </p:cNvPr>
@@ -19223,12 +19196,12 @@
           </a:effectLst>
           <a:extLst>
             <a:ext uri="{91240B29-F687-4F45-9708-019B960494DF}">
-              <a14:hiddenLine xmlns:a14="http://schemas.microsoft.com/office/drawing/2010/main" w="15875" cap="flat" cmpd="sng" algn="ctr">
+              <ns3:hiddenLine w="15875" cap="flat" cmpd="sng" algn="ctr">
                 <a:solidFill>
                   <a:srgbClr val="5B6E86"/>
                 </a:solidFill>
                 <a:prstDash val="solid"/>
-              </a14:hiddenLine>
+              </ns3:hiddenLine>
             </a:ext>
           </a:extLst>
         </p:spPr>
@@ -19284,7 +19257,7 @@
           <p:cNvPr id="27" name="codex_template_top_accent">
             <a:extLst>
               <a:ext uri="{FF2B5EF4-FFF2-40B4-BE49-F238E27FC236}">
-                <a16:creationId xmlns:a16="http://schemas.microsoft.com/office/drawing/2014/main" id="{4882BC59-2B6C-5209-9AD6-33AF69A08057}"/>
+                <ns2:creationId id="{4882BC59-2B6C-5209-9AD6-33AF69A08057}"/>
               </a:ext>
             </a:extLst>
           </p:cNvPr>
@@ -19304,19 +19277,18 @@
           </a:solidFill>
           <a:ln w="25400" cap="flat" cmpd="sng" algn="ctr">
             <a:noFill/>
-            <a:prstDash val="solid"/>
           </a:ln>
           <a:effectLst/>
           <a:extLst>
             <a:ext uri="{91240B29-F687-4F45-9708-019B960494DF}">
-              <a14:hiddenLine xmlns:a14="http://schemas.microsoft.com/office/drawing/2010/main" w="25400" cap="flat" cmpd="sng" algn="ctr">
+              <ns3:hiddenLine w="25400" cap="flat" cmpd="sng" algn="ctr">
                 <a:solidFill>
                   <a:schemeClr val="accent1">
                     <a:shade val="15000"/>
                   </a:schemeClr>
                 </a:solidFill>
                 <a:prstDash val="solid"/>
-              </a14:hiddenLine>
+              </ns3:hiddenLine>
             </a:ext>
           </a:extLst>
         </p:spPr>
@@ -19350,7 +19322,7 @@
           <p:cNvPr id="29" name="codex_template_footer">
             <a:extLst>
               <a:ext uri="{FF2B5EF4-FFF2-40B4-BE49-F238E27FC236}">
-                <a16:creationId xmlns:a16="http://schemas.microsoft.com/office/drawing/2014/main" id="{2BF687F0-A7CA-24FF-3117-D2D3DC21DE7D}"/>
+                <ns2:creationId id="{2BF687F0-A7CA-24FF-3117-D2D3DC21DE7D}"/>
               </a:ext>
             </a:extLst>
           </p:cNvPr>
@@ -19390,7 +19362,7 @@
           <p:cNvPr id="30" name="codex_template_slide_number">
             <a:extLst>
               <a:ext uri="{FF2B5EF4-FFF2-40B4-BE49-F238E27FC236}">
-                <a16:creationId xmlns:a16="http://schemas.microsoft.com/office/drawing/2014/main" id="{B1E8B9DB-74AF-14E1-52F3-14819793560F}"/>
+                <ns2:creationId id="{B1E8B9DB-74AF-14E1-52F3-14819793560F}"/>
               </a:ext>
             </a:extLst>
           </p:cNvPr>
@@ -19430,7 +19402,7 @@
           <p:cNvPr id="31" name="codex_template_title_rule">
             <a:extLst>
               <a:ext uri="{FF2B5EF4-FFF2-40B4-BE49-F238E27FC236}">
-                <a16:creationId xmlns:a16="http://schemas.microsoft.com/office/drawing/2014/main" id="{0F74863B-AAD3-8932-EEA7-73356A175A77}"/>
+                <ns2:creationId id="{0F74863B-AAD3-8932-EEA7-73356A175A77}"/>
               </a:ext>
             </a:extLst>
           </p:cNvPr>
@@ -19469,7 +19441,7 @@
     </p:spTree>
     <p:extLst>
       <p:ext uri="{BB962C8B-B14F-4D97-AF65-F5344CB8AC3E}">
-        <p14:creationId xmlns:p14="http://schemas.microsoft.com/office/powerpoint/2010/main" val="2903268513"/>
+        <ns4:creationId val="2903268513"/>
       </p:ext>
     </p:extLst>
   </p:cSld>
@@ -19480,7 +19452,7 @@
 </file>
 
 <file path=ppt/slides/slide13.xml><?xml version="1.0" encoding="utf-8"?>
-<p:sld xmlns:a="http://schemas.openxmlformats.org/drawingml/2006/main" xmlns:r="http://schemas.openxmlformats.org/officeDocument/2006/relationships" xmlns:p="http://schemas.openxmlformats.org/presentationml/2006/main">
+<p:sld xmlns:a="http://schemas.openxmlformats.org/drawingml/2006/main" xmlns:ns2="http://schemas.microsoft.com/office/drawing/2014/main" xmlns:ns3="http://schemas.microsoft.com/office/drawing/2010/main" xmlns:ns4="http://schemas.microsoft.com/office/powerpoint/2010/main" xmlns:p="http://schemas.openxmlformats.org/presentationml/2006/main">
   <p:cSld>
     <p:spTree>
       <p:nvGrpSpPr>
@@ -19501,7 +19473,7 @@
           <p:cNvPr id="24" name="codex_template_right_wash">
             <a:extLst>
               <a:ext uri="{FF2B5EF4-FFF2-40B4-BE49-F238E27FC236}">
-                <a16:creationId xmlns:a16="http://schemas.microsoft.com/office/drawing/2014/main" id="{573447FD-7199-A92B-E4BB-14787466016A}"/>
+                <ns2:creationId id="{573447FD-7199-A92B-E4BB-14787466016A}"/>
               </a:ext>
             </a:extLst>
           </p:cNvPr>
@@ -19523,19 +19495,18 @@
           </a:solidFill>
           <a:ln w="25400" cap="flat" cmpd="sng" algn="ctr">
             <a:noFill/>
-            <a:prstDash val="solid"/>
           </a:ln>
           <a:effectLst/>
           <a:extLst>
             <a:ext uri="{91240B29-F687-4F45-9708-019B960494DF}">
-              <a14:hiddenLine xmlns:a14="http://schemas.microsoft.com/office/drawing/2010/main" w="25400" cap="flat" cmpd="sng" algn="ctr">
+              <ns3:hiddenLine w="25400" cap="flat" cmpd="sng" algn="ctr">
                 <a:solidFill>
                   <a:schemeClr val="accent1">
                     <a:shade val="15000"/>
                   </a:schemeClr>
                 </a:solidFill>
                 <a:prstDash val="solid"/>
-              </a14:hiddenLine>
+              </ns3:hiddenLine>
             </a:ext>
           </a:extLst>
         </p:spPr>
@@ -19569,7 +19540,7 @@
           <p:cNvPr id="23" name="codex_template_header_band">
             <a:extLst>
               <a:ext uri="{FF2B5EF4-FFF2-40B4-BE49-F238E27FC236}">
-                <a16:creationId xmlns:a16="http://schemas.microsoft.com/office/drawing/2014/main" id="{576C7410-1F21-F050-DE3C-D0B3F70C305B}"/>
+                <ns2:creationId id="{576C7410-1F21-F050-DE3C-D0B3F70C305B}"/>
               </a:ext>
             </a:extLst>
           </p:cNvPr>
@@ -19591,19 +19562,18 @@
           </a:solidFill>
           <a:ln w="25400" cap="flat" cmpd="sng" algn="ctr">
             <a:noFill/>
-            <a:prstDash val="solid"/>
           </a:ln>
           <a:effectLst/>
           <a:extLst>
             <a:ext uri="{91240B29-F687-4F45-9708-019B960494DF}">
-              <a14:hiddenLine xmlns:a14="http://schemas.microsoft.com/office/drawing/2010/main" w="25400" cap="flat" cmpd="sng" algn="ctr">
+              <ns3:hiddenLine w="25400" cap="flat" cmpd="sng" algn="ctr">
                 <a:solidFill>
                   <a:schemeClr val="accent1">
                     <a:shade val="15000"/>
                   </a:schemeClr>
                 </a:solidFill>
                 <a:prstDash val="solid"/>
-              </a14:hiddenLine>
+              </ns3:hiddenLine>
             </a:ext>
           </a:extLst>
         </p:spPr>
@@ -19637,7 +19607,7 @@
           <p:cNvPr id="22" name="codex_template_background">
             <a:extLst>
               <a:ext uri="{FF2B5EF4-FFF2-40B4-BE49-F238E27FC236}">
-                <a16:creationId xmlns:a16="http://schemas.microsoft.com/office/drawing/2014/main" id="{A870B28D-4071-F402-56F1-B4FF36C2F5B3}"/>
+                <ns2:creationId id="{A870B28D-4071-F402-56F1-B4FF36C2F5B3}"/>
               </a:ext>
             </a:extLst>
           </p:cNvPr>
@@ -19657,19 +19627,18 @@
           </a:solidFill>
           <a:ln w="25400" cap="flat" cmpd="sng" algn="ctr">
             <a:noFill/>
-            <a:prstDash val="solid"/>
           </a:ln>
           <a:effectLst/>
           <a:extLst>
             <a:ext uri="{91240B29-F687-4F45-9708-019B960494DF}">
-              <a14:hiddenLine xmlns:a14="http://schemas.microsoft.com/office/drawing/2010/main" w="25400" cap="flat" cmpd="sng" algn="ctr">
+              <ns3:hiddenLine w="25400" cap="flat" cmpd="sng" algn="ctr">
                 <a:solidFill>
                   <a:schemeClr val="accent1">
                     <a:shade val="15000"/>
                   </a:schemeClr>
                 </a:solidFill>
                 <a:prstDash val="solid"/>
-              </a14:hiddenLine>
+              </ns3:hiddenLine>
             </a:ext>
           </a:extLst>
         </p:spPr>
@@ -19703,7 +19672,7 @@
           <p:cNvPr id="11" name="TextBox 10">
             <a:extLst>
               <a:ext uri="{FF2B5EF4-FFF2-40B4-BE49-F238E27FC236}">
-                <a16:creationId xmlns:a16="http://schemas.microsoft.com/office/drawing/2014/main" id="{0E481B2F-E4B9-6F96-7EA7-CA5304E96E1C}"/>
+                <ns2:creationId id="{0E481B2F-E4B9-6F96-7EA7-CA5304E96E1C}"/>
               </a:ext>
             </a:extLst>
           </p:cNvPr>
@@ -19751,7 +19720,7 @@
           <p:cNvPr id="14" name="Rectangle: Rounded Corners 13">
             <a:extLst>
               <a:ext uri="{FF2B5EF4-FFF2-40B4-BE49-F238E27FC236}">
-                <a16:creationId xmlns:a16="http://schemas.microsoft.com/office/drawing/2014/main" id="{BF930E04-9F68-BE0D-449C-5761D59F7CD8}"/>
+                <ns2:creationId id="{BF930E04-9F68-BE0D-449C-5761D59F7CD8}"/>
               </a:ext>
             </a:extLst>
           </p:cNvPr>
@@ -19770,9 +19739,7 @@
             <a:srgbClr val="E2F1FF"/>
           </a:solidFill>
           <a:ln w="15875">
-            <a:solidFill>
-              <a:srgbClr val="D6E8F6"/>
-            </a:solidFill>
+            <a:noFill/>
           </a:ln>
           <a:effectLst>
             <a:outerShdw blurRad="63500" dist="28398" dir="3806086" rotWithShape="0">
@@ -19817,7 +19784,7 @@
           <p:cNvPr id="15" name="TextBox 14">
             <a:extLst>
               <a:ext uri="{FF2B5EF4-FFF2-40B4-BE49-F238E27FC236}">
-                <a16:creationId xmlns:a16="http://schemas.microsoft.com/office/drawing/2014/main" id="{1074BA61-2B16-5D1D-D32F-7C56BD8232E2}"/>
+                <ns2:creationId id="{1074BA61-2B16-5D1D-D32F-7C56BD8232E2}"/>
               </a:ext>
             </a:extLst>
           </p:cNvPr>
@@ -19834,9 +19801,7 @@
           </a:prstGeom>
           <a:noFill/>
           <a:ln w="15875">
-            <a:solidFill>
-              <a:srgbClr val="D6E8F6"/>
-            </a:solidFill>
+            <a:noFill/>
           </a:ln>
           <a:effectLst>
             <a:outerShdw blurRad="63500" dist="28398" dir="3806086" rotWithShape="0">
@@ -19913,7 +19878,7 @@
           <p:cNvPr id="16" name="Rectangle: Rounded Corners 15">
             <a:extLst>
               <a:ext uri="{FF2B5EF4-FFF2-40B4-BE49-F238E27FC236}">
-                <a16:creationId xmlns:a16="http://schemas.microsoft.com/office/drawing/2014/main" id="{DA7871A2-E7FA-5613-F2BF-9B4ABF07050D}"/>
+                <ns2:creationId id="{DA7871A2-E7FA-5613-F2BF-9B4ABF07050D}"/>
               </a:ext>
             </a:extLst>
           </p:cNvPr>
@@ -19932,9 +19897,7 @@
             <a:srgbClr val="E1F8F4"/>
           </a:solidFill>
           <a:ln w="15875">
-            <a:solidFill>
-              <a:srgbClr val="D6E8F6"/>
-            </a:solidFill>
+            <a:noFill/>
           </a:ln>
           <a:effectLst>
             <a:outerShdw blurRad="63500" dist="28398" dir="3806086" rotWithShape="0">
@@ -19979,7 +19942,7 @@
           <p:cNvPr id="17" name="TextBox 16">
             <a:extLst>
               <a:ext uri="{FF2B5EF4-FFF2-40B4-BE49-F238E27FC236}">
-                <a16:creationId xmlns:a16="http://schemas.microsoft.com/office/drawing/2014/main" id="{7082B791-C83E-63DF-A173-E70D3716DB68}"/>
+                <ns2:creationId id="{7082B791-C83E-63DF-A173-E70D3716DB68}"/>
               </a:ext>
             </a:extLst>
           </p:cNvPr>
@@ -19996,9 +19959,7 @@
           </a:prstGeom>
           <a:noFill/>
           <a:ln w="15875">
-            <a:solidFill>
-              <a:srgbClr val="D6E8F6"/>
-            </a:solidFill>
+            <a:noFill/>
           </a:ln>
           <a:effectLst>
             <a:outerShdw blurRad="63500" dist="28398" dir="3806086" rotWithShape="0">
@@ -20093,7 +20054,7 @@
           <p:cNvPr id="20" name="TextBox 19">
             <a:extLst>
               <a:ext uri="{FF2B5EF4-FFF2-40B4-BE49-F238E27FC236}">
-                <a16:creationId xmlns:a16="http://schemas.microsoft.com/office/drawing/2014/main" id="{9EE46275-CD0D-5BB9-D4A8-5E8620999378}"/>
+                <ns2:creationId id="{9EE46275-CD0D-5BB9-D4A8-5E8620999378}"/>
               </a:ext>
             </a:extLst>
           </p:cNvPr>
@@ -20110,9 +20071,7 @@
           </a:prstGeom>
           <a:noFill/>
           <a:ln w="15875">
-            <a:solidFill>
-              <a:srgbClr val="D6E8F6"/>
-            </a:solidFill>
+            <a:noFill/>
           </a:ln>
           <a:effectLst>
             <a:outerShdw blurRad="63500" dist="28398" dir="3806086" rotWithShape="0">
@@ -20146,7 +20105,7 @@
           <p:cNvPr id="21" name="TextBox 20">
             <a:extLst>
               <a:ext uri="{FF2B5EF4-FFF2-40B4-BE49-F238E27FC236}">
-                <a16:creationId xmlns:a16="http://schemas.microsoft.com/office/drawing/2014/main" id="{DB8C970A-AE54-E80E-6E6B-AA5283657F07}"/>
+                <ns2:creationId id="{DB8C970A-AE54-E80E-6E6B-AA5283657F07}"/>
               </a:ext>
             </a:extLst>
           </p:cNvPr>
@@ -20163,9 +20122,7 @@
           </a:prstGeom>
           <a:noFill/>
           <a:ln w="15875">
-            <a:solidFill>
-              <a:srgbClr val="D6E8F6"/>
-            </a:solidFill>
+            <a:noFill/>
           </a:ln>
           <a:effectLst>
             <a:outerShdw blurRad="63500" dist="28398" dir="3806086" rotWithShape="0">
@@ -20199,7 +20156,7 @@
           <p:cNvPr id="25" name="codex_template_top_accent">
             <a:extLst>
               <a:ext uri="{FF2B5EF4-FFF2-40B4-BE49-F238E27FC236}">
-                <a16:creationId xmlns:a16="http://schemas.microsoft.com/office/drawing/2014/main" id="{42AC5E9E-7DCF-57D9-E66D-5E24B7C272B7}"/>
+                <ns2:creationId id="{42AC5E9E-7DCF-57D9-E66D-5E24B7C272B7}"/>
               </a:ext>
             </a:extLst>
           </p:cNvPr>
@@ -20219,19 +20176,18 @@
           </a:solidFill>
           <a:ln w="25400" cap="flat" cmpd="sng" algn="ctr">
             <a:noFill/>
-            <a:prstDash val="solid"/>
           </a:ln>
           <a:effectLst/>
           <a:extLst>
             <a:ext uri="{91240B29-F687-4F45-9708-019B960494DF}">
-              <a14:hiddenLine xmlns:a14="http://schemas.microsoft.com/office/drawing/2010/main" w="25400" cap="flat" cmpd="sng" algn="ctr">
+              <ns3:hiddenLine w="25400" cap="flat" cmpd="sng" algn="ctr">
                 <a:solidFill>
                   <a:schemeClr val="accent1">
                     <a:shade val="15000"/>
                   </a:schemeClr>
                 </a:solidFill>
                 <a:prstDash val="solid"/>
-              </a14:hiddenLine>
+              </ns3:hiddenLine>
             </a:ext>
           </a:extLst>
         </p:spPr>
@@ -20265,7 +20221,7 @@
           <p:cNvPr id="27" name="codex_template_footer">
             <a:extLst>
               <a:ext uri="{FF2B5EF4-FFF2-40B4-BE49-F238E27FC236}">
-                <a16:creationId xmlns:a16="http://schemas.microsoft.com/office/drawing/2014/main" id="{CAC890FB-E6F3-1A0A-05B0-1D38D56DB36F}"/>
+                <ns2:creationId id="{CAC890FB-E6F3-1A0A-05B0-1D38D56DB36F}"/>
               </a:ext>
             </a:extLst>
           </p:cNvPr>
@@ -20305,7 +20261,7 @@
           <p:cNvPr id="28" name="codex_template_slide_number">
             <a:extLst>
               <a:ext uri="{FF2B5EF4-FFF2-40B4-BE49-F238E27FC236}">
-                <a16:creationId xmlns:a16="http://schemas.microsoft.com/office/drawing/2014/main" id="{75B295F7-F3BA-DBD2-C2EF-A6BF2BC2649D}"/>
+                <ns2:creationId id="{75B295F7-F3BA-DBD2-C2EF-A6BF2BC2649D}"/>
               </a:ext>
             </a:extLst>
           </p:cNvPr>
@@ -20345,7 +20301,7 @@
           <p:cNvPr id="29" name="codex_template_title_rule">
             <a:extLst>
               <a:ext uri="{FF2B5EF4-FFF2-40B4-BE49-F238E27FC236}">
-                <a16:creationId xmlns:a16="http://schemas.microsoft.com/office/drawing/2014/main" id="{1F39C0E4-A617-07F1-EF35-8F4B2D73240A}"/>
+                <ns2:creationId id="{1F39C0E4-A617-07F1-EF35-8F4B2D73240A}"/>
               </a:ext>
             </a:extLst>
           </p:cNvPr>
@@ -20384,7 +20340,7 @@
     </p:spTree>
     <p:extLst>
       <p:ext uri="{BB962C8B-B14F-4D97-AF65-F5344CB8AC3E}">
-        <p14:creationId xmlns:p14="http://schemas.microsoft.com/office/powerpoint/2010/main" val="1177460833"/>
+        <ns4:creationId val="1177460833"/>
       </p:ext>
     </p:extLst>
   </p:cSld>
@@ -20395,7 +20351,7 @@
 </file>
 
 <file path=ppt/slides/slide14.xml><?xml version="1.0" encoding="utf-8"?>
-<p:sld xmlns:a="http://schemas.openxmlformats.org/drawingml/2006/main" xmlns:r="http://schemas.openxmlformats.org/officeDocument/2006/relationships" xmlns:p="http://schemas.openxmlformats.org/presentationml/2006/main">
+<p:sld xmlns:a="http://schemas.openxmlformats.org/drawingml/2006/main" xmlns:ns2="http://schemas.microsoft.com/office/drawing/2014/main" xmlns:ns3="http://schemas.microsoft.com/office/drawing/2010/main" xmlns:ns4="http://schemas.microsoft.com/office/powerpoint/2010/main" xmlns:p="http://schemas.openxmlformats.org/presentationml/2006/main">
   <p:cSld>
     <p:spTree>
       <p:nvGrpSpPr>
@@ -20416,7 +20372,7 @@
           <p:cNvPr id="22" name="codex_template_right_wash">
             <a:extLst>
               <a:ext uri="{FF2B5EF4-FFF2-40B4-BE49-F238E27FC236}">
-                <a16:creationId xmlns:a16="http://schemas.microsoft.com/office/drawing/2014/main" id="{506838ED-5E43-4903-B4A6-E1CB72132994}"/>
+                <ns2:creationId id="{506838ED-5E43-4903-B4A6-E1CB72132994}"/>
               </a:ext>
             </a:extLst>
           </p:cNvPr>
@@ -20438,19 +20394,18 @@
           </a:solidFill>
           <a:ln w="25400" cap="flat" cmpd="sng" algn="ctr">
             <a:noFill/>
-            <a:prstDash val="solid"/>
           </a:ln>
           <a:effectLst/>
           <a:extLst>
             <a:ext uri="{91240B29-F687-4F45-9708-019B960494DF}">
-              <a14:hiddenLine xmlns:a14="http://schemas.microsoft.com/office/drawing/2010/main" w="25400" cap="flat" cmpd="sng" algn="ctr">
+              <ns3:hiddenLine w="25400" cap="flat" cmpd="sng" algn="ctr">
                 <a:solidFill>
                   <a:schemeClr val="accent1">
                     <a:shade val="15000"/>
                   </a:schemeClr>
                 </a:solidFill>
                 <a:prstDash val="solid"/>
-              </a14:hiddenLine>
+              </ns3:hiddenLine>
             </a:ext>
           </a:extLst>
         </p:spPr>
@@ -20484,7 +20439,7 @@
           <p:cNvPr id="21" name="codex_template_header_band">
             <a:extLst>
               <a:ext uri="{FF2B5EF4-FFF2-40B4-BE49-F238E27FC236}">
-                <a16:creationId xmlns:a16="http://schemas.microsoft.com/office/drawing/2014/main" id="{85BA80A4-6150-EE46-8C8D-7F181D0C423D}"/>
+                <ns2:creationId id="{85BA80A4-6150-EE46-8C8D-7F181D0C423D}"/>
               </a:ext>
             </a:extLst>
           </p:cNvPr>
@@ -20506,19 +20461,18 @@
           </a:solidFill>
           <a:ln w="25400" cap="flat" cmpd="sng" algn="ctr">
             <a:noFill/>
-            <a:prstDash val="solid"/>
           </a:ln>
           <a:effectLst/>
           <a:extLst>
             <a:ext uri="{91240B29-F687-4F45-9708-019B960494DF}">
-              <a14:hiddenLine xmlns:a14="http://schemas.microsoft.com/office/drawing/2010/main" w="25400" cap="flat" cmpd="sng" algn="ctr">
+              <ns3:hiddenLine w="25400" cap="flat" cmpd="sng" algn="ctr">
                 <a:solidFill>
                   <a:schemeClr val="accent1">
                     <a:shade val="15000"/>
                   </a:schemeClr>
                 </a:solidFill>
                 <a:prstDash val="solid"/>
-              </a14:hiddenLine>
+              </ns3:hiddenLine>
             </a:ext>
           </a:extLst>
         </p:spPr>
@@ -20552,7 +20506,7 @@
           <p:cNvPr id="20" name="codex_template_background">
             <a:extLst>
               <a:ext uri="{FF2B5EF4-FFF2-40B4-BE49-F238E27FC236}">
-                <a16:creationId xmlns:a16="http://schemas.microsoft.com/office/drawing/2014/main" id="{82E33662-FD20-3A8C-05E7-78C3550FF59E}"/>
+                <ns2:creationId id="{82E33662-FD20-3A8C-05E7-78C3550FF59E}"/>
               </a:ext>
             </a:extLst>
           </p:cNvPr>
@@ -20572,19 +20526,18 @@
           </a:solidFill>
           <a:ln w="25400" cap="flat" cmpd="sng" algn="ctr">
             <a:noFill/>
-            <a:prstDash val="solid"/>
           </a:ln>
           <a:effectLst/>
           <a:extLst>
             <a:ext uri="{91240B29-F687-4F45-9708-019B960494DF}">
-              <a14:hiddenLine xmlns:a14="http://schemas.microsoft.com/office/drawing/2010/main" w="25400" cap="flat" cmpd="sng" algn="ctr">
+              <ns3:hiddenLine w="25400" cap="flat" cmpd="sng" algn="ctr">
                 <a:solidFill>
                   <a:schemeClr val="accent1">
                     <a:shade val="15000"/>
                   </a:schemeClr>
                 </a:solidFill>
                 <a:prstDash val="solid"/>
-              </a14:hiddenLine>
+              </ns3:hiddenLine>
             </a:ext>
           </a:extLst>
         </p:spPr>
@@ -20618,7 +20571,7 @@
           <p:cNvPr id="11" name="TextBox 10">
             <a:extLst>
               <a:ext uri="{FF2B5EF4-FFF2-40B4-BE49-F238E27FC236}">
-                <a16:creationId xmlns:a16="http://schemas.microsoft.com/office/drawing/2014/main" id="{4FE7EFAB-D33D-34AE-03D3-FE5ACAFB1F9E}"/>
+                <ns2:creationId id="{4FE7EFAB-D33D-34AE-03D3-FE5ACAFB1F9E}"/>
               </a:ext>
             </a:extLst>
           </p:cNvPr>
@@ -20666,7 +20619,7 @@
           <p:cNvPr id="14" name="Rectangle: Rounded Corners 13">
             <a:extLst>
               <a:ext uri="{FF2B5EF4-FFF2-40B4-BE49-F238E27FC236}">
-                <a16:creationId xmlns:a16="http://schemas.microsoft.com/office/drawing/2014/main" id="{00346461-C52B-05CE-1EE8-A89235EB3E4D}"/>
+                <ns2:creationId id="{00346461-C52B-05CE-1EE8-A89235EB3E4D}"/>
               </a:ext>
             </a:extLst>
           </p:cNvPr>
@@ -20697,12 +20650,12 @@
           </a:effectLst>
           <a:extLst>
             <a:ext uri="{91240B29-F687-4F45-9708-019B960494DF}">
-              <a14:hiddenLine xmlns:a14="http://schemas.microsoft.com/office/drawing/2010/main" w="15875" cap="flat" cmpd="sng" algn="ctr">
+              <ns3:hiddenLine w="15875" cap="flat" cmpd="sng" algn="ctr">
                 <a:solidFill>
                   <a:srgbClr val="D54F4F"/>
                 </a:solidFill>
                 <a:prstDash val="solid"/>
-              </a14:hiddenLine>
+              </ns3:hiddenLine>
             </a:ext>
           </a:extLst>
         </p:spPr>
@@ -20770,7 +20723,7 @@
           <p:cNvPr id="15" name="Rectangle: Rounded Corners 14">
             <a:extLst>
               <a:ext uri="{FF2B5EF4-FFF2-40B4-BE49-F238E27FC236}">
-                <a16:creationId xmlns:a16="http://schemas.microsoft.com/office/drawing/2014/main" id="{9F71792E-12D2-08B7-BD6F-07D54A11C820}"/>
+                <ns2:creationId id="{9F71792E-12D2-08B7-BD6F-07D54A11C820}"/>
               </a:ext>
             </a:extLst>
           </p:cNvPr>
@@ -20801,12 +20754,12 @@
           </a:effectLst>
           <a:extLst>
             <a:ext uri="{91240B29-F687-4F45-9708-019B960494DF}">
-              <a14:hiddenLine xmlns:a14="http://schemas.microsoft.com/office/drawing/2010/main" w="15875" cap="flat" cmpd="sng" algn="ctr">
+              <ns3:hiddenLine w="15875" cap="flat" cmpd="sng" algn="ctr">
                 <a:solidFill>
                   <a:srgbClr val="EE9726"/>
                 </a:solidFill>
                 <a:prstDash val="solid"/>
-              </a14:hiddenLine>
+              </ns3:hiddenLine>
             </a:ext>
           </a:extLst>
         </p:spPr>
@@ -20874,7 +20827,7 @@
           <p:cNvPr id="16" name="Rectangle: Rounded Corners 15">
             <a:extLst>
               <a:ext uri="{FF2B5EF4-FFF2-40B4-BE49-F238E27FC236}">
-                <a16:creationId xmlns:a16="http://schemas.microsoft.com/office/drawing/2014/main" id="{73DF315F-1EFB-DE1B-E7E6-17AD97981E11}"/>
+                <ns2:creationId id="{73DF315F-1EFB-DE1B-E7E6-17AD97981E11}"/>
               </a:ext>
             </a:extLst>
           </p:cNvPr>
@@ -20905,12 +20858,12 @@
           </a:effectLst>
           <a:extLst>
             <a:ext uri="{91240B29-F687-4F45-9708-019B960494DF}">
-              <a14:hiddenLine xmlns:a14="http://schemas.microsoft.com/office/drawing/2010/main" w="15875" cap="flat" cmpd="sng" algn="ctr">
+              <ns3:hiddenLine w="15875" cap="flat" cmpd="sng" algn="ctr">
                 <a:solidFill>
                   <a:srgbClr val="009988"/>
                 </a:solidFill>
                 <a:prstDash val="solid"/>
-              </a14:hiddenLine>
+              </ns3:hiddenLine>
             </a:ext>
           </a:extLst>
         </p:spPr>
@@ -20966,7 +20919,7 @@
           <p:cNvPr id="17" name="Rectangle: Rounded Corners 16">
             <a:extLst>
               <a:ext uri="{FF2B5EF4-FFF2-40B4-BE49-F238E27FC236}">
-                <a16:creationId xmlns:a16="http://schemas.microsoft.com/office/drawing/2014/main" id="{A4BE277E-7773-4BA8-BA60-EA4D9161B820}"/>
+                <ns2:creationId id="{A4BE277E-7773-4BA8-BA60-EA4D9161B820}"/>
               </a:ext>
             </a:extLst>
           </p:cNvPr>
@@ -20997,12 +20950,12 @@
           </a:effectLst>
           <a:extLst>
             <a:ext uri="{91240B29-F687-4F45-9708-019B960494DF}">
-              <a14:hiddenLine xmlns:a14="http://schemas.microsoft.com/office/drawing/2010/main" w="15875" cap="flat" cmpd="sng" algn="ctr">
+              <ns3:hiddenLine w="15875" cap="flat" cmpd="sng" algn="ctr">
                 <a:solidFill>
                   <a:srgbClr val="5B6E86"/>
                 </a:solidFill>
                 <a:prstDash val="solid"/>
-              </a14:hiddenLine>
+              </ns3:hiddenLine>
             </a:ext>
           </a:extLst>
         </p:spPr>
@@ -21058,7 +21011,7 @@
           <p:cNvPr id="23" name="codex_template_top_accent">
             <a:extLst>
               <a:ext uri="{FF2B5EF4-FFF2-40B4-BE49-F238E27FC236}">
-                <a16:creationId xmlns:a16="http://schemas.microsoft.com/office/drawing/2014/main" id="{908977A8-AB1C-A760-D70F-DFBC787ED0AC}"/>
+                <ns2:creationId id="{908977A8-AB1C-A760-D70F-DFBC787ED0AC}"/>
               </a:ext>
             </a:extLst>
           </p:cNvPr>
@@ -21078,19 +21031,18 @@
           </a:solidFill>
           <a:ln w="25400" cap="flat" cmpd="sng" algn="ctr">
             <a:noFill/>
-            <a:prstDash val="solid"/>
           </a:ln>
           <a:effectLst/>
           <a:extLst>
             <a:ext uri="{91240B29-F687-4F45-9708-019B960494DF}">
-              <a14:hiddenLine xmlns:a14="http://schemas.microsoft.com/office/drawing/2010/main" w="25400" cap="flat" cmpd="sng" algn="ctr">
+              <ns3:hiddenLine w="25400" cap="flat" cmpd="sng" algn="ctr">
                 <a:solidFill>
                   <a:schemeClr val="accent1">
                     <a:shade val="15000"/>
                   </a:schemeClr>
                 </a:solidFill>
                 <a:prstDash val="solid"/>
-              </a14:hiddenLine>
+              </ns3:hiddenLine>
             </a:ext>
           </a:extLst>
         </p:spPr>
@@ -21124,7 +21076,7 @@
           <p:cNvPr id="25" name="codex_template_footer">
             <a:extLst>
               <a:ext uri="{FF2B5EF4-FFF2-40B4-BE49-F238E27FC236}">
-                <a16:creationId xmlns:a16="http://schemas.microsoft.com/office/drawing/2014/main" id="{235AC189-D35E-8CDB-CD63-000F556B4FBC}"/>
+                <ns2:creationId id="{235AC189-D35E-8CDB-CD63-000F556B4FBC}"/>
               </a:ext>
             </a:extLst>
           </p:cNvPr>
@@ -21164,7 +21116,7 @@
           <p:cNvPr id="26" name="codex_template_slide_number">
             <a:extLst>
               <a:ext uri="{FF2B5EF4-FFF2-40B4-BE49-F238E27FC236}">
-                <a16:creationId xmlns:a16="http://schemas.microsoft.com/office/drawing/2014/main" id="{2EDB0D60-2B54-FE3E-7C03-CBE1D8F31F1A}"/>
+                <ns2:creationId id="{2EDB0D60-2B54-FE3E-7C03-CBE1D8F31F1A}"/>
               </a:ext>
             </a:extLst>
           </p:cNvPr>
@@ -21204,7 +21156,7 @@
           <p:cNvPr id="27" name="codex_template_title_rule">
             <a:extLst>
               <a:ext uri="{FF2B5EF4-FFF2-40B4-BE49-F238E27FC236}">
-                <a16:creationId xmlns:a16="http://schemas.microsoft.com/office/drawing/2014/main" id="{6D4BD1B4-C072-A70C-7E9A-78BFB467193E}"/>
+                <ns2:creationId id="{6D4BD1B4-C072-A70C-7E9A-78BFB467193E}"/>
               </a:ext>
             </a:extLst>
           </p:cNvPr>
@@ -21243,7 +21195,7 @@
     </p:spTree>
     <p:extLst>
       <p:ext uri="{BB962C8B-B14F-4D97-AF65-F5344CB8AC3E}">
-        <p14:creationId xmlns:p14="http://schemas.microsoft.com/office/powerpoint/2010/main" val="3115698262"/>
+        <ns4:creationId val="3115698262"/>
       </p:ext>
     </p:extLst>
   </p:cSld>
@@ -21254,7 +21206,7 @@
 </file>
 
 <file path=ppt/slides/slide15.xml><?xml version="1.0" encoding="utf-8"?>
-<p:sld xmlns:a="http://schemas.openxmlformats.org/drawingml/2006/main" xmlns:r="http://schemas.openxmlformats.org/officeDocument/2006/relationships" xmlns:p="http://schemas.openxmlformats.org/presentationml/2006/main">
+<p:sld xmlns:a="http://schemas.openxmlformats.org/drawingml/2006/main" xmlns:ns2="http://schemas.microsoft.com/office/drawing/2014/main" xmlns:ns3="http://schemas.microsoft.com/office/drawing/2010/main" xmlns:ns4="http://schemas.microsoft.com/office/powerpoint/2010/main" xmlns:p="http://schemas.openxmlformats.org/presentationml/2006/main">
   <p:cSld>
     <p:spTree>
       <p:nvGrpSpPr>
@@ -21275,7 +21227,7 @@
           <p:cNvPr id="24" name="codex_template_right_wash">
             <a:extLst>
               <a:ext uri="{FF2B5EF4-FFF2-40B4-BE49-F238E27FC236}">
-                <a16:creationId xmlns:a16="http://schemas.microsoft.com/office/drawing/2014/main" id="{78BA1766-5F4A-C2A0-196A-3531129DFB02}"/>
+                <ns2:creationId id="{78BA1766-5F4A-C2A0-196A-3531129DFB02}"/>
               </a:ext>
             </a:extLst>
           </p:cNvPr>
@@ -21297,19 +21249,18 @@
           </a:solidFill>
           <a:ln w="25400" cap="flat" cmpd="sng" algn="ctr">
             <a:noFill/>
-            <a:prstDash val="solid"/>
           </a:ln>
           <a:effectLst/>
           <a:extLst>
             <a:ext uri="{91240B29-F687-4F45-9708-019B960494DF}">
-              <a14:hiddenLine xmlns:a14="http://schemas.microsoft.com/office/drawing/2010/main" w="25400" cap="flat" cmpd="sng" algn="ctr">
+              <ns3:hiddenLine w="25400" cap="flat" cmpd="sng" algn="ctr">
                 <a:solidFill>
                   <a:schemeClr val="accent1">
                     <a:shade val="15000"/>
                   </a:schemeClr>
                 </a:solidFill>
                 <a:prstDash val="solid"/>
-              </a14:hiddenLine>
+              </ns3:hiddenLine>
             </a:ext>
           </a:extLst>
         </p:spPr>
@@ -21343,7 +21294,7 @@
           <p:cNvPr id="23" name="codex_template_header_band">
             <a:extLst>
               <a:ext uri="{FF2B5EF4-FFF2-40B4-BE49-F238E27FC236}">
-                <a16:creationId xmlns:a16="http://schemas.microsoft.com/office/drawing/2014/main" id="{D37BBB3E-3A6A-0358-9CFD-BD1FCAF4DDB4}"/>
+                <ns2:creationId id="{D37BBB3E-3A6A-0358-9CFD-BD1FCAF4DDB4}"/>
               </a:ext>
             </a:extLst>
           </p:cNvPr>
@@ -21365,19 +21316,18 @@
           </a:solidFill>
           <a:ln w="25400" cap="flat" cmpd="sng" algn="ctr">
             <a:noFill/>
-            <a:prstDash val="solid"/>
           </a:ln>
           <a:effectLst/>
           <a:extLst>
             <a:ext uri="{91240B29-F687-4F45-9708-019B960494DF}">
-              <a14:hiddenLine xmlns:a14="http://schemas.microsoft.com/office/drawing/2010/main" w="25400" cap="flat" cmpd="sng" algn="ctr">
+              <ns3:hiddenLine w="25400" cap="flat" cmpd="sng" algn="ctr">
                 <a:solidFill>
                   <a:schemeClr val="accent1">
                     <a:shade val="15000"/>
                   </a:schemeClr>
                 </a:solidFill>
                 <a:prstDash val="solid"/>
-              </a14:hiddenLine>
+              </ns3:hiddenLine>
             </a:ext>
           </a:extLst>
         </p:spPr>
@@ -21411,7 +21361,7 @@
           <p:cNvPr id="22" name="codex_template_background">
             <a:extLst>
               <a:ext uri="{FF2B5EF4-FFF2-40B4-BE49-F238E27FC236}">
-                <a16:creationId xmlns:a16="http://schemas.microsoft.com/office/drawing/2014/main" id="{90B36275-C119-399A-1172-D7B7DD3F6BFE}"/>
+                <ns2:creationId id="{90B36275-C119-399A-1172-D7B7DD3F6BFE}"/>
               </a:ext>
             </a:extLst>
           </p:cNvPr>
@@ -21431,19 +21381,18 @@
           </a:solidFill>
           <a:ln w="25400" cap="flat" cmpd="sng" algn="ctr">
             <a:noFill/>
-            <a:prstDash val="solid"/>
           </a:ln>
           <a:effectLst/>
           <a:extLst>
             <a:ext uri="{91240B29-F687-4F45-9708-019B960494DF}">
-              <a14:hiddenLine xmlns:a14="http://schemas.microsoft.com/office/drawing/2010/main" w="25400" cap="flat" cmpd="sng" algn="ctr">
+              <ns3:hiddenLine w="25400" cap="flat" cmpd="sng" algn="ctr">
                 <a:solidFill>
                   <a:schemeClr val="accent1">
                     <a:shade val="15000"/>
                   </a:schemeClr>
                 </a:solidFill>
                 <a:prstDash val="solid"/>
-              </a14:hiddenLine>
+              </ns3:hiddenLine>
             </a:ext>
           </a:extLst>
         </p:spPr>
@@ -21477,7 +21426,7 @@
           <p:cNvPr id="11" name="TextBox 10">
             <a:extLst>
               <a:ext uri="{FF2B5EF4-FFF2-40B4-BE49-F238E27FC236}">
-                <a16:creationId xmlns:a16="http://schemas.microsoft.com/office/drawing/2014/main" id="{E06C03D2-ED21-EE3A-1005-8F099706F753}"/>
+                <ns2:creationId id="{E06C03D2-ED21-EE3A-1005-8F099706F753}"/>
               </a:ext>
             </a:extLst>
           </p:cNvPr>
@@ -21525,7 +21474,7 @@
           <p:cNvPr id="14" name="Rectangle: Rounded Corners 13">
             <a:extLst>
               <a:ext uri="{FF2B5EF4-FFF2-40B4-BE49-F238E27FC236}">
-                <a16:creationId xmlns:a16="http://schemas.microsoft.com/office/drawing/2014/main" id="{BDD189D0-C9CC-9BCF-6737-67B2EAD7250B}"/>
+                <ns2:creationId id="{BDD189D0-C9CC-9BCF-6737-67B2EAD7250B}"/>
               </a:ext>
             </a:extLst>
           </p:cNvPr>
@@ -21544,9 +21493,7 @@
             <a:srgbClr val="E2F1FF"/>
           </a:solidFill>
           <a:ln w="15875">
-            <a:solidFill>
-              <a:srgbClr val="D6E8F6"/>
-            </a:solidFill>
+            <a:noFill/>
           </a:ln>
           <a:effectLst>
             <a:outerShdw blurRad="63500" dist="28398" dir="3806086" rotWithShape="0">
@@ -21591,7 +21538,7 @@
           <p:cNvPr id="15" name="TextBox 14">
             <a:extLst>
               <a:ext uri="{FF2B5EF4-FFF2-40B4-BE49-F238E27FC236}">
-                <a16:creationId xmlns:a16="http://schemas.microsoft.com/office/drawing/2014/main" id="{847D629A-24FF-E5C0-F470-0A7F765EEC9C}"/>
+                <ns2:creationId id="{847D629A-24FF-E5C0-F470-0A7F765EEC9C}"/>
               </a:ext>
             </a:extLst>
           </p:cNvPr>
@@ -21608,9 +21555,7 @@
           </a:prstGeom>
           <a:noFill/>
           <a:ln w="15875">
-            <a:solidFill>
-              <a:srgbClr val="D6E8F6"/>
-            </a:solidFill>
+            <a:noFill/>
           </a:ln>
           <a:effectLst>
             <a:outerShdw blurRad="63500" dist="28398" dir="3806086" rotWithShape="0">
@@ -21687,7 +21632,7 @@
           <p:cNvPr id="16" name="Rectangle: Rounded Corners 15">
             <a:extLst>
               <a:ext uri="{FF2B5EF4-FFF2-40B4-BE49-F238E27FC236}">
-                <a16:creationId xmlns:a16="http://schemas.microsoft.com/office/drawing/2014/main" id="{762D366E-D527-8315-F3F6-DC4CA9336D92}"/>
+                <ns2:creationId id="{762D366E-D527-8315-F3F6-DC4CA9336D92}"/>
               </a:ext>
             </a:extLst>
           </p:cNvPr>
@@ -21706,9 +21651,7 @@
             <a:srgbClr val="E1F8F4"/>
           </a:solidFill>
           <a:ln w="15875">
-            <a:solidFill>
-              <a:srgbClr val="D6E8F6"/>
-            </a:solidFill>
+            <a:noFill/>
           </a:ln>
           <a:effectLst>
             <a:outerShdw blurRad="63500" dist="28398" dir="3806086" rotWithShape="0">
@@ -21753,7 +21696,7 @@
           <p:cNvPr id="17" name="TextBox 16">
             <a:extLst>
               <a:ext uri="{FF2B5EF4-FFF2-40B4-BE49-F238E27FC236}">
-                <a16:creationId xmlns:a16="http://schemas.microsoft.com/office/drawing/2014/main" id="{94F84B98-2E74-ECFB-52AD-3DEF92D6F597}"/>
+                <ns2:creationId id="{94F84B98-2E74-ECFB-52AD-3DEF92D6F597}"/>
               </a:ext>
             </a:extLst>
           </p:cNvPr>
@@ -21770,9 +21713,7 @@
           </a:prstGeom>
           <a:noFill/>
           <a:ln w="15875">
-            <a:solidFill>
-              <a:srgbClr val="D6E8F6"/>
-            </a:solidFill>
+            <a:noFill/>
           </a:ln>
           <a:effectLst>
             <a:outerShdw blurRad="63500" dist="28398" dir="3806086" rotWithShape="0">
@@ -21867,7 +21808,7 @@
           <p:cNvPr id="20" name="TextBox 19">
             <a:extLst>
               <a:ext uri="{FF2B5EF4-FFF2-40B4-BE49-F238E27FC236}">
-                <a16:creationId xmlns:a16="http://schemas.microsoft.com/office/drawing/2014/main" id="{14EB0442-0A82-1B63-E59E-4E47ED759036}"/>
+                <ns2:creationId id="{14EB0442-0A82-1B63-E59E-4E47ED759036}"/>
               </a:ext>
             </a:extLst>
           </p:cNvPr>
@@ -21884,9 +21825,7 @@
           </a:prstGeom>
           <a:noFill/>
           <a:ln w="15875">
-            <a:solidFill>
-              <a:srgbClr val="D6E8F6"/>
-            </a:solidFill>
+            <a:noFill/>
           </a:ln>
           <a:effectLst>
             <a:outerShdw blurRad="63500" dist="28398" dir="3806086" rotWithShape="0">
@@ -21920,7 +21859,7 @@
           <p:cNvPr id="21" name="TextBox 20">
             <a:extLst>
               <a:ext uri="{FF2B5EF4-FFF2-40B4-BE49-F238E27FC236}">
-                <a16:creationId xmlns:a16="http://schemas.microsoft.com/office/drawing/2014/main" id="{5D7EDA3D-B741-933C-AD61-1239CAE56AA3}"/>
+                <ns2:creationId id="{5D7EDA3D-B741-933C-AD61-1239CAE56AA3}"/>
               </a:ext>
             </a:extLst>
           </p:cNvPr>
@@ -21937,9 +21876,7 @@
           </a:prstGeom>
           <a:noFill/>
           <a:ln w="15875">
-            <a:solidFill>
-              <a:srgbClr val="D6E8F6"/>
-            </a:solidFill>
+            <a:noFill/>
           </a:ln>
           <a:effectLst>
             <a:outerShdw blurRad="63500" dist="28398" dir="3806086" rotWithShape="0">
@@ -21973,7 +21910,7 @@
           <p:cNvPr id="25" name="codex_template_top_accent">
             <a:extLst>
               <a:ext uri="{FF2B5EF4-FFF2-40B4-BE49-F238E27FC236}">
-                <a16:creationId xmlns:a16="http://schemas.microsoft.com/office/drawing/2014/main" id="{6EB5E8CC-1916-D825-B102-530B212FED2B}"/>
+                <ns2:creationId id="{6EB5E8CC-1916-D825-B102-530B212FED2B}"/>
               </a:ext>
             </a:extLst>
           </p:cNvPr>
@@ -21993,19 +21930,18 @@
           </a:solidFill>
           <a:ln w="25400" cap="flat" cmpd="sng" algn="ctr">
             <a:noFill/>
-            <a:prstDash val="solid"/>
           </a:ln>
           <a:effectLst/>
           <a:extLst>
             <a:ext uri="{91240B29-F687-4F45-9708-019B960494DF}">
-              <a14:hiddenLine xmlns:a14="http://schemas.microsoft.com/office/drawing/2010/main" w="25400" cap="flat" cmpd="sng" algn="ctr">
+              <ns3:hiddenLine w="25400" cap="flat" cmpd="sng" algn="ctr">
                 <a:solidFill>
                   <a:schemeClr val="accent1">
                     <a:shade val="15000"/>
                   </a:schemeClr>
                 </a:solidFill>
                 <a:prstDash val="solid"/>
-              </a14:hiddenLine>
+              </ns3:hiddenLine>
             </a:ext>
           </a:extLst>
         </p:spPr>
@@ -22039,7 +21975,7 @@
           <p:cNvPr id="27" name="codex_template_footer">
             <a:extLst>
               <a:ext uri="{FF2B5EF4-FFF2-40B4-BE49-F238E27FC236}">
-                <a16:creationId xmlns:a16="http://schemas.microsoft.com/office/drawing/2014/main" id="{FCF4D95A-AF72-9450-2FFE-1C3C3E84ADA7}"/>
+                <ns2:creationId id="{FCF4D95A-AF72-9450-2FFE-1C3C3E84ADA7}"/>
               </a:ext>
             </a:extLst>
           </p:cNvPr>
@@ -22079,7 +22015,7 @@
           <p:cNvPr id="28" name="codex_template_slide_number">
             <a:extLst>
               <a:ext uri="{FF2B5EF4-FFF2-40B4-BE49-F238E27FC236}">
-                <a16:creationId xmlns:a16="http://schemas.microsoft.com/office/drawing/2014/main" id="{655EB147-B824-E862-0970-DFF0493AB9DD}"/>
+                <ns2:creationId id="{655EB147-B824-E862-0970-DFF0493AB9DD}"/>
               </a:ext>
             </a:extLst>
           </p:cNvPr>
@@ -22119,7 +22055,7 @@
           <p:cNvPr id="29" name="codex_template_title_rule">
             <a:extLst>
               <a:ext uri="{FF2B5EF4-FFF2-40B4-BE49-F238E27FC236}">
-                <a16:creationId xmlns:a16="http://schemas.microsoft.com/office/drawing/2014/main" id="{45E2CBE6-2FCB-3BC1-79DC-B6EE628A8837}"/>
+                <ns2:creationId id="{45E2CBE6-2FCB-3BC1-79DC-B6EE628A8837}"/>
               </a:ext>
             </a:extLst>
           </p:cNvPr>
@@ -22158,7 +22094,7 @@
     </p:spTree>
     <p:extLst>
       <p:ext uri="{BB962C8B-B14F-4D97-AF65-F5344CB8AC3E}">
-        <p14:creationId xmlns:p14="http://schemas.microsoft.com/office/powerpoint/2010/main" val="3935833028"/>
+        <ns4:creationId val="3935833028"/>
       </p:ext>
     </p:extLst>
   </p:cSld>
@@ -22169,7 +22105,7 @@
 </file>
 
 <file path=ppt/slides/slide16.xml><?xml version="1.0" encoding="utf-8"?>
-<p:sld xmlns:a="http://schemas.openxmlformats.org/drawingml/2006/main" xmlns:r="http://schemas.openxmlformats.org/officeDocument/2006/relationships" xmlns:p="http://schemas.openxmlformats.org/presentationml/2006/main">
+<p:sld xmlns:a="http://schemas.openxmlformats.org/drawingml/2006/main" xmlns:ns2="http://schemas.microsoft.com/office/drawing/2014/main" xmlns:ns3="http://schemas.microsoft.com/office/drawing/2010/main" xmlns:ns4="http://schemas.microsoft.com/office/powerpoint/2010/main" xmlns:p="http://schemas.openxmlformats.org/presentationml/2006/main">
   <p:cSld>
     <p:spTree>
       <p:nvGrpSpPr>
@@ -22190,7 +22126,7 @@
           <p:cNvPr id="21" name="codex_template_right_wash">
             <a:extLst>
               <a:ext uri="{FF2B5EF4-FFF2-40B4-BE49-F238E27FC236}">
-                <a16:creationId xmlns:a16="http://schemas.microsoft.com/office/drawing/2014/main" id="{E063E9E0-C0CD-D162-B6ED-635C48CFE531}"/>
+                <ns2:creationId id="{E063E9E0-C0CD-D162-B6ED-635C48CFE531}"/>
               </a:ext>
             </a:extLst>
           </p:cNvPr>
@@ -22212,19 +22148,18 @@
           </a:solidFill>
           <a:ln w="25400" cap="flat" cmpd="sng" algn="ctr">
             <a:noFill/>
-            <a:prstDash val="solid"/>
           </a:ln>
           <a:effectLst/>
           <a:extLst>
             <a:ext uri="{91240B29-F687-4F45-9708-019B960494DF}">
-              <a14:hiddenLine xmlns:a14="http://schemas.microsoft.com/office/drawing/2010/main" w="25400" cap="flat" cmpd="sng" algn="ctr">
+              <ns3:hiddenLine w="25400" cap="flat" cmpd="sng" algn="ctr">
                 <a:solidFill>
                   <a:schemeClr val="accent1">
                     <a:shade val="15000"/>
                   </a:schemeClr>
                 </a:solidFill>
                 <a:prstDash val="solid"/>
-              </a14:hiddenLine>
+              </ns3:hiddenLine>
             </a:ext>
           </a:extLst>
         </p:spPr>
@@ -22258,7 +22193,7 @@
           <p:cNvPr id="20" name="codex_template_header_band">
             <a:extLst>
               <a:ext uri="{FF2B5EF4-FFF2-40B4-BE49-F238E27FC236}">
-                <a16:creationId xmlns:a16="http://schemas.microsoft.com/office/drawing/2014/main" id="{08CECE3C-4601-5678-C1C2-47699C3F8E99}"/>
+                <ns2:creationId id="{08CECE3C-4601-5678-C1C2-47699C3F8E99}"/>
               </a:ext>
             </a:extLst>
           </p:cNvPr>
@@ -22280,19 +22215,18 @@
           </a:solidFill>
           <a:ln w="25400" cap="flat" cmpd="sng" algn="ctr">
             <a:noFill/>
-            <a:prstDash val="solid"/>
           </a:ln>
           <a:effectLst/>
           <a:extLst>
             <a:ext uri="{91240B29-F687-4F45-9708-019B960494DF}">
-              <a14:hiddenLine xmlns:a14="http://schemas.microsoft.com/office/drawing/2010/main" w="25400" cap="flat" cmpd="sng" algn="ctr">
+              <ns3:hiddenLine w="25400" cap="flat" cmpd="sng" algn="ctr">
                 <a:solidFill>
                   <a:schemeClr val="accent1">
                     <a:shade val="15000"/>
                   </a:schemeClr>
                 </a:solidFill>
                 <a:prstDash val="solid"/>
-              </a14:hiddenLine>
+              </ns3:hiddenLine>
             </a:ext>
           </a:extLst>
         </p:spPr>
@@ -22326,7 +22260,7 @@
           <p:cNvPr id="19" name="codex_template_background">
             <a:extLst>
               <a:ext uri="{FF2B5EF4-FFF2-40B4-BE49-F238E27FC236}">
-                <a16:creationId xmlns:a16="http://schemas.microsoft.com/office/drawing/2014/main" id="{3E3E1843-10DD-BC43-FA7E-399D2046D99F}"/>
+                <ns2:creationId id="{3E3E1843-10DD-BC43-FA7E-399D2046D99F}"/>
               </a:ext>
             </a:extLst>
           </p:cNvPr>
@@ -22346,19 +22280,18 @@
           </a:solidFill>
           <a:ln w="25400" cap="flat" cmpd="sng" algn="ctr">
             <a:noFill/>
-            <a:prstDash val="solid"/>
           </a:ln>
           <a:effectLst/>
           <a:extLst>
             <a:ext uri="{91240B29-F687-4F45-9708-019B960494DF}">
-              <a14:hiddenLine xmlns:a14="http://schemas.microsoft.com/office/drawing/2010/main" w="25400" cap="flat" cmpd="sng" algn="ctr">
+              <ns3:hiddenLine w="25400" cap="flat" cmpd="sng" algn="ctr">
                 <a:solidFill>
                   <a:schemeClr val="accent1">
                     <a:shade val="15000"/>
                   </a:schemeClr>
                 </a:solidFill>
                 <a:prstDash val="solid"/>
-              </a14:hiddenLine>
+              </ns3:hiddenLine>
             </a:ext>
           </a:extLst>
         </p:spPr>
@@ -22392,7 +22325,7 @@
           <p:cNvPr id="11" name="TextBox 10">
             <a:extLst>
               <a:ext uri="{FF2B5EF4-FFF2-40B4-BE49-F238E27FC236}">
-                <a16:creationId xmlns:a16="http://schemas.microsoft.com/office/drawing/2014/main" id="{1EB66A26-5C4F-F6E9-4C60-ACC703B5C79D}"/>
+                <ns2:creationId id="{1EB66A26-5C4F-F6E9-4C60-ACC703B5C79D}"/>
               </a:ext>
             </a:extLst>
           </p:cNvPr>
@@ -22440,7 +22373,7 @@
           <p:cNvPr id="14" name="Rectangle: Rounded Corners 13">
             <a:extLst>
               <a:ext uri="{FF2B5EF4-FFF2-40B4-BE49-F238E27FC236}">
-                <a16:creationId xmlns:a16="http://schemas.microsoft.com/office/drawing/2014/main" id="{0776D6A1-944F-0C94-8082-45CB8A4DA0E7}"/>
+                <ns2:creationId id="{0776D6A1-944F-0C94-8082-45CB8A4DA0E7}"/>
               </a:ext>
             </a:extLst>
           </p:cNvPr>
@@ -22471,12 +22404,12 @@
           </a:effectLst>
           <a:extLst>
             <a:ext uri="{91240B29-F687-4F45-9708-019B960494DF}">
-              <a14:hiddenLine xmlns:a14="http://schemas.microsoft.com/office/drawing/2010/main" w="15875" cap="flat" cmpd="sng" algn="ctr">
+              <ns3:hiddenLine w="15875" cap="flat" cmpd="sng" algn="ctr">
                 <a:solidFill>
                   <a:srgbClr val="0076D2"/>
                 </a:solidFill>
                 <a:prstDash val="solid"/>
-              </a14:hiddenLine>
+              </ns3:hiddenLine>
             </a:ext>
           </a:extLst>
         </p:spPr>
@@ -22574,7 +22507,7 @@
           <p:cNvPr id="15" name="Rectangle: Rounded Corners 14">
             <a:extLst>
               <a:ext uri="{FF2B5EF4-FFF2-40B4-BE49-F238E27FC236}">
-                <a16:creationId xmlns:a16="http://schemas.microsoft.com/office/drawing/2014/main" id="{A3D9304B-B57B-92F7-439F-D0E7571FB7B0}"/>
+                <ns2:creationId id="{A3D9304B-B57B-92F7-439F-D0E7571FB7B0}"/>
               </a:ext>
             </a:extLst>
           </p:cNvPr>
@@ -22605,12 +22538,12 @@
           </a:effectLst>
           <a:extLst>
             <a:ext uri="{91240B29-F687-4F45-9708-019B960494DF}">
-              <a14:hiddenLine xmlns:a14="http://schemas.microsoft.com/office/drawing/2010/main" w="15875" cap="flat" cmpd="sng" algn="ctr">
+              <ns3:hiddenLine w="15875" cap="flat" cmpd="sng" algn="ctr">
                 <a:solidFill>
                   <a:srgbClr val="009988"/>
                 </a:solidFill>
                 <a:prstDash val="solid"/>
-              </a14:hiddenLine>
+              </ns3:hiddenLine>
             </a:ext>
           </a:extLst>
         </p:spPr>
@@ -22737,7 +22670,7 @@
           <p:cNvPr id="16" name="Rectangle: Rounded Corners 15">
             <a:extLst>
               <a:ext uri="{FF2B5EF4-FFF2-40B4-BE49-F238E27FC236}">
-                <a16:creationId xmlns:a16="http://schemas.microsoft.com/office/drawing/2014/main" id="{07BA3A3C-CBD1-7DBE-A551-49078B5C6B18}"/>
+                <ns2:creationId id="{07BA3A3C-CBD1-7DBE-A551-49078B5C6B18}"/>
               </a:ext>
             </a:extLst>
           </p:cNvPr>
@@ -22768,12 +22701,12 @@
           </a:effectLst>
           <a:extLst>
             <a:ext uri="{91240B29-F687-4F45-9708-019B960494DF}">
-              <a14:hiddenLine xmlns:a14="http://schemas.microsoft.com/office/drawing/2010/main" w="15875" cap="flat" cmpd="sng" algn="ctr">
+              <ns3:hiddenLine w="15875" cap="flat" cmpd="sng" algn="ctr">
                 <a:solidFill>
                   <a:srgbClr val="EE9726"/>
                 </a:solidFill>
                 <a:prstDash val="solid"/>
-              </a14:hiddenLine>
+              </ns3:hiddenLine>
             </a:ext>
           </a:extLst>
         </p:spPr>
@@ -22918,7 +22851,7 @@
           <p:cNvPr id="22" name="codex_template_top_accent">
             <a:extLst>
               <a:ext uri="{FF2B5EF4-FFF2-40B4-BE49-F238E27FC236}">
-                <a16:creationId xmlns:a16="http://schemas.microsoft.com/office/drawing/2014/main" id="{28AFCEC1-1A93-9C97-4ECE-6950F7F46E70}"/>
+                <ns2:creationId id="{28AFCEC1-1A93-9C97-4ECE-6950F7F46E70}"/>
               </a:ext>
             </a:extLst>
           </p:cNvPr>
@@ -22938,19 +22871,18 @@
           </a:solidFill>
           <a:ln w="25400" cap="flat" cmpd="sng" algn="ctr">
             <a:noFill/>
-            <a:prstDash val="solid"/>
           </a:ln>
           <a:effectLst/>
           <a:extLst>
             <a:ext uri="{91240B29-F687-4F45-9708-019B960494DF}">
-              <a14:hiddenLine xmlns:a14="http://schemas.microsoft.com/office/drawing/2010/main" w="25400" cap="flat" cmpd="sng" algn="ctr">
+              <ns3:hiddenLine w="25400" cap="flat" cmpd="sng" algn="ctr">
                 <a:solidFill>
                   <a:schemeClr val="accent1">
                     <a:shade val="15000"/>
                   </a:schemeClr>
                 </a:solidFill>
                 <a:prstDash val="solid"/>
-              </a14:hiddenLine>
+              </ns3:hiddenLine>
             </a:ext>
           </a:extLst>
         </p:spPr>
@@ -22984,7 +22916,7 @@
           <p:cNvPr id="24" name="codex_template_footer">
             <a:extLst>
               <a:ext uri="{FF2B5EF4-FFF2-40B4-BE49-F238E27FC236}">
-                <a16:creationId xmlns:a16="http://schemas.microsoft.com/office/drawing/2014/main" id="{FE5F0C5A-9D56-BEEE-CFFD-43759FD40CFE}"/>
+                <ns2:creationId id="{FE5F0C5A-9D56-BEEE-CFFD-43759FD40CFE}"/>
               </a:ext>
             </a:extLst>
           </p:cNvPr>
@@ -23024,7 +22956,7 @@
           <p:cNvPr id="25" name="codex_template_slide_number">
             <a:extLst>
               <a:ext uri="{FF2B5EF4-FFF2-40B4-BE49-F238E27FC236}">
-                <a16:creationId xmlns:a16="http://schemas.microsoft.com/office/drawing/2014/main" id="{0D7691DE-8EAE-EE8D-08AA-69A3CF4FBF00}"/>
+                <ns2:creationId id="{0D7691DE-8EAE-EE8D-08AA-69A3CF4FBF00}"/>
               </a:ext>
             </a:extLst>
           </p:cNvPr>
@@ -23064,7 +22996,7 @@
           <p:cNvPr id="26" name="codex_template_title_rule">
             <a:extLst>
               <a:ext uri="{FF2B5EF4-FFF2-40B4-BE49-F238E27FC236}">
-                <a16:creationId xmlns:a16="http://schemas.microsoft.com/office/drawing/2014/main" id="{60D1501B-FE3C-B578-6186-CCB26BDEB352}"/>
+                <ns2:creationId id="{60D1501B-FE3C-B578-6186-CCB26BDEB352}"/>
               </a:ext>
             </a:extLst>
           </p:cNvPr>
@@ -23103,7 +23035,7 @@
     </p:spTree>
     <p:extLst>
       <p:ext uri="{BB962C8B-B14F-4D97-AF65-F5344CB8AC3E}">
-        <p14:creationId xmlns:p14="http://schemas.microsoft.com/office/powerpoint/2010/main" val="557327428"/>
+        <ns4:creationId val="557327428"/>
       </p:ext>
     </p:extLst>
   </p:cSld>
@@ -23114,7 +23046,7 @@
 </file>
 
 <file path=ppt/slides/slide17.xml><?xml version="1.0" encoding="utf-8"?>
-<p:sld xmlns:a="http://schemas.openxmlformats.org/drawingml/2006/main" xmlns:r="http://schemas.openxmlformats.org/officeDocument/2006/relationships" xmlns:p="http://schemas.openxmlformats.org/presentationml/2006/main">
+<p:sld xmlns:a="http://schemas.openxmlformats.org/drawingml/2006/main" xmlns:ns2="http://schemas.microsoft.com/office/drawing/2014/main" xmlns:ns3="http://schemas.microsoft.com/office/drawing/2010/main" xmlns:ns4="http://schemas.microsoft.com/office/powerpoint/2010/main" xmlns:p="http://schemas.openxmlformats.org/presentationml/2006/main">
   <p:cSld>
     <p:spTree>
       <p:nvGrpSpPr>
@@ -23135,7 +23067,7 @@
           <p:cNvPr id="24" name="codex_template_right_wash">
             <a:extLst>
               <a:ext uri="{FF2B5EF4-FFF2-40B4-BE49-F238E27FC236}">
-                <a16:creationId xmlns:a16="http://schemas.microsoft.com/office/drawing/2014/main" id="{E693B45D-C67D-ACEC-F4C9-28937BBD0EF5}"/>
+                <ns2:creationId id="{E693B45D-C67D-ACEC-F4C9-28937BBD0EF5}"/>
               </a:ext>
             </a:extLst>
           </p:cNvPr>
@@ -23157,19 +23089,18 @@
           </a:solidFill>
           <a:ln w="25400" cap="flat" cmpd="sng" algn="ctr">
             <a:noFill/>
-            <a:prstDash val="solid"/>
           </a:ln>
           <a:effectLst/>
           <a:extLst>
             <a:ext uri="{91240B29-F687-4F45-9708-019B960494DF}">
-              <a14:hiddenLine xmlns:a14="http://schemas.microsoft.com/office/drawing/2010/main" w="25400" cap="flat" cmpd="sng" algn="ctr">
+              <ns3:hiddenLine w="25400" cap="flat" cmpd="sng" algn="ctr">
                 <a:solidFill>
                   <a:schemeClr val="accent1">
                     <a:shade val="15000"/>
                   </a:schemeClr>
                 </a:solidFill>
                 <a:prstDash val="solid"/>
-              </a14:hiddenLine>
+              </ns3:hiddenLine>
             </a:ext>
           </a:extLst>
         </p:spPr>
@@ -23203,7 +23134,7 @@
           <p:cNvPr id="23" name="codex_template_header_band">
             <a:extLst>
               <a:ext uri="{FF2B5EF4-FFF2-40B4-BE49-F238E27FC236}">
-                <a16:creationId xmlns:a16="http://schemas.microsoft.com/office/drawing/2014/main" id="{76CA19AD-0E99-9024-68E8-33284BB77E5C}"/>
+                <ns2:creationId id="{76CA19AD-0E99-9024-68E8-33284BB77E5C}"/>
               </a:ext>
             </a:extLst>
           </p:cNvPr>
@@ -23225,19 +23156,18 @@
           </a:solidFill>
           <a:ln w="25400" cap="flat" cmpd="sng" algn="ctr">
             <a:noFill/>
-            <a:prstDash val="solid"/>
           </a:ln>
           <a:effectLst/>
           <a:extLst>
             <a:ext uri="{91240B29-F687-4F45-9708-019B960494DF}">
-              <a14:hiddenLine xmlns:a14="http://schemas.microsoft.com/office/drawing/2010/main" w="25400" cap="flat" cmpd="sng" algn="ctr">
+              <ns3:hiddenLine w="25400" cap="flat" cmpd="sng" algn="ctr">
                 <a:solidFill>
                   <a:schemeClr val="accent1">
                     <a:shade val="15000"/>
                   </a:schemeClr>
                 </a:solidFill>
                 <a:prstDash val="solid"/>
-              </a14:hiddenLine>
+              </ns3:hiddenLine>
             </a:ext>
           </a:extLst>
         </p:spPr>
@@ -23271,7 +23201,7 @@
           <p:cNvPr id="22" name="codex_template_background">
             <a:extLst>
               <a:ext uri="{FF2B5EF4-FFF2-40B4-BE49-F238E27FC236}">
-                <a16:creationId xmlns:a16="http://schemas.microsoft.com/office/drawing/2014/main" id="{B3605A7A-6514-3D1E-7D66-8BC7F994F0B8}"/>
+                <ns2:creationId id="{B3605A7A-6514-3D1E-7D66-8BC7F994F0B8}"/>
               </a:ext>
             </a:extLst>
           </p:cNvPr>
@@ -23291,19 +23221,18 @@
           </a:solidFill>
           <a:ln w="25400" cap="flat" cmpd="sng" algn="ctr">
             <a:noFill/>
-            <a:prstDash val="solid"/>
           </a:ln>
           <a:effectLst/>
           <a:extLst>
             <a:ext uri="{91240B29-F687-4F45-9708-019B960494DF}">
-              <a14:hiddenLine xmlns:a14="http://schemas.microsoft.com/office/drawing/2010/main" w="25400" cap="flat" cmpd="sng" algn="ctr">
+              <ns3:hiddenLine w="25400" cap="flat" cmpd="sng" algn="ctr">
                 <a:solidFill>
                   <a:schemeClr val="accent1">
                     <a:shade val="15000"/>
                   </a:schemeClr>
                 </a:solidFill>
                 <a:prstDash val="solid"/>
-              </a14:hiddenLine>
+              </ns3:hiddenLine>
             </a:ext>
           </a:extLst>
         </p:spPr>
@@ -23337,7 +23266,7 @@
           <p:cNvPr id="11" name="TextBox 10">
             <a:extLst>
               <a:ext uri="{FF2B5EF4-FFF2-40B4-BE49-F238E27FC236}">
-                <a16:creationId xmlns:a16="http://schemas.microsoft.com/office/drawing/2014/main" id="{1625833A-4871-EADE-2C13-E92E4E58AF52}"/>
+                <ns2:creationId id="{1625833A-4871-EADE-2C13-E92E4E58AF52}"/>
               </a:ext>
             </a:extLst>
           </p:cNvPr>
@@ -23385,7 +23314,7 @@
           <p:cNvPr id="14" name="Rectangle: Rounded Corners 13">
             <a:extLst>
               <a:ext uri="{FF2B5EF4-FFF2-40B4-BE49-F238E27FC236}">
-                <a16:creationId xmlns:a16="http://schemas.microsoft.com/office/drawing/2014/main" id="{2293AF61-09C1-17A2-DA78-DAA0DBABE7A0}"/>
+                <ns2:creationId id="{2293AF61-09C1-17A2-DA78-DAA0DBABE7A0}"/>
               </a:ext>
             </a:extLst>
           </p:cNvPr>
@@ -23404,9 +23333,7 @@
             <a:srgbClr val="E2F1FF"/>
           </a:solidFill>
           <a:ln w="15875">
-            <a:solidFill>
-              <a:srgbClr val="D6E8F6"/>
-            </a:solidFill>
+            <a:noFill/>
           </a:ln>
           <a:effectLst>
             <a:outerShdw blurRad="63500" dist="28398" dir="3806086" rotWithShape="0">
@@ -23451,7 +23378,7 @@
           <p:cNvPr id="15" name="TextBox 14">
             <a:extLst>
               <a:ext uri="{FF2B5EF4-FFF2-40B4-BE49-F238E27FC236}">
-                <a16:creationId xmlns:a16="http://schemas.microsoft.com/office/drawing/2014/main" id="{2082CFC5-CA1E-C849-9A56-B075FCB830EE}"/>
+                <ns2:creationId id="{2082CFC5-CA1E-C849-9A56-B075FCB830EE}"/>
               </a:ext>
             </a:extLst>
           </p:cNvPr>
@@ -23468,9 +23395,7 @@
           </a:prstGeom>
           <a:noFill/>
           <a:ln w="15875">
-            <a:solidFill>
-              <a:srgbClr val="D6E8F6"/>
-            </a:solidFill>
+            <a:noFill/>
           </a:ln>
           <a:effectLst>
             <a:outerShdw blurRad="63500" dist="28398" dir="3806086" rotWithShape="0">
@@ -23547,7 +23472,7 @@
           <p:cNvPr id="16" name="Rectangle: Rounded Corners 15">
             <a:extLst>
               <a:ext uri="{FF2B5EF4-FFF2-40B4-BE49-F238E27FC236}">
-                <a16:creationId xmlns:a16="http://schemas.microsoft.com/office/drawing/2014/main" id="{B3667D7C-99A0-F1A1-96B4-B4DC9A5A4DDE}"/>
+                <ns2:creationId id="{B3667D7C-99A0-F1A1-96B4-B4DC9A5A4DDE}"/>
               </a:ext>
             </a:extLst>
           </p:cNvPr>
@@ -23566,9 +23491,7 @@
             <a:srgbClr val="E1F8F4"/>
           </a:solidFill>
           <a:ln w="15875">
-            <a:solidFill>
-              <a:srgbClr val="D6E8F6"/>
-            </a:solidFill>
+            <a:noFill/>
           </a:ln>
           <a:effectLst>
             <a:outerShdw blurRad="63500" dist="28398" dir="3806086" rotWithShape="0">
@@ -23613,7 +23536,7 @@
           <p:cNvPr id="17" name="TextBox 16">
             <a:extLst>
               <a:ext uri="{FF2B5EF4-FFF2-40B4-BE49-F238E27FC236}">
-                <a16:creationId xmlns:a16="http://schemas.microsoft.com/office/drawing/2014/main" id="{686A3505-882B-A443-B216-97F5E9870B78}"/>
+                <ns2:creationId id="{686A3505-882B-A443-B216-97F5E9870B78}"/>
               </a:ext>
             </a:extLst>
           </p:cNvPr>
@@ -23630,9 +23553,7 @@
           </a:prstGeom>
           <a:noFill/>
           <a:ln w="15875">
-            <a:solidFill>
-              <a:srgbClr val="D6E8F6"/>
-            </a:solidFill>
+            <a:noFill/>
           </a:ln>
           <a:effectLst>
             <a:outerShdw blurRad="63500" dist="28398" dir="3806086" rotWithShape="0">
@@ -23745,7 +23666,7 @@
           <p:cNvPr id="20" name="TextBox 19">
             <a:extLst>
               <a:ext uri="{FF2B5EF4-FFF2-40B4-BE49-F238E27FC236}">
-                <a16:creationId xmlns:a16="http://schemas.microsoft.com/office/drawing/2014/main" id="{517606BD-F839-1D36-F29D-7E65661B0A2E}"/>
+                <ns2:creationId id="{517606BD-F839-1D36-F29D-7E65661B0A2E}"/>
               </a:ext>
             </a:extLst>
           </p:cNvPr>
@@ -23762,9 +23683,7 @@
           </a:prstGeom>
           <a:noFill/>
           <a:ln w="15875">
-            <a:solidFill>
-              <a:srgbClr val="D6E8F6"/>
-            </a:solidFill>
+            <a:noFill/>
           </a:ln>
           <a:effectLst>
             <a:outerShdw blurRad="63500" dist="28398" dir="3806086" rotWithShape="0">
@@ -23798,7 +23717,7 @@
           <p:cNvPr id="21" name="TextBox 20">
             <a:extLst>
               <a:ext uri="{FF2B5EF4-FFF2-40B4-BE49-F238E27FC236}">
-                <a16:creationId xmlns:a16="http://schemas.microsoft.com/office/drawing/2014/main" id="{03129F70-D744-C249-E4EA-F3654AA30BC6}"/>
+                <ns2:creationId id="{03129F70-D744-C249-E4EA-F3654AA30BC6}"/>
               </a:ext>
             </a:extLst>
           </p:cNvPr>
@@ -23815,9 +23734,7 @@
           </a:prstGeom>
           <a:noFill/>
           <a:ln w="15875">
-            <a:solidFill>
-              <a:srgbClr val="D6E8F6"/>
-            </a:solidFill>
+            <a:noFill/>
           </a:ln>
           <a:effectLst>
             <a:outerShdw blurRad="63500" dist="28398" dir="3806086" rotWithShape="0">
@@ -23851,7 +23768,7 @@
           <p:cNvPr id="25" name="codex_template_top_accent">
             <a:extLst>
               <a:ext uri="{FF2B5EF4-FFF2-40B4-BE49-F238E27FC236}">
-                <a16:creationId xmlns:a16="http://schemas.microsoft.com/office/drawing/2014/main" id="{FAFFFB45-8BBB-0CFD-2B4A-2675F6F848CB}"/>
+                <ns2:creationId id="{FAFFFB45-8BBB-0CFD-2B4A-2675F6F848CB}"/>
               </a:ext>
             </a:extLst>
           </p:cNvPr>
@@ -23871,19 +23788,18 @@
           </a:solidFill>
           <a:ln w="25400" cap="flat" cmpd="sng" algn="ctr">
             <a:noFill/>
-            <a:prstDash val="solid"/>
           </a:ln>
           <a:effectLst/>
           <a:extLst>
             <a:ext uri="{91240B29-F687-4F45-9708-019B960494DF}">
-              <a14:hiddenLine xmlns:a14="http://schemas.microsoft.com/office/drawing/2010/main" w="25400" cap="flat" cmpd="sng" algn="ctr">
+              <ns3:hiddenLine w="25400" cap="flat" cmpd="sng" algn="ctr">
                 <a:solidFill>
                   <a:schemeClr val="accent1">
                     <a:shade val="15000"/>
                   </a:schemeClr>
                 </a:solidFill>
                 <a:prstDash val="solid"/>
-              </a14:hiddenLine>
+              </ns3:hiddenLine>
             </a:ext>
           </a:extLst>
         </p:spPr>
@@ -23917,7 +23833,7 @@
           <p:cNvPr id="27" name="codex_template_footer">
             <a:extLst>
               <a:ext uri="{FF2B5EF4-FFF2-40B4-BE49-F238E27FC236}">
-                <a16:creationId xmlns:a16="http://schemas.microsoft.com/office/drawing/2014/main" id="{CF0CE4CB-7A31-6C50-4E4D-8FFB625F56A6}"/>
+                <ns2:creationId id="{CF0CE4CB-7A31-6C50-4E4D-8FFB625F56A6}"/>
               </a:ext>
             </a:extLst>
           </p:cNvPr>
@@ -23957,7 +23873,7 @@
           <p:cNvPr id="28" name="codex_template_slide_number">
             <a:extLst>
               <a:ext uri="{FF2B5EF4-FFF2-40B4-BE49-F238E27FC236}">
-                <a16:creationId xmlns:a16="http://schemas.microsoft.com/office/drawing/2014/main" id="{597E4F34-C3C0-78D1-B679-FCDFA9CBF298}"/>
+                <ns2:creationId id="{597E4F34-C3C0-78D1-B679-FCDFA9CBF298}"/>
               </a:ext>
             </a:extLst>
           </p:cNvPr>
@@ -23997,7 +23913,7 @@
           <p:cNvPr id="29" name="codex_template_title_rule">
             <a:extLst>
               <a:ext uri="{FF2B5EF4-FFF2-40B4-BE49-F238E27FC236}">
-                <a16:creationId xmlns:a16="http://schemas.microsoft.com/office/drawing/2014/main" id="{A332A264-2547-7026-ABCF-C09F202A50E7}"/>
+                <ns2:creationId id="{A332A264-2547-7026-ABCF-C09F202A50E7}"/>
               </a:ext>
             </a:extLst>
           </p:cNvPr>
@@ -24036,7 +23952,7 @@
     </p:spTree>
     <p:extLst>
       <p:ext uri="{BB962C8B-B14F-4D97-AF65-F5344CB8AC3E}">
-        <p14:creationId xmlns:p14="http://schemas.microsoft.com/office/powerpoint/2010/main" val="1219347893"/>
+        <ns4:creationId val="1219347893"/>
       </p:ext>
     </p:extLst>
   </p:cSld>
@@ -24047,7 +23963,7 @@
 </file>
 
 <file path=ppt/slides/slide18.xml><?xml version="1.0" encoding="utf-8"?>
-<p:sld xmlns:a="http://schemas.openxmlformats.org/drawingml/2006/main" xmlns:r="http://schemas.openxmlformats.org/officeDocument/2006/relationships" xmlns:p="http://schemas.openxmlformats.org/presentationml/2006/main">
+<p:sld xmlns:a="http://schemas.openxmlformats.org/drawingml/2006/main" xmlns:ns2="http://schemas.microsoft.com/office/drawing/2014/main" xmlns:ns3="http://schemas.microsoft.com/office/drawing/2010/main" xmlns:ns4="http://schemas.microsoft.com/office/powerpoint/2010/main" xmlns:p="http://schemas.openxmlformats.org/presentationml/2006/main">
   <p:cSld>
     <p:spTree>
       <p:nvGrpSpPr>
@@ -24068,7 +23984,7 @@
           <p:cNvPr id="24" name="codex_template_right_wash">
             <a:extLst>
               <a:ext uri="{FF2B5EF4-FFF2-40B4-BE49-F238E27FC236}">
-                <a16:creationId xmlns:a16="http://schemas.microsoft.com/office/drawing/2014/main" id="{7422CBA9-EAF4-F755-01DF-11A2FF068E4F}"/>
+                <ns2:creationId id="{7422CBA9-EAF4-F755-01DF-11A2FF068E4F}"/>
               </a:ext>
             </a:extLst>
           </p:cNvPr>
@@ -24090,19 +24006,18 @@
           </a:solidFill>
           <a:ln w="25400" cap="flat" cmpd="sng" algn="ctr">
             <a:noFill/>
-            <a:prstDash val="solid"/>
           </a:ln>
           <a:effectLst/>
           <a:extLst>
             <a:ext uri="{91240B29-F687-4F45-9708-019B960494DF}">
-              <a14:hiddenLine xmlns:a14="http://schemas.microsoft.com/office/drawing/2010/main" w="25400" cap="flat" cmpd="sng" algn="ctr">
+              <ns3:hiddenLine w="25400" cap="flat" cmpd="sng" algn="ctr">
                 <a:solidFill>
                   <a:schemeClr val="accent1">
                     <a:shade val="15000"/>
                   </a:schemeClr>
                 </a:solidFill>
                 <a:prstDash val="solid"/>
-              </a14:hiddenLine>
+              </ns3:hiddenLine>
             </a:ext>
           </a:extLst>
         </p:spPr>
@@ -24136,7 +24051,7 @@
           <p:cNvPr id="23" name="codex_template_header_band">
             <a:extLst>
               <a:ext uri="{FF2B5EF4-FFF2-40B4-BE49-F238E27FC236}">
-                <a16:creationId xmlns:a16="http://schemas.microsoft.com/office/drawing/2014/main" id="{D03D8773-5768-C852-9AE6-B85530DE80E0}"/>
+                <ns2:creationId id="{D03D8773-5768-C852-9AE6-B85530DE80E0}"/>
               </a:ext>
             </a:extLst>
           </p:cNvPr>
@@ -24158,19 +24073,18 @@
           </a:solidFill>
           <a:ln w="25400" cap="flat" cmpd="sng" algn="ctr">
             <a:noFill/>
-            <a:prstDash val="solid"/>
           </a:ln>
           <a:effectLst/>
           <a:extLst>
             <a:ext uri="{91240B29-F687-4F45-9708-019B960494DF}">
-              <a14:hiddenLine xmlns:a14="http://schemas.microsoft.com/office/drawing/2010/main" w="25400" cap="flat" cmpd="sng" algn="ctr">
+              <ns3:hiddenLine w="25400" cap="flat" cmpd="sng" algn="ctr">
                 <a:solidFill>
                   <a:schemeClr val="accent1">
                     <a:shade val="15000"/>
                   </a:schemeClr>
                 </a:solidFill>
                 <a:prstDash val="solid"/>
-              </a14:hiddenLine>
+              </ns3:hiddenLine>
             </a:ext>
           </a:extLst>
         </p:spPr>
@@ -24204,7 +24118,7 @@
           <p:cNvPr id="22" name="codex_template_background">
             <a:extLst>
               <a:ext uri="{FF2B5EF4-FFF2-40B4-BE49-F238E27FC236}">
-                <a16:creationId xmlns:a16="http://schemas.microsoft.com/office/drawing/2014/main" id="{F3FB62CE-0EE1-47CB-54FC-42997F20B053}"/>
+                <ns2:creationId id="{F3FB62CE-0EE1-47CB-54FC-42997F20B053}"/>
               </a:ext>
             </a:extLst>
           </p:cNvPr>
@@ -24224,19 +24138,18 @@
           </a:solidFill>
           <a:ln w="25400" cap="flat" cmpd="sng" algn="ctr">
             <a:noFill/>
-            <a:prstDash val="solid"/>
           </a:ln>
           <a:effectLst/>
           <a:extLst>
             <a:ext uri="{91240B29-F687-4F45-9708-019B960494DF}">
-              <a14:hiddenLine xmlns:a14="http://schemas.microsoft.com/office/drawing/2010/main" w="25400" cap="flat" cmpd="sng" algn="ctr">
+              <ns3:hiddenLine w="25400" cap="flat" cmpd="sng" algn="ctr">
                 <a:solidFill>
                   <a:schemeClr val="accent1">
                     <a:shade val="15000"/>
                   </a:schemeClr>
                 </a:solidFill>
                 <a:prstDash val="solid"/>
-              </a14:hiddenLine>
+              </ns3:hiddenLine>
             </a:ext>
           </a:extLst>
         </p:spPr>
@@ -24270,7 +24183,7 @@
           <p:cNvPr id="11" name="TextBox 10">
             <a:extLst>
               <a:ext uri="{FF2B5EF4-FFF2-40B4-BE49-F238E27FC236}">
-                <a16:creationId xmlns:a16="http://schemas.microsoft.com/office/drawing/2014/main" id="{FB834A22-70E0-66E0-2048-AF6A29F2FA35}"/>
+                <ns2:creationId id="{FB834A22-70E0-66E0-2048-AF6A29F2FA35}"/>
               </a:ext>
             </a:extLst>
           </p:cNvPr>
@@ -24318,7 +24231,7 @@
           <p:cNvPr id="14" name="Rectangle: Rounded Corners 13">
             <a:extLst>
               <a:ext uri="{FF2B5EF4-FFF2-40B4-BE49-F238E27FC236}">
-                <a16:creationId xmlns:a16="http://schemas.microsoft.com/office/drawing/2014/main" id="{D01DFEC5-4B39-0A6B-8F86-4646F811649A}"/>
+                <ns2:creationId id="{D01DFEC5-4B39-0A6B-8F86-4646F811649A}"/>
               </a:ext>
             </a:extLst>
           </p:cNvPr>
@@ -24337,9 +24250,7 @@
             <a:srgbClr val="E2F1FF"/>
           </a:solidFill>
           <a:ln w="15875">
-            <a:solidFill>
-              <a:srgbClr val="D6E8F6"/>
-            </a:solidFill>
+            <a:noFill/>
           </a:ln>
           <a:effectLst>
             <a:outerShdw blurRad="63500" dist="28398" dir="3806086" rotWithShape="0">
@@ -24384,7 +24295,7 @@
           <p:cNvPr id="15" name="TextBox 14">
             <a:extLst>
               <a:ext uri="{FF2B5EF4-FFF2-40B4-BE49-F238E27FC236}">
-                <a16:creationId xmlns:a16="http://schemas.microsoft.com/office/drawing/2014/main" id="{E84E54EF-3D77-C90B-B485-29F75110C0E6}"/>
+                <ns2:creationId id="{E84E54EF-3D77-C90B-B485-29F75110C0E6}"/>
               </a:ext>
             </a:extLst>
           </p:cNvPr>
@@ -24401,9 +24312,7 @@
           </a:prstGeom>
           <a:noFill/>
           <a:ln w="15875">
-            <a:solidFill>
-              <a:srgbClr val="D6E8F6"/>
-            </a:solidFill>
+            <a:noFill/>
           </a:ln>
           <a:effectLst>
             <a:outerShdw blurRad="63500" dist="28398" dir="3806086" rotWithShape="0">
@@ -24480,7 +24389,7 @@
           <p:cNvPr id="16" name="Rectangle: Rounded Corners 15">
             <a:extLst>
               <a:ext uri="{FF2B5EF4-FFF2-40B4-BE49-F238E27FC236}">
-                <a16:creationId xmlns:a16="http://schemas.microsoft.com/office/drawing/2014/main" id="{C1A2D38B-118D-2CBF-4AE5-9E159ADE4896}"/>
+                <ns2:creationId id="{C1A2D38B-118D-2CBF-4AE5-9E159ADE4896}"/>
               </a:ext>
             </a:extLst>
           </p:cNvPr>
@@ -24499,9 +24408,7 @@
             <a:srgbClr val="E1F8F4"/>
           </a:solidFill>
           <a:ln w="15875">
-            <a:solidFill>
-              <a:srgbClr val="D6E8F6"/>
-            </a:solidFill>
+            <a:noFill/>
           </a:ln>
           <a:effectLst>
             <a:outerShdw blurRad="63500" dist="28398" dir="3806086" rotWithShape="0">
@@ -24546,7 +24453,7 @@
           <p:cNvPr id="17" name="TextBox 16">
             <a:extLst>
               <a:ext uri="{FF2B5EF4-FFF2-40B4-BE49-F238E27FC236}">
-                <a16:creationId xmlns:a16="http://schemas.microsoft.com/office/drawing/2014/main" id="{00EFF7B3-226E-FFEC-CC23-FD8B353EABB7}"/>
+                <ns2:creationId id="{00EFF7B3-226E-FFEC-CC23-FD8B353EABB7}"/>
               </a:ext>
             </a:extLst>
           </p:cNvPr>
@@ -24563,9 +24470,7 @@
           </a:prstGeom>
           <a:noFill/>
           <a:ln w="15875">
-            <a:solidFill>
-              <a:srgbClr val="D6E8F6"/>
-            </a:solidFill>
+            <a:noFill/>
           </a:ln>
           <a:effectLst>
             <a:outerShdw blurRad="63500" dist="28398" dir="3806086" rotWithShape="0">
@@ -24642,7 +24547,7 @@
           <p:cNvPr id="20" name="TextBox 19">
             <a:extLst>
               <a:ext uri="{FF2B5EF4-FFF2-40B4-BE49-F238E27FC236}">
-                <a16:creationId xmlns:a16="http://schemas.microsoft.com/office/drawing/2014/main" id="{003BA310-97DA-C709-0545-1D690229925D}"/>
+                <ns2:creationId id="{003BA310-97DA-C709-0545-1D690229925D}"/>
               </a:ext>
             </a:extLst>
           </p:cNvPr>
@@ -24659,9 +24564,7 @@
           </a:prstGeom>
           <a:noFill/>
           <a:ln w="15875">
-            <a:solidFill>
-              <a:srgbClr val="D6E8F6"/>
-            </a:solidFill>
+            <a:noFill/>
           </a:ln>
           <a:effectLst>
             <a:outerShdw blurRad="63500" dist="28398" dir="3806086" rotWithShape="0">
@@ -24704,7 +24607,7 @@
           <p:cNvPr id="21" name="TextBox 20">
             <a:extLst>
               <a:ext uri="{FF2B5EF4-FFF2-40B4-BE49-F238E27FC236}">
-                <a16:creationId xmlns:a16="http://schemas.microsoft.com/office/drawing/2014/main" id="{64486B62-CE66-9C5A-2B8E-D130D550319B}"/>
+                <ns2:creationId id="{64486B62-CE66-9C5A-2B8E-D130D550319B}"/>
               </a:ext>
             </a:extLst>
           </p:cNvPr>
@@ -24721,9 +24624,7 @@
           </a:prstGeom>
           <a:noFill/>
           <a:ln w="15875">
-            <a:solidFill>
-              <a:srgbClr val="D6E8F6"/>
-            </a:solidFill>
+            <a:noFill/>
           </a:ln>
           <a:effectLst>
             <a:outerShdw blurRad="63500" dist="28398" dir="3806086" rotWithShape="0">
@@ -24766,7 +24667,7 @@
           <p:cNvPr id="25" name="codex_template_top_accent">
             <a:extLst>
               <a:ext uri="{FF2B5EF4-FFF2-40B4-BE49-F238E27FC236}">
-                <a16:creationId xmlns:a16="http://schemas.microsoft.com/office/drawing/2014/main" id="{25EB4F5F-77E0-712B-AED2-204E5DC110A5}"/>
+                <ns2:creationId id="{25EB4F5F-77E0-712B-AED2-204E5DC110A5}"/>
               </a:ext>
             </a:extLst>
           </p:cNvPr>
@@ -24786,19 +24687,18 @@
           </a:solidFill>
           <a:ln w="25400" cap="flat" cmpd="sng" algn="ctr">
             <a:noFill/>
-            <a:prstDash val="solid"/>
           </a:ln>
           <a:effectLst/>
           <a:extLst>
             <a:ext uri="{91240B29-F687-4F45-9708-019B960494DF}">
-              <a14:hiddenLine xmlns:a14="http://schemas.microsoft.com/office/drawing/2010/main" w="25400" cap="flat" cmpd="sng" algn="ctr">
+              <ns3:hiddenLine w="25400" cap="flat" cmpd="sng" algn="ctr">
                 <a:solidFill>
                   <a:schemeClr val="accent1">
                     <a:shade val="15000"/>
                   </a:schemeClr>
                 </a:solidFill>
                 <a:prstDash val="solid"/>
-              </a14:hiddenLine>
+              </ns3:hiddenLine>
             </a:ext>
           </a:extLst>
         </p:spPr>
@@ -24832,7 +24732,7 @@
           <p:cNvPr id="27" name="codex_template_footer">
             <a:extLst>
               <a:ext uri="{FF2B5EF4-FFF2-40B4-BE49-F238E27FC236}">
-                <a16:creationId xmlns:a16="http://schemas.microsoft.com/office/drawing/2014/main" id="{79CAF20B-171C-0DE6-0102-98FFDBC5FE27}"/>
+                <ns2:creationId id="{79CAF20B-171C-0DE6-0102-98FFDBC5FE27}"/>
               </a:ext>
             </a:extLst>
           </p:cNvPr>
@@ -24872,7 +24772,7 @@
           <p:cNvPr id="28" name="codex_template_slide_number">
             <a:extLst>
               <a:ext uri="{FF2B5EF4-FFF2-40B4-BE49-F238E27FC236}">
-                <a16:creationId xmlns:a16="http://schemas.microsoft.com/office/drawing/2014/main" id="{987CE57B-BEAF-27DD-3BB5-0C25D98BDE47}"/>
+                <ns2:creationId id="{987CE57B-BEAF-27DD-3BB5-0C25D98BDE47}"/>
               </a:ext>
             </a:extLst>
           </p:cNvPr>
@@ -24912,7 +24812,7 @@
           <p:cNvPr id="29" name="codex_template_title_rule">
             <a:extLst>
               <a:ext uri="{FF2B5EF4-FFF2-40B4-BE49-F238E27FC236}">
-                <a16:creationId xmlns:a16="http://schemas.microsoft.com/office/drawing/2014/main" id="{C05FBD7A-CCE1-5632-E340-B0FDAEF4C7A3}"/>
+                <ns2:creationId id="{C05FBD7A-CCE1-5632-E340-B0FDAEF4C7A3}"/>
               </a:ext>
             </a:extLst>
           </p:cNvPr>
@@ -24951,7 +24851,7 @@
     </p:spTree>
     <p:extLst>
       <p:ext uri="{BB962C8B-B14F-4D97-AF65-F5344CB8AC3E}">
-        <p14:creationId xmlns:p14="http://schemas.microsoft.com/office/powerpoint/2010/main" val="3498435750"/>
+        <ns4:creationId val="3498435750"/>
       </p:ext>
     </p:extLst>
   </p:cSld>
@@ -24962,7 +24862,7 @@
 </file>
 
 <file path=ppt/slides/slide19.xml><?xml version="1.0" encoding="utf-8"?>
-<p:sld xmlns:a="http://schemas.openxmlformats.org/drawingml/2006/main" xmlns:r="http://schemas.openxmlformats.org/officeDocument/2006/relationships" xmlns:p="http://schemas.openxmlformats.org/presentationml/2006/main">
+<p:sld xmlns:a="http://schemas.openxmlformats.org/drawingml/2006/main" xmlns:ns2="http://schemas.microsoft.com/office/drawing/2014/main" xmlns:ns3="http://schemas.microsoft.com/office/drawing/2010/main" xmlns:ns4="http://schemas.microsoft.com/office/powerpoint/2010/main" xmlns:p="http://schemas.openxmlformats.org/presentationml/2006/main">
   <p:cSld>
     <p:spTree>
       <p:nvGrpSpPr>
@@ -24983,7 +24883,7 @@
           <p:cNvPr id="38" name="codex_template_header_band">
             <a:extLst>
               <a:ext uri="{FF2B5EF4-FFF2-40B4-BE49-F238E27FC236}">
-                <a16:creationId xmlns:a16="http://schemas.microsoft.com/office/drawing/2014/main" id="{E14A5CDD-AF04-A249-86BA-AD2851DB087B}"/>
+                <ns2:creationId id="{E14A5CDD-AF04-A249-86BA-AD2851DB087B}"/>
               </a:ext>
             </a:extLst>
           </p:cNvPr>
@@ -25005,19 +24905,18 @@
           </a:solidFill>
           <a:ln w="25400" cap="flat" cmpd="sng" algn="ctr">
             <a:noFill/>
-            <a:prstDash val="solid"/>
           </a:ln>
           <a:effectLst/>
           <a:extLst>
             <a:ext uri="{91240B29-F687-4F45-9708-019B960494DF}">
-              <a14:hiddenLine xmlns:a14="http://schemas.microsoft.com/office/drawing/2010/main" w="25400" cap="flat" cmpd="sng" algn="ctr">
+              <ns3:hiddenLine w="25400" cap="flat" cmpd="sng" algn="ctr">
                 <a:solidFill>
                   <a:schemeClr val="accent1">
                     <a:shade val="15000"/>
                   </a:schemeClr>
                 </a:solidFill>
                 <a:prstDash val="solid"/>
-              </a14:hiddenLine>
+              </ns3:hiddenLine>
             </a:ext>
           </a:extLst>
         </p:spPr>
@@ -25051,7 +24950,7 @@
           <p:cNvPr id="11" name="TextBox 10">
             <a:extLst>
               <a:ext uri="{FF2B5EF4-FFF2-40B4-BE49-F238E27FC236}">
-                <a16:creationId xmlns:a16="http://schemas.microsoft.com/office/drawing/2014/main" id="{332E9F3A-D0AD-462A-0333-F9E14CCFA10A}"/>
+                <ns2:creationId id="{332E9F3A-D0AD-462A-0333-F9E14CCFA10A}"/>
               </a:ext>
             </a:extLst>
           </p:cNvPr>
@@ -25099,7 +24998,7 @@
           <p:cNvPr id="40" name="codex_template_top_accent">
             <a:extLst>
               <a:ext uri="{FF2B5EF4-FFF2-40B4-BE49-F238E27FC236}">
-                <a16:creationId xmlns:a16="http://schemas.microsoft.com/office/drawing/2014/main" id="{5889D0E3-396C-F152-E0CA-287940FB41A2}"/>
+                <ns2:creationId id="{5889D0E3-396C-F152-E0CA-287940FB41A2}"/>
               </a:ext>
             </a:extLst>
           </p:cNvPr>
@@ -25119,19 +25018,18 @@
           </a:solidFill>
           <a:ln w="25400" cap="flat" cmpd="sng" algn="ctr">
             <a:noFill/>
-            <a:prstDash val="solid"/>
           </a:ln>
           <a:effectLst/>
           <a:extLst>
             <a:ext uri="{91240B29-F687-4F45-9708-019B960494DF}">
-              <a14:hiddenLine xmlns:a14="http://schemas.microsoft.com/office/drawing/2010/main" w="25400" cap="flat" cmpd="sng" algn="ctr">
+              <ns3:hiddenLine w="25400" cap="flat" cmpd="sng" algn="ctr">
                 <a:solidFill>
                   <a:schemeClr val="accent1">
                     <a:shade val="15000"/>
                   </a:schemeClr>
                 </a:solidFill>
                 <a:prstDash val="solid"/>
-              </a14:hiddenLine>
+              </ns3:hiddenLine>
             </a:ext>
           </a:extLst>
         </p:spPr>
@@ -25165,7 +25063,7 @@
           <p:cNvPr id="42" name="codex_template_footer">
             <a:extLst>
               <a:ext uri="{FF2B5EF4-FFF2-40B4-BE49-F238E27FC236}">
-                <a16:creationId xmlns:a16="http://schemas.microsoft.com/office/drawing/2014/main" id="{80CFFB48-F6D6-A892-9F25-7AF31B4825EA}"/>
+                <ns2:creationId id="{80CFFB48-F6D6-A892-9F25-7AF31B4825EA}"/>
               </a:ext>
             </a:extLst>
           </p:cNvPr>
@@ -25205,7 +25103,7 @@
           <p:cNvPr id="43" name="codex_template_slide_number">
             <a:extLst>
               <a:ext uri="{FF2B5EF4-FFF2-40B4-BE49-F238E27FC236}">
-                <a16:creationId xmlns:a16="http://schemas.microsoft.com/office/drawing/2014/main" id="{8A5C7EA4-63EC-8DE8-E227-350973A53EA6}"/>
+                <ns2:creationId id="{8A5C7EA4-63EC-8DE8-E227-350973A53EA6}"/>
               </a:ext>
             </a:extLst>
           </p:cNvPr>
@@ -25245,7 +25143,7 @@
           <p:cNvPr id="44" name="codex_template_title_rule">
             <a:extLst>
               <a:ext uri="{FF2B5EF4-FFF2-40B4-BE49-F238E27FC236}">
-                <a16:creationId xmlns:a16="http://schemas.microsoft.com/office/drawing/2014/main" id="{965CAC22-CE44-9804-C44E-190EB0491DEF}"/>
+                <ns2:creationId id="{965CAC22-CE44-9804-C44E-190EB0491DEF}"/>
               </a:ext>
             </a:extLst>
           </p:cNvPr>
@@ -25286,7 +25184,7 @@
           <p:cNvPr id="2" name="Rectangle: Rounded Corners 1">
             <a:extLst>
               <a:ext uri="{FF2B5EF4-FFF2-40B4-BE49-F238E27FC236}">
-                <a16:creationId xmlns:a16="http://schemas.microsoft.com/office/drawing/2014/main" id="{C3B8EE99-7942-203F-DF37-DEA866207A13}"/>
+                <ns2:creationId id="{C3B8EE99-7942-203F-DF37-DEA866207A13}"/>
               </a:ext>
             </a:extLst>
           </p:cNvPr>
@@ -25339,7 +25237,7 @@
           <p:cNvPr id="3" name="Rectangle: Rounded Corners 2">
             <a:extLst>
               <a:ext uri="{FF2B5EF4-FFF2-40B4-BE49-F238E27FC236}">
-                <a16:creationId xmlns:a16="http://schemas.microsoft.com/office/drawing/2014/main" id="{9DC12694-62EA-CE26-ACE6-EBB34009D3C2}"/>
+                <ns2:creationId id="{9DC12694-62EA-CE26-ACE6-EBB34009D3C2}"/>
               </a:ext>
             </a:extLst>
           </p:cNvPr>
@@ -25401,7 +25299,7 @@
           <p:cNvPr id="4" name="Rectangle: Rounded Corners 3">
             <a:extLst>
               <a:ext uri="{FF2B5EF4-FFF2-40B4-BE49-F238E27FC236}">
-                <a16:creationId xmlns:a16="http://schemas.microsoft.com/office/drawing/2014/main" id="{F8F68F4C-3245-9D58-8C5E-40726E42F409}"/>
+                <ns2:creationId id="{F8F68F4C-3245-9D58-8C5E-40726E42F409}"/>
               </a:ext>
             </a:extLst>
           </p:cNvPr>
@@ -25454,7 +25352,7 @@
           <p:cNvPr id="5" name="Rectangle: Rounded Corners 4">
             <a:extLst>
               <a:ext uri="{FF2B5EF4-FFF2-40B4-BE49-F238E27FC236}">
-                <a16:creationId xmlns:a16="http://schemas.microsoft.com/office/drawing/2014/main" id="{A7C7B4AB-FF52-16FE-3021-17A26FBE1275}"/>
+                <ns2:creationId id="{A7C7B4AB-FF52-16FE-3021-17A26FBE1275}"/>
               </a:ext>
             </a:extLst>
           </p:cNvPr>
@@ -25507,7 +25405,7 @@
           <p:cNvPr id="6" name="Rectangle: Rounded Corners 5">
             <a:extLst>
               <a:ext uri="{FF2B5EF4-FFF2-40B4-BE49-F238E27FC236}">
-                <a16:creationId xmlns:a16="http://schemas.microsoft.com/office/drawing/2014/main" id="{21917496-1D4B-109B-C1BC-1EDC188F8953}"/>
+                <ns2:creationId id="{21917496-1D4B-109B-C1BC-1EDC188F8953}"/>
               </a:ext>
             </a:extLst>
           </p:cNvPr>
@@ -25560,7 +25458,7 @@
           <p:cNvPr id="7" name="Rectangle: Rounded Corners 6">
             <a:extLst>
               <a:ext uri="{FF2B5EF4-FFF2-40B4-BE49-F238E27FC236}">
-                <a16:creationId xmlns:a16="http://schemas.microsoft.com/office/drawing/2014/main" id="{C4D93DC9-F3A8-90A1-A27A-D218445C304E}"/>
+                <ns2:creationId id="{C4D93DC9-F3A8-90A1-A27A-D218445C304E}"/>
               </a:ext>
             </a:extLst>
           </p:cNvPr>
@@ -25613,7 +25511,7 @@
           <p:cNvPr id="8" name="Rectangle: Rounded Corners 7">
             <a:extLst>
               <a:ext uri="{FF2B5EF4-FFF2-40B4-BE49-F238E27FC236}">
-                <a16:creationId xmlns:a16="http://schemas.microsoft.com/office/drawing/2014/main" id="{47E8CD7F-3EDF-8A8F-2D81-7A54DB40F92A}"/>
+                <ns2:creationId id="{47E8CD7F-3EDF-8A8F-2D81-7A54DB40F92A}"/>
               </a:ext>
             </a:extLst>
           </p:cNvPr>
@@ -25666,7 +25564,7 @@
           <p:cNvPr id="9" name="Rectangle: Rounded Corners 8">
             <a:extLst>
               <a:ext uri="{FF2B5EF4-FFF2-40B4-BE49-F238E27FC236}">
-                <a16:creationId xmlns:a16="http://schemas.microsoft.com/office/drawing/2014/main" id="{A1520F6A-0519-FD13-3C97-203016B668D0}"/>
+                <ns2:creationId id="{A1520F6A-0519-FD13-3C97-203016B668D0}"/>
               </a:ext>
             </a:extLst>
           </p:cNvPr>
@@ -25719,7 +25617,7 @@
           <p:cNvPr id="12" name="Rectangle: Rounded Corners 11">
             <a:extLst>
               <a:ext uri="{FF2B5EF4-FFF2-40B4-BE49-F238E27FC236}">
-                <a16:creationId xmlns:a16="http://schemas.microsoft.com/office/drawing/2014/main" id="{BAFB93F9-C49A-EDB5-6CCA-CBFAC8E6C4BF}"/>
+                <ns2:creationId id="{BAFB93F9-C49A-EDB5-6CCA-CBFAC8E6C4BF}"/>
               </a:ext>
             </a:extLst>
           </p:cNvPr>
@@ -25772,7 +25670,7 @@
           <p:cNvPr id="13" name="Rectangle: Rounded Corners 12">
             <a:extLst>
               <a:ext uri="{FF2B5EF4-FFF2-40B4-BE49-F238E27FC236}">
-                <a16:creationId xmlns:a16="http://schemas.microsoft.com/office/drawing/2014/main" id="{69A2ECB3-84FF-27C4-2E0D-54FDE73633D4}"/>
+                <ns2:creationId id="{69A2ECB3-84FF-27C4-2E0D-54FDE73633D4}"/>
               </a:ext>
             </a:extLst>
           </p:cNvPr>
@@ -25825,7 +25723,7 @@
           <p:cNvPr id="35" name="Rectangle: Rounded Corners 34">
             <a:extLst>
               <a:ext uri="{FF2B5EF4-FFF2-40B4-BE49-F238E27FC236}">
-                <a16:creationId xmlns:a16="http://schemas.microsoft.com/office/drawing/2014/main" id="{BB136277-0928-73A1-72B6-B1F978B10216}"/>
+                <ns2:creationId id="{BB136277-0928-73A1-72B6-B1F978B10216}"/>
               </a:ext>
             </a:extLst>
           </p:cNvPr>
@@ -25878,7 +25776,7 @@
           <p:cNvPr id="36" name="Rectangle: Rounded Corners 35">
             <a:extLst>
               <a:ext uri="{FF2B5EF4-FFF2-40B4-BE49-F238E27FC236}">
-                <a16:creationId xmlns:a16="http://schemas.microsoft.com/office/drawing/2014/main" id="{05994BC3-7DA2-A055-BBF6-F1D7B469964D}"/>
+                <ns2:creationId id="{05994BC3-7DA2-A055-BBF6-F1D7B469964D}"/>
               </a:ext>
             </a:extLst>
           </p:cNvPr>
@@ -25931,7 +25829,7 @@
           <p:cNvPr id="45" name="Rectangle: Rounded Corners 44">
             <a:extLst>
               <a:ext uri="{FF2B5EF4-FFF2-40B4-BE49-F238E27FC236}">
-                <a16:creationId xmlns:a16="http://schemas.microsoft.com/office/drawing/2014/main" id="{3086EF14-2BB8-3742-8558-A4974848B3A2}"/>
+                <ns2:creationId id="{3086EF14-2BB8-3742-8558-A4974848B3A2}"/>
               </a:ext>
             </a:extLst>
           </p:cNvPr>
@@ -25984,7 +25882,7 @@
           <p:cNvPr id="46" name="Rectangle: Rounded Corners 45">
             <a:extLst>
               <a:ext uri="{FF2B5EF4-FFF2-40B4-BE49-F238E27FC236}">
-                <a16:creationId xmlns:a16="http://schemas.microsoft.com/office/drawing/2014/main" id="{39462D3B-4BA1-7CAD-879F-F91B32BA30D2}"/>
+                <ns2:creationId id="{39462D3B-4BA1-7CAD-879F-F91B32BA30D2}"/>
               </a:ext>
             </a:extLst>
           </p:cNvPr>
@@ -26037,7 +25935,7 @@
           <p:cNvPr id="47" name="Rectangle: Rounded Corners 46">
             <a:extLst>
               <a:ext uri="{FF2B5EF4-FFF2-40B4-BE49-F238E27FC236}">
-                <a16:creationId xmlns:a16="http://schemas.microsoft.com/office/drawing/2014/main" id="{7CF8DC1F-25F2-826F-181C-4AC868C5D4A7}"/>
+                <ns2:creationId id="{7CF8DC1F-25F2-826F-181C-4AC868C5D4A7}"/>
               </a:ext>
             </a:extLst>
           </p:cNvPr>
@@ -26090,7 +25988,7 @@
           <p:cNvPr id="48" name="Rectangle: Rounded Corners 47">
             <a:extLst>
               <a:ext uri="{FF2B5EF4-FFF2-40B4-BE49-F238E27FC236}">
-                <a16:creationId xmlns:a16="http://schemas.microsoft.com/office/drawing/2014/main" id="{6BF9169E-9145-0C90-5B87-AFC1AB3EC194}"/>
+                <ns2:creationId id="{6BF9169E-9145-0C90-5B87-AFC1AB3EC194}"/>
               </a:ext>
             </a:extLst>
           </p:cNvPr>
@@ -26143,7 +26041,7 @@
           <p:cNvPr id="49" name="Rectangle: Rounded Corners 48">
             <a:extLst>
               <a:ext uri="{FF2B5EF4-FFF2-40B4-BE49-F238E27FC236}">
-                <a16:creationId xmlns:a16="http://schemas.microsoft.com/office/drawing/2014/main" id="{F6492EE9-0A16-3E6D-0573-F5CAA67E18F0}"/>
+                <ns2:creationId id="{F6492EE9-0A16-3E6D-0573-F5CAA67E18F0}"/>
               </a:ext>
             </a:extLst>
           </p:cNvPr>
@@ -26196,7 +26094,7 @@
           <p:cNvPr id="50" name="Rectangle: Rounded Corners 49">
             <a:extLst>
               <a:ext uri="{FF2B5EF4-FFF2-40B4-BE49-F238E27FC236}">
-                <a16:creationId xmlns:a16="http://schemas.microsoft.com/office/drawing/2014/main" id="{3BE42525-9816-00EA-BD7D-939C457633FE}"/>
+                <ns2:creationId id="{3BE42525-9816-00EA-BD7D-939C457633FE}"/>
               </a:ext>
             </a:extLst>
           </p:cNvPr>
@@ -26249,7 +26147,7 @@
           <p:cNvPr id="51" name="Rectangle: Rounded Corners 50">
             <a:extLst>
               <a:ext uri="{FF2B5EF4-FFF2-40B4-BE49-F238E27FC236}">
-                <a16:creationId xmlns:a16="http://schemas.microsoft.com/office/drawing/2014/main" id="{12C88F02-00BA-17B9-78DC-FCA2917A2D1F}"/>
+                <ns2:creationId id="{12C88F02-00BA-17B9-78DC-FCA2917A2D1F}"/>
               </a:ext>
             </a:extLst>
           </p:cNvPr>
@@ -26302,7 +26200,7 @@
           <p:cNvPr id="52" name="Rectangle: Rounded Corners 51">
             <a:extLst>
               <a:ext uri="{FF2B5EF4-FFF2-40B4-BE49-F238E27FC236}">
-                <a16:creationId xmlns:a16="http://schemas.microsoft.com/office/drawing/2014/main" id="{4F047E29-A931-20A6-795D-15C9D762C051}"/>
+                <ns2:creationId id="{4F047E29-A931-20A6-795D-15C9D762C051}"/>
               </a:ext>
             </a:extLst>
           </p:cNvPr>
@@ -26355,7 +26253,7 @@
           <p:cNvPr id="53" name="Rectangle: Rounded Corners 52">
             <a:extLst>
               <a:ext uri="{FF2B5EF4-FFF2-40B4-BE49-F238E27FC236}">
-                <a16:creationId xmlns:a16="http://schemas.microsoft.com/office/drawing/2014/main" id="{6C6349D9-C850-FC32-0AAC-B58A8A4D2CAA}"/>
+                <ns2:creationId id="{6C6349D9-C850-FC32-0AAC-B58A8A4D2CAA}"/>
               </a:ext>
             </a:extLst>
           </p:cNvPr>
@@ -26406,7 +26304,7 @@
     </p:spTree>
     <p:extLst>
       <p:ext uri="{BB962C8B-B14F-4D97-AF65-F5344CB8AC3E}">
-        <p14:creationId xmlns:p14="http://schemas.microsoft.com/office/powerpoint/2010/main" val="368761644"/>
+        <ns4:creationId val="368761644"/>
       </p:ext>
     </p:extLst>
   </p:cSld>
@@ -26417,7 +26315,7 @@
 </file>
 
 <file path=ppt/slides/slide2.xml><?xml version="1.0" encoding="utf-8"?>
-<p:sld xmlns:a="http://schemas.openxmlformats.org/drawingml/2006/main" xmlns:r="http://schemas.openxmlformats.org/officeDocument/2006/relationships" xmlns:p="http://schemas.openxmlformats.org/presentationml/2006/main">
+<p:sld xmlns:a="http://schemas.openxmlformats.org/drawingml/2006/main" xmlns:ns2="http://schemas.microsoft.com/office/drawing/2014/main" xmlns:ns3="http://schemas.microsoft.com/office/drawing/2010/main" xmlns:p="http://schemas.openxmlformats.org/presentationml/2006/main" xmlns:r="http://schemas.openxmlformats.org/officeDocument/2006/relationships">
   <p:cSld>
     <p:bg>
       <p:bgPr>
@@ -26448,7 +26346,7 @@
           <p:cNvPr id="5" name="codex_template_right_wash">
             <a:extLst>
               <a:ext uri="{FF2B5EF4-FFF2-40B4-BE49-F238E27FC236}">
-                <a16:creationId xmlns:a16="http://schemas.microsoft.com/office/drawing/2014/main" id="{2567CD54-3FD7-A610-21FB-E5939BAB88B1}"/>
+                <ns2:creationId id="{2567CD54-3FD7-A610-21FB-E5939BAB88B1}"/>
               </a:ext>
             </a:extLst>
           </p:cNvPr>
@@ -26470,19 +26368,18 @@
           </a:solidFill>
           <a:ln w="25400" cap="flat" cmpd="sng" algn="ctr">
             <a:noFill/>
-            <a:prstDash val="solid"/>
           </a:ln>
           <a:effectLst/>
           <a:extLst>
             <a:ext uri="{91240B29-F687-4F45-9708-019B960494DF}">
-              <a14:hiddenLine xmlns:a14="http://schemas.microsoft.com/office/drawing/2010/main" w="25400" cap="flat" cmpd="sng" algn="ctr">
+              <ns3:hiddenLine w="25400" cap="flat" cmpd="sng" algn="ctr">
                 <a:solidFill>
                   <a:schemeClr val="accent1">
                     <a:shade val="15000"/>
                   </a:schemeClr>
                 </a:solidFill>
                 <a:prstDash val="solid"/>
-              </a14:hiddenLine>
+              </ns3:hiddenLine>
             </a:ext>
           </a:extLst>
         </p:spPr>
@@ -26516,7 +26413,7 @@
           <p:cNvPr id="4" name="codex_template_header_band">
             <a:extLst>
               <a:ext uri="{FF2B5EF4-FFF2-40B4-BE49-F238E27FC236}">
-                <a16:creationId xmlns:a16="http://schemas.microsoft.com/office/drawing/2014/main" id="{504D905E-72F6-0C0D-66F2-726C9D8E5D9F}"/>
+                <ns2:creationId id="{504D905E-72F6-0C0D-66F2-726C9D8E5D9F}"/>
               </a:ext>
             </a:extLst>
           </p:cNvPr>
@@ -26538,19 +26435,18 @@
           </a:solidFill>
           <a:ln w="25400" cap="flat" cmpd="sng" algn="ctr">
             <a:noFill/>
-            <a:prstDash val="solid"/>
           </a:ln>
           <a:effectLst/>
           <a:extLst>
             <a:ext uri="{91240B29-F687-4F45-9708-019B960494DF}">
-              <a14:hiddenLine xmlns:a14="http://schemas.microsoft.com/office/drawing/2010/main" w="25400" cap="flat" cmpd="sng" algn="ctr">
+              <ns3:hiddenLine w="25400" cap="flat" cmpd="sng" algn="ctr">
                 <a:solidFill>
                   <a:schemeClr val="accent1">
                     <a:shade val="15000"/>
                   </a:schemeClr>
                 </a:solidFill>
                 <a:prstDash val="solid"/>
-              </a14:hiddenLine>
+              </ns3:hiddenLine>
             </a:ext>
           </a:extLst>
         </p:spPr>
@@ -26584,7 +26480,7 @@
           <p:cNvPr id="3" name="codex_template_background">
             <a:extLst>
               <a:ext uri="{FF2B5EF4-FFF2-40B4-BE49-F238E27FC236}">
-                <a16:creationId xmlns:a16="http://schemas.microsoft.com/office/drawing/2014/main" id="{704A47A4-594D-CCF7-6E24-A8C78B1B6891}"/>
+                <ns2:creationId id="{704A47A4-594D-CCF7-6E24-A8C78B1B6891}"/>
               </a:ext>
             </a:extLst>
           </p:cNvPr>
@@ -26604,19 +26500,18 @@
           </a:solidFill>
           <a:ln w="25400" cap="flat" cmpd="sng" algn="ctr">
             <a:noFill/>
-            <a:prstDash val="solid"/>
           </a:ln>
           <a:effectLst/>
           <a:extLst>
             <a:ext uri="{91240B29-F687-4F45-9708-019B960494DF}">
-              <a14:hiddenLine xmlns:a14="http://schemas.microsoft.com/office/drawing/2010/main" w="25400" cap="flat" cmpd="sng" algn="ctr">
+              <ns3:hiddenLine w="25400" cap="flat" cmpd="sng" algn="ctr">
                 <a:solidFill>
                   <a:schemeClr val="accent1">
                     <a:shade val="15000"/>
                   </a:schemeClr>
                 </a:solidFill>
                 <a:prstDash val="solid"/>
-              </a14:hiddenLine>
+              </ns3:hiddenLine>
             </a:ext>
           </a:extLst>
         </p:spPr>
@@ -26666,8 +26561,6 @@
           </a:solidFill>
           <a:ln w="15875" cap="flat" cmpd="sng">
             <a:noFill/>
-            <a:prstDash val="solid"/>
-            <a:round/>
           </a:ln>
           <a:effectLst/>
         </p:spPr>
@@ -26709,7 +26602,7 @@
           <p:cNvPr id="8" name="Subtitle">
             <a:extLst>
               <a:ext uri="{FF2B5EF4-FFF2-40B4-BE49-F238E27FC236}">
-                <a16:creationId xmlns:a16="http://schemas.microsoft.com/office/drawing/2014/main" id="{D3E4C10D-835C-D400-CF8A-27776596A568}"/>
+                <ns2:creationId id="{D3E4C10D-835C-D400-CF8A-27776596A568}"/>
               </a:ext>
             </a:extLst>
           </p:cNvPr>
@@ -26735,7 +26628,7 @@
           <a:effectLst/>
           <a:extLst>
             <a:ext uri="{AF507438-7753-43E0-B8FC-AC1667EBCBE1}">
-              <a14:hiddenEffects xmlns:a14="http://schemas.microsoft.com/office/drawing/2010/main">
+              <ns3:hiddenEffects>
                 <a:effectLst>
                   <a:outerShdw blurRad="63500" dist="28398" dir="3806086" rotWithShape="0">
                     <a:srgbClr val="B9CCE0">
@@ -26743,7 +26636,7 @@
                     </a:srgbClr>
                   </a:outerShdw>
                 </a:effectLst>
-              </a14:hiddenEffects>
+              </ns3:hiddenEffects>
             </a:ext>
           </a:extLst>
         </p:spPr>
@@ -26770,7 +26663,7 @@
           <p:cNvPr id="10" name="Picture 9">
             <a:extLst>
               <a:ext uri="{FF2B5EF4-FFF2-40B4-BE49-F238E27FC236}">
-                <a16:creationId xmlns:a16="http://schemas.microsoft.com/office/drawing/2014/main" id="{E984C0DA-7CD7-6EF3-4E8A-C55F84395F77}"/>
+                <ns2:creationId id="{E984C0DA-7CD7-6EF3-4E8A-C55F84395F77}"/>
               </a:ext>
             </a:extLst>
           </p:cNvPr>
@@ -26794,9 +26687,7 @@
             <a:avLst/>
           </a:prstGeom>
           <a:ln w="15875">
-            <a:solidFill>
-              <a:srgbClr val="D6E8F6"/>
-            </a:solidFill>
+            <a:noFill/>
           </a:ln>
           <a:effectLst>
             <a:outerShdw blurRad="63500" dist="28398" dir="3806086" rotWithShape="0">
@@ -26812,7 +26703,7 @@
           <p:cNvPr id="6" name="codex_template_top_accent">
             <a:extLst>
               <a:ext uri="{FF2B5EF4-FFF2-40B4-BE49-F238E27FC236}">
-                <a16:creationId xmlns:a16="http://schemas.microsoft.com/office/drawing/2014/main" id="{F907DDE8-10F8-D91A-C9CC-5AE4DC0F3763}"/>
+                <ns2:creationId id="{F907DDE8-10F8-D91A-C9CC-5AE4DC0F3763}"/>
               </a:ext>
             </a:extLst>
           </p:cNvPr>
@@ -26832,19 +26723,18 @@
           </a:solidFill>
           <a:ln w="25400" cap="flat" cmpd="sng" algn="ctr">
             <a:noFill/>
-            <a:prstDash val="solid"/>
           </a:ln>
           <a:effectLst/>
           <a:extLst>
             <a:ext uri="{91240B29-F687-4F45-9708-019B960494DF}">
-              <a14:hiddenLine xmlns:a14="http://schemas.microsoft.com/office/drawing/2010/main" w="25400" cap="flat" cmpd="sng" algn="ctr">
+              <ns3:hiddenLine w="25400" cap="flat" cmpd="sng" algn="ctr">
                 <a:solidFill>
                   <a:schemeClr val="accent1">
                     <a:shade val="15000"/>
                   </a:schemeClr>
                 </a:solidFill>
                 <a:prstDash val="solid"/>
-              </a14:hiddenLine>
+              </ns3:hiddenLine>
             </a:ext>
           </a:extLst>
         </p:spPr>
@@ -26878,7 +26768,7 @@
           <p:cNvPr id="9" name="codex_template_footer">
             <a:extLst>
               <a:ext uri="{FF2B5EF4-FFF2-40B4-BE49-F238E27FC236}">
-                <a16:creationId xmlns:a16="http://schemas.microsoft.com/office/drawing/2014/main" id="{9DC3B99D-0679-92AA-BCE2-669A1DEF2F73}"/>
+                <ns2:creationId id="{9DC3B99D-0679-92AA-BCE2-669A1DEF2F73}"/>
               </a:ext>
             </a:extLst>
           </p:cNvPr>
@@ -26918,7 +26808,7 @@
           <p:cNvPr id="11" name="codex_template_slide_number">
             <a:extLst>
               <a:ext uri="{FF2B5EF4-FFF2-40B4-BE49-F238E27FC236}">
-                <a16:creationId xmlns:a16="http://schemas.microsoft.com/office/drawing/2014/main" id="{8930BD67-B59A-EEF9-2AD2-E00DDA348B98}"/>
+                <ns2:creationId id="{8930BD67-B59A-EEF9-2AD2-E00DDA348B98}"/>
               </a:ext>
             </a:extLst>
           </p:cNvPr>
@@ -26958,7 +26848,7 @@
           <p:cNvPr id="12" name="codex_template_title_rule">
             <a:extLst>
               <a:ext uri="{FF2B5EF4-FFF2-40B4-BE49-F238E27FC236}">
-                <a16:creationId xmlns:a16="http://schemas.microsoft.com/office/drawing/2014/main" id="{8ED0C242-9D04-0B2B-590F-3A885B604215}"/>
+                <ns2:creationId id="{8ED0C242-9D04-0B2B-590F-3A885B604215}"/>
               </a:ext>
             </a:extLst>
           </p:cNvPr>
@@ -27003,14 +26893,14 @@
 </file>
 
 <file path=ppt/slides/slide20.xml><?xml version="1.0" encoding="utf-8"?>
-<p:sld xmlns:a="http://schemas.openxmlformats.org/drawingml/2006/main" xmlns:r="http://schemas.openxmlformats.org/officeDocument/2006/relationships" xmlns:p="http://schemas.openxmlformats.org/presentationml/2006/main">
+<p:sld xmlns:a="http://schemas.openxmlformats.org/drawingml/2006/main" xmlns:ns2="http://schemas.microsoft.com/office/drawing/2014/main" xmlns:ns3="http://schemas.microsoft.com/office/drawing/2010/main" xmlns:ns5="http://schemas.microsoft.com/office/powerpoint/2010/main" xmlns:p="http://schemas.openxmlformats.org/presentationml/2006/main" xmlns:r="http://schemas.openxmlformats.org/officeDocument/2006/relationships">
   <p:cSld>
     <p:spTree>
       <p:nvGrpSpPr>
         <p:cNvPr id="1" name="">
           <a:extLst>
             <a:ext uri="{FF2B5EF4-FFF2-40B4-BE49-F238E27FC236}">
-              <a16:creationId xmlns:a16="http://schemas.microsoft.com/office/drawing/2014/main" id="{A465C63E-72D8-19D7-52C1-1E0BA1046DF9}"/>
+              <ns2:creationId id="{A465C63E-72D8-19D7-52C1-1E0BA1046DF9}"/>
             </a:ext>
           </a:extLst>
         </p:cNvPr>
@@ -27030,7 +26920,7 @@
           <p:cNvPr id="38" name="codex_template_header_band">
             <a:extLst>
               <a:ext uri="{FF2B5EF4-FFF2-40B4-BE49-F238E27FC236}">
-                <a16:creationId xmlns:a16="http://schemas.microsoft.com/office/drawing/2014/main" id="{D9E2D62E-3817-8430-EFCC-85082EFAFACA}"/>
+                <ns2:creationId id="{D9E2D62E-3817-8430-EFCC-85082EFAFACA}"/>
               </a:ext>
             </a:extLst>
           </p:cNvPr>
@@ -27052,19 +26942,18 @@
           </a:solidFill>
           <a:ln w="25400" cap="flat" cmpd="sng" algn="ctr">
             <a:noFill/>
-            <a:prstDash val="solid"/>
           </a:ln>
           <a:effectLst/>
           <a:extLst>
             <a:ext uri="{91240B29-F687-4F45-9708-019B960494DF}">
-              <a14:hiddenLine xmlns:a14="http://schemas.microsoft.com/office/drawing/2010/main" w="25400" cap="flat" cmpd="sng" algn="ctr">
+              <ns3:hiddenLine w="25400" cap="flat" cmpd="sng" algn="ctr">
                 <a:solidFill>
                   <a:schemeClr val="accent1">
                     <a:shade val="15000"/>
                   </a:schemeClr>
                 </a:solidFill>
                 <a:prstDash val="solid"/>
-              </a14:hiddenLine>
+              </ns3:hiddenLine>
             </a:ext>
           </a:extLst>
         </p:spPr>
@@ -27098,7 +26987,7 @@
           <p:cNvPr id="11" name="TextBox 10">
             <a:extLst>
               <a:ext uri="{FF2B5EF4-FFF2-40B4-BE49-F238E27FC236}">
-                <a16:creationId xmlns:a16="http://schemas.microsoft.com/office/drawing/2014/main" id="{CF2796E5-8C7E-B4AF-C4F1-28CC9800AD49}"/>
+                <ns2:creationId id="{CF2796E5-8C7E-B4AF-C4F1-28CC9800AD49}"/>
               </a:ext>
             </a:extLst>
           </p:cNvPr>
@@ -27146,7 +27035,7 @@
           <p:cNvPr id="40" name="codex_template_top_accent">
             <a:extLst>
               <a:ext uri="{FF2B5EF4-FFF2-40B4-BE49-F238E27FC236}">
-                <a16:creationId xmlns:a16="http://schemas.microsoft.com/office/drawing/2014/main" id="{3628B112-F0E9-072F-7B3F-9605E118FC85}"/>
+                <ns2:creationId id="{3628B112-F0E9-072F-7B3F-9605E118FC85}"/>
               </a:ext>
             </a:extLst>
           </p:cNvPr>
@@ -27166,19 +27055,18 @@
           </a:solidFill>
           <a:ln w="25400" cap="flat" cmpd="sng" algn="ctr">
             <a:noFill/>
-            <a:prstDash val="solid"/>
           </a:ln>
           <a:effectLst/>
           <a:extLst>
             <a:ext uri="{91240B29-F687-4F45-9708-019B960494DF}">
-              <a14:hiddenLine xmlns:a14="http://schemas.microsoft.com/office/drawing/2010/main" w="25400" cap="flat" cmpd="sng" algn="ctr">
+              <ns3:hiddenLine w="25400" cap="flat" cmpd="sng" algn="ctr">
                 <a:solidFill>
                   <a:schemeClr val="accent1">
                     <a:shade val="15000"/>
                   </a:schemeClr>
                 </a:solidFill>
                 <a:prstDash val="solid"/>
-              </a14:hiddenLine>
+              </ns3:hiddenLine>
             </a:ext>
           </a:extLst>
         </p:spPr>
@@ -27212,7 +27100,7 @@
           <p:cNvPr id="42" name="codex_template_footer">
             <a:extLst>
               <a:ext uri="{FF2B5EF4-FFF2-40B4-BE49-F238E27FC236}">
-                <a16:creationId xmlns:a16="http://schemas.microsoft.com/office/drawing/2014/main" id="{8A335B5A-8CDB-6A54-F73C-41AB35F5A382}"/>
+                <ns2:creationId id="{8A335B5A-8CDB-6A54-F73C-41AB35F5A382}"/>
               </a:ext>
             </a:extLst>
           </p:cNvPr>
@@ -27252,7 +27140,7 @@
           <p:cNvPr id="43" name="codex_template_slide_number">
             <a:extLst>
               <a:ext uri="{FF2B5EF4-FFF2-40B4-BE49-F238E27FC236}">
-                <a16:creationId xmlns:a16="http://schemas.microsoft.com/office/drawing/2014/main" id="{4BDD8E65-4C07-E4C6-E3B7-B2C57C23E6B8}"/>
+                <ns2:creationId id="{4BDD8E65-4C07-E4C6-E3B7-B2C57C23E6B8}"/>
               </a:ext>
             </a:extLst>
           </p:cNvPr>
@@ -27292,7 +27180,7 @@
           <p:cNvPr id="44" name="codex_template_title_rule">
             <a:extLst>
               <a:ext uri="{FF2B5EF4-FFF2-40B4-BE49-F238E27FC236}">
-                <a16:creationId xmlns:a16="http://schemas.microsoft.com/office/drawing/2014/main" id="{7DE4E7BD-FE88-5424-9492-FB18636805CD}"/>
+                <ns2:creationId id="{7DE4E7BD-FE88-5424-9492-FB18636805CD}"/>
               </a:ext>
             </a:extLst>
           </p:cNvPr>
@@ -27333,7 +27221,7 @@
           <p:cNvPr id="15" name="Picture 14">
             <a:extLst>
               <a:ext uri="{FF2B5EF4-FFF2-40B4-BE49-F238E27FC236}">
-                <a16:creationId xmlns:a16="http://schemas.microsoft.com/office/drawing/2014/main" id="{6A514BF7-AD42-61C1-928F-22C1D402BB97}"/>
+                <ns2:creationId id="{6A514BF7-AD42-61C1-928F-22C1D402BB97}"/>
               </a:ext>
             </a:extLst>
           </p:cNvPr>
@@ -27361,7 +27249,7 @@
     </p:spTree>
     <p:extLst>
       <p:ext uri="{BB962C8B-B14F-4D97-AF65-F5344CB8AC3E}">
-        <p14:creationId xmlns:p14="http://schemas.microsoft.com/office/powerpoint/2010/main" val="3046374882"/>
+        <ns5:creationId val="3046374882"/>
       </p:ext>
     </p:extLst>
   </p:cSld>
@@ -27372,14 +27260,14 @@
 </file>
 
 <file path=ppt/slides/slide21.xml><?xml version="1.0" encoding="utf-8"?>
-<p:sld xmlns:a="http://schemas.openxmlformats.org/drawingml/2006/main" xmlns:r="http://schemas.openxmlformats.org/officeDocument/2006/relationships" xmlns:p="http://schemas.openxmlformats.org/presentationml/2006/main">
+<p:sld xmlns:a="http://schemas.openxmlformats.org/drawingml/2006/main" xmlns:ns2="http://schemas.microsoft.com/office/drawing/2014/main" xmlns:ns3="http://schemas.microsoft.com/office/drawing/2010/main" xmlns:ns5="http://schemas.microsoft.com/office/powerpoint/2010/main" xmlns:p="http://schemas.openxmlformats.org/presentationml/2006/main" xmlns:r="http://schemas.openxmlformats.org/officeDocument/2006/relationships">
   <p:cSld>
     <p:spTree>
       <p:nvGrpSpPr>
         <p:cNvPr id="1" name="">
           <a:extLst>
             <a:ext uri="{FF2B5EF4-FFF2-40B4-BE49-F238E27FC236}">
-              <a16:creationId xmlns:a16="http://schemas.microsoft.com/office/drawing/2014/main" id="{C345B54E-C617-8EFB-DCA2-069A912E138E}"/>
+              <ns2:creationId id="{C345B54E-C617-8EFB-DCA2-069A912E138E}"/>
             </a:ext>
           </a:extLst>
         </p:cNvPr>
@@ -27399,7 +27287,7 @@
           <p:cNvPr id="38" name="codex_template_header_band">
             <a:extLst>
               <a:ext uri="{FF2B5EF4-FFF2-40B4-BE49-F238E27FC236}">
-                <a16:creationId xmlns:a16="http://schemas.microsoft.com/office/drawing/2014/main" id="{27A6F93A-D128-0099-1094-01DCE4AB5B7C}"/>
+                <ns2:creationId id="{27A6F93A-D128-0099-1094-01DCE4AB5B7C}"/>
               </a:ext>
             </a:extLst>
           </p:cNvPr>
@@ -27421,19 +27309,18 @@
           </a:solidFill>
           <a:ln w="25400" cap="flat" cmpd="sng" algn="ctr">
             <a:noFill/>
-            <a:prstDash val="solid"/>
           </a:ln>
           <a:effectLst/>
           <a:extLst>
             <a:ext uri="{91240B29-F687-4F45-9708-019B960494DF}">
-              <a14:hiddenLine xmlns:a14="http://schemas.microsoft.com/office/drawing/2010/main" w="25400" cap="flat" cmpd="sng" algn="ctr">
+              <ns3:hiddenLine w="25400" cap="flat" cmpd="sng" algn="ctr">
                 <a:solidFill>
                   <a:schemeClr val="accent1">
                     <a:shade val="15000"/>
                   </a:schemeClr>
                 </a:solidFill>
                 <a:prstDash val="solid"/>
-              </a14:hiddenLine>
+              </ns3:hiddenLine>
             </a:ext>
           </a:extLst>
         </p:spPr>
@@ -27467,7 +27354,7 @@
           <p:cNvPr id="11" name="TextBox 10">
             <a:extLst>
               <a:ext uri="{FF2B5EF4-FFF2-40B4-BE49-F238E27FC236}">
-                <a16:creationId xmlns:a16="http://schemas.microsoft.com/office/drawing/2014/main" id="{835052C0-E9D3-B22C-5F49-354F2E60E1CC}"/>
+                <ns2:creationId id="{835052C0-E9D3-B22C-5F49-354F2E60E1CC}"/>
               </a:ext>
             </a:extLst>
           </p:cNvPr>
@@ -27515,7 +27402,7 @@
           <p:cNvPr id="40" name="codex_template_top_accent">
             <a:extLst>
               <a:ext uri="{FF2B5EF4-FFF2-40B4-BE49-F238E27FC236}">
-                <a16:creationId xmlns:a16="http://schemas.microsoft.com/office/drawing/2014/main" id="{7F199F18-44E3-5B18-434C-1614310EFDB3}"/>
+                <ns2:creationId id="{7F199F18-44E3-5B18-434C-1614310EFDB3}"/>
               </a:ext>
             </a:extLst>
           </p:cNvPr>
@@ -27535,19 +27422,18 @@
           </a:solidFill>
           <a:ln w="25400" cap="flat" cmpd="sng" algn="ctr">
             <a:noFill/>
-            <a:prstDash val="solid"/>
           </a:ln>
           <a:effectLst/>
           <a:extLst>
             <a:ext uri="{91240B29-F687-4F45-9708-019B960494DF}">
-              <a14:hiddenLine xmlns:a14="http://schemas.microsoft.com/office/drawing/2010/main" w="25400" cap="flat" cmpd="sng" algn="ctr">
+              <ns3:hiddenLine w="25400" cap="flat" cmpd="sng" algn="ctr">
                 <a:solidFill>
                   <a:schemeClr val="accent1">
                     <a:shade val="15000"/>
                   </a:schemeClr>
                 </a:solidFill>
                 <a:prstDash val="solid"/>
-              </a14:hiddenLine>
+              </ns3:hiddenLine>
             </a:ext>
           </a:extLst>
         </p:spPr>
@@ -27581,7 +27467,7 @@
           <p:cNvPr id="42" name="codex_template_footer">
             <a:extLst>
               <a:ext uri="{FF2B5EF4-FFF2-40B4-BE49-F238E27FC236}">
-                <a16:creationId xmlns:a16="http://schemas.microsoft.com/office/drawing/2014/main" id="{C41B9876-0BB1-649C-D632-B4D34897C01B}"/>
+                <ns2:creationId id="{C41B9876-0BB1-649C-D632-B4D34897C01B}"/>
               </a:ext>
             </a:extLst>
           </p:cNvPr>
@@ -27621,7 +27507,7 @@
           <p:cNvPr id="43" name="codex_template_slide_number">
             <a:extLst>
               <a:ext uri="{FF2B5EF4-FFF2-40B4-BE49-F238E27FC236}">
-                <a16:creationId xmlns:a16="http://schemas.microsoft.com/office/drawing/2014/main" id="{05EA4441-396F-95A7-567B-F33FCF76514A}"/>
+                <ns2:creationId id="{05EA4441-396F-95A7-567B-F33FCF76514A}"/>
               </a:ext>
             </a:extLst>
           </p:cNvPr>
@@ -27661,7 +27547,7 @@
           <p:cNvPr id="44" name="codex_template_title_rule">
             <a:extLst>
               <a:ext uri="{FF2B5EF4-FFF2-40B4-BE49-F238E27FC236}">
-                <a16:creationId xmlns:a16="http://schemas.microsoft.com/office/drawing/2014/main" id="{419AF9DA-D6D0-9F58-B2C1-7189AEB8395D}"/>
+                <ns2:creationId id="{419AF9DA-D6D0-9F58-B2C1-7189AEB8395D}"/>
               </a:ext>
             </a:extLst>
           </p:cNvPr>
@@ -27702,7 +27588,7 @@
           <p:cNvPr id="3" name="Picture 2">
             <a:extLst>
               <a:ext uri="{FF2B5EF4-FFF2-40B4-BE49-F238E27FC236}">
-                <a16:creationId xmlns:a16="http://schemas.microsoft.com/office/drawing/2014/main" id="{0AB9025C-5FB3-0CB9-56CB-D139A29F2E20}"/>
+                <ns2:creationId id="{0AB9025C-5FB3-0CB9-56CB-D139A29F2E20}"/>
               </a:ext>
             </a:extLst>
           </p:cNvPr>
@@ -27730,7 +27616,7 @@
     </p:spTree>
     <p:extLst>
       <p:ext uri="{BB962C8B-B14F-4D97-AF65-F5344CB8AC3E}">
-        <p14:creationId xmlns:p14="http://schemas.microsoft.com/office/powerpoint/2010/main" val="2605003993"/>
+        <ns5:creationId val="2605003993"/>
       </p:ext>
     </p:extLst>
   </p:cSld>
@@ -27741,7 +27627,7 @@
 </file>
 
 <file path=ppt/slides/slide22.xml><?xml version="1.0" encoding="utf-8"?>
-<p:sld xmlns:a="http://schemas.openxmlformats.org/drawingml/2006/main" xmlns:r="http://schemas.openxmlformats.org/officeDocument/2006/relationships" xmlns:p="http://schemas.openxmlformats.org/presentationml/2006/main">
+<p:sld xmlns:a="http://schemas.openxmlformats.org/drawingml/2006/main" xmlns:ns2="http://schemas.microsoft.com/office/drawing/2014/main" xmlns:ns3="http://schemas.microsoft.com/office/drawing/2010/main" xmlns:ns4="http://schemas.microsoft.com/office/powerpoint/2010/main" xmlns:p="http://schemas.openxmlformats.org/presentationml/2006/main">
   <p:cSld>
     <p:spTree>
       <p:nvGrpSpPr>
@@ -27762,7 +27648,7 @@
           <p:cNvPr id="5" name="codex_template_right_wash">
             <a:extLst>
               <a:ext uri="{FF2B5EF4-FFF2-40B4-BE49-F238E27FC236}">
-                <a16:creationId xmlns:a16="http://schemas.microsoft.com/office/drawing/2014/main" id="{BF9EAF00-D59D-E489-EA67-084CB23ED91B}"/>
+                <ns2:creationId id="{BF9EAF00-D59D-E489-EA67-084CB23ED91B}"/>
               </a:ext>
             </a:extLst>
           </p:cNvPr>
@@ -27784,19 +27670,18 @@
           </a:solidFill>
           <a:ln w="25400" cap="flat" cmpd="sng" algn="ctr">
             <a:noFill/>
-            <a:prstDash val="solid"/>
           </a:ln>
           <a:effectLst/>
           <a:extLst>
             <a:ext uri="{91240B29-F687-4F45-9708-019B960494DF}">
-              <a14:hiddenLine xmlns:a14="http://schemas.microsoft.com/office/drawing/2010/main" w="25400" cap="flat" cmpd="sng" algn="ctr">
+              <ns3:hiddenLine w="25400" cap="flat" cmpd="sng" algn="ctr">
                 <a:solidFill>
                   <a:schemeClr val="accent1">
                     <a:shade val="15000"/>
                   </a:schemeClr>
                 </a:solidFill>
                 <a:prstDash val="solid"/>
-              </a14:hiddenLine>
+              </ns3:hiddenLine>
             </a:ext>
           </a:extLst>
         </p:spPr>
@@ -27830,7 +27715,7 @@
           <p:cNvPr id="4" name="codex_template_header_band">
             <a:extLst>
               <a:ext uri="{FF2B5EF4-FFF2-40B4-BE49-F238E27FC236}">
-                <a16:creationId xmlns:a16="http://schemas.microsoft.com/office/drawing/2014/main" id="{C5A0CFF0-C1ED-D1A6-7C1C-D8C57ABDAEDE}"/>
+                <ns2:creationId id="{C5A0CFF0-C1ED-D1A6-7C1C-D8C57ABDAEDE}"/>
               </a:ext>
             </a:extLst>
           </p:cNvPr>
@@ -27852,19 +27737,18 @@
           </a:solidFill>
           <a:ln w="25400" cap="flat" cmpd="sng" algn="ctr">
             <a:noFill/>
-            <a:prstDash val="solid"/>
           </a:ln>
           <a:effectLst/>
           <a:extLst>
             <a:ext uri="{91240B29-F687-4F45-9708-019B960494DF}">
-              <a14:hiddenLine xmlns:a14="http://schemas.microsoft.com/office/drawing/2010/main" w="25400" cap="flat" cmpd="sng" algn="ctr">
+              <ns3:hiddenLine w="25400" cap="flat" cmpd="sng" algn="ctr">
                 <a:solidFill>
                   <a:schemeClr val="accent1">
                     <a:shade val="15000"/>
                   </a:schemeClr>
                 </a:solidFill>
                 <a:prstDash val="solid"/>
-              </a14:hiddenLine>
+              </ns3:hiddenLine>
             </a:ext>
           </a:extLst>
         </p:spPr>
@@ -27898,7 +27782,7 @@
           <p:cNvPr id="3" name="codex_template_background">
             <a:extLst>
               <a:ext uri="{FF2B5EF4-FFF2-40B4-BE49-F238E27FC236}">
-                <a16:creationId xmlns:a16="http://schemas.microsoft.com/office/drawing/2014/main" id="{14F4C67B-5D03-CB18-96D5-4B3E2349AF7B}"/>
+                <ns2:creationId id="{14F4C67B-5D03-CB18-96D5-4B3E2349AF7B}"/>
               </a:ext>
             </a:extLst>
           </p:cNvPr>
@@ -27918,19 +27802,18 @@
           </a:solidFill>
           <a:ln w="25400" cap="flat" cmpd="sng" algn="ctr">
             <a:noFill/>
-            <a:prstDash val="solid"/>
           </a:ln>
           <a:effectLst/>
           <a:extLst>
             <a:ext uri="{91240B29-F687-4F45-9708-019B960494DF}">
-              <a14:hiddenLine xmlns:a14="http://schemas.microsoft.com/office/drawing/2010/main" w="25400" cap="flat" cmpd="sng" algn="ctr">
+              <ns3:hiddenLine w="25400" cap="flat" cmpd="sng" algn="ctr">
                 <a:solidFill>
                   <a:schemeClr val="accent1">
                     <a:shade val="15000"/>
                   </a:schemeClr>
                 </a:solidFill>
                 <a:prstDash val="solid"/>
-              </a14:hiddenLine>
+              </ns3:hiddenLine>
             </a:ext>
           </a:extLst>
         </p:spPr>
@@ -27964,7 +27847,7 @@
           <p:cNvPr id="2" name="AutoShape 2">
             <a:extLst>
               <a:ext uri="{FF2B5EF4-FFF2-40B4-BE49-F238E27FC236}">
-                <a16:creationId xmlns:a16="http://schemas.microsoft.com/office/drawing/2014/main" id="{94FD6F2E-BFDF-6E5E-AFAA-6D4675FA33D4}"/>
+                <ns2:creationId id="{94FD6F2E-BFDF-6E5E-AFAA-6D4675FA33D4}"/>
               </a:ext>
             </a:extLst>
           </p:cNvPr>
@@ -27988,8 +27871,6 @@
           </a:solidFill>
           <a:ln w="25400" cap="flat" cmpd="sng">
             <a:noFill/>
-            <a:prstDash val="solid"/>
-            <a:round/>
           </a:ln>
         </p:spPr>
         <p:txBody>
@@ -28024,7 +27905,7 @@
           <p:cNvPr id="6" name="codex_template_top_accent">
             <a:extLst>
               <a:ext uri="{FF2B5EF4-FFF2-40B4-BE49-F238E27FC236}">
-                <a16:creationId xmlns:a16="http://schemas.microsoft.com/office/drawing/2014/main" id="{BFA00E01-55F7-9DC9-EA14-3D146244F478}"/>
+                <ns2:creationId id="{BFA00E01-55F7-9DC9-EA14-3D146244F478}"/>
               </a:ext>
             </a:extLst>
           </p:cNvPr>
@@ -28044,19 +27925,18 @@
           </a:solidFill>
           <a:ln w="25400" cap="flat" cmpd="sng" algn="ctr">
             <a:noFill/>
-            <a:prstDash val="solid"/>
           </a:ln>
           <a:effectLst/>
           <a:extLst>
             <a:ext uri="{91240B29-F687-4F45-9708-019B960494DF}">
-              <a14:hiddenLine xmlns:a14="http://schemas.microsoft.com/office/drawing/2010/main" w="25400" cap="flat" cmpd="sng" algn="ctr">
+              <ns3:hiddenLine w="25400" cap="flat" cmpd="sng" algn="ctr">
                 <a:solidFill>
                   <a:schemeClr val="accent1">
                     <a:shade val="15000"/>
                   </a:schemeClr>
                 </a:solidFill>
                 <a:prstDash val="solid"/>
-              </a14:hiddenLine>
+              </ns3:hiddenLine>
             </a:ext>
           </a:extLst>
         </p:spPr>
@@ -28090,7 +27970,7 @@
           <p:cNvPr id="7" name="codex_template_header_line">
             <a:extLst>
               <a:ext uri="{FF2B5EF4-FFF2-40B4-BE49-F238E27FC236}">
-                <a16:creationId xmlns:a16="http://schemas.microsoft.com/office/drawing/2014/main" id="{736C040F-6018-A0C1-592D-38931175AEFE}"/>
+                <ns2:creationId id="{736C040F-6018-A0C1-592D-38931175AEFE}"/>
               </a:ext>
             </a:extLst>
           </p:cNvPr>
@@ -28131,7 +28011,7 @@
           <p:cNvPr id="8" name="codex_template_footer">
             <a:extLst>
               <a:ext uri="{FF2B5EF4-FFF2-40B4-BE49-F238E27FC236}">
-                <a16:creationId xmlns:a16="http://schemas.microsoft.com/office/drawing/2014/main" id="{3AF62EA3-3B15-9954-7947-F3AA88CB4BB6}"/>
+                <ns2:creationId id="{3AF62EA3-3B15-9954-7947-F3AA88CB4BB6}"/>
               </a:ext>
             </a:extLst>
           </p:cNvPr>
@@ -28171,7 +28051,7 @@
           <p:cNvPr id="9" name="codex_template_slide_number">
             <a:extLst>
               <a:ext uri="{FF2B5EF4-FFF2-40B4-BE49-F238E27FC236}">
-                <a16:creationId xmlns:a16="http://schemas.microsoft.com/office/drawing/2014/main" id="{D55B698C-FA31-7013-0537-B90B0709C50B}"/>
+                <ns2:creationId id="{D55B698C-FA31-7013-0537-B90B0709C50B}"/>
               </a:ext>
             </a:extLst>
           </p:cNvPr>
@@ -28209,7 +28089,7 @@
     </p:spTree>
     <p:extLst>
       <p:ext uri="{BB962C8B-B14F-4D97-AF65-F5344CB8AC3E}">
-        <p14:creationId xmlns:p14="http://schemas.microsoft.com/office/powerpoint/2010/main" val="279361671"/>
+        <ns4:creationId val="279361671"/>
       </p:ext>
     </p:extLst>
   </p:cSld>
@@ -28220,7 +28100,7 @@
 </file>
 
 <file path=ppt/slides/slide3.xml><?xml version="1.0" encoding="utf-8"?>
-<p:sld xmlns:a="http://schemas.openxmlformats.org/drawingml/2006/main" xmlns:r="http://schemas.openxmlformats.org/officeDocument/2006/relationships" xmlns:p="http://schemas.openxmlformats.org/presentationml/2006/main">
+<p:sld xmlns:a="http://schemas.openxmlformats.org/drawingml/2006/main" xmlns:ns2="http://schemas.microsoft.com/office/drawing/2014/main" xmlns:ns3="http://schemas.microsoft.com/office/drawing/2010/main" xmlns:p="http://schemas.openxmlformats.org/presentationml/2006/main" xmlns:r="http://schemas.openxmlformats.org/officeDocument/2006/relationships">
   <p:cSld>
     <p:bg>
       <p:bgPr>
@@ -28251,7 +28131,7 @@
           <p:cNvPr id="6" name="codex_template_right_wash">
             <a:extLst>
               <a:ext uri="{FF2B5EF4-FFF2-40B4-BE49-F238E27FC236}">
-                <a16:creationId xmlns:a16="http://schemas.microsoft.com/office/drawing/2014/main" id="{28A3FFAF-F753-AE83-007E-BCC44CA4B33D}"/>
+                <ns2:creationId id="{28A3FFAF-F753-AE83-007E-BCC44CA4B33D}"/>
               </a:ext>
             </a:extLst>
           </p:cNvPr>
@@ -28273,19 +28153,18 @@
           </a:solidFill>
           <a:ln w="25400" cap="flat" cmpd="sng" algn="ctr">
             <a:noFill/>
-            <a:prstDash val="solid"/>
           </a:ln>
           <a:effectLst/>
           <a:extLst>
             <a:ext uri="{91240B29-F687-4F45-9708-019B960494DF}">
-              <a14:hiddenLine xmlns:a14="http://schemas.microsoft.com/office/drawing/2010/main" w="25400" cap="flat" cmpd="sng" algn="ctr">
+              <ns3:hiddenLine w="25400" cap="flat" cmpd="sng" algn="ctr">
                 <a:solidFill>
                   <a:schemeClr val="accent1">
                     <a:shade val="15000"/>
                   </a:schemeClr>
                 </a:solidFill>
                 <a:prstDash val="solid"/>
-              </a14:hiddenLine>
+              </ns3:hiddenLine>
             </a:ext>
           </a:extLst>
         </p:spPr>
@@ -28319,7 +28198,7 @@
           <p:cNvPr id="4" name="codex_template_header_band">
             <a:extLst>
               <a:ext uri="{FF2B5EF4-FFF2-40B4-BE49-F238E27FC236}">
-                <a16:creationId xmlns:a16="http://schemas.microsoft.com/office/drawing/2014/main" id="{8AF5EDE5-A986-C450-592F-69021BF47AF8}"/>
+                <ns2:creationId id="{8AF5EDE5-A986-C450-592F-69021BF47AF8}"/>
               </a:ext>
             </a:extLst>
           </p:cNvPr>
@@ -28341,19 +28220,18 @@
           </a:solidFill>
           <a:ln w="25400" cap="flat" cmpd="sng" algn="ctr">
             <a:noFill/>
-            <a:prstDash val="solid"/>
           </a:ln>
           <a:effectLst/>
           <a:extLst>
             <a:ext uri="{91240B29-F687-4F45-9708-019B960494DF}">
-              <a14:hiddenLine xmlns:a14="http://schemas.microsoft.com/office/drawing/2010/main" w="25400" cap="flat" cmpd="sng" algn="ctr">
+              <ns3:hiddenLine w="25400" cap="flat" cmpd="sng" algn="ctr">
                 <a:solidFill>
                   <a:schemeClr val="accent1">
                     <a:shade val="15000"/>
                   </a:schemeClr>
                 </a:solidFill>
                 <a:prstDash val="solid"/>
-              </a14:hiddenLine>
+              </ns3:hiddenLine>
             </a:ext>
           </a:extLst>
         </p:spPr>
@@ -28387,7 +28265,7 @@
           <p:cNvPr id="3" name="codex_template_background">
             <a:extLst>
               <a:ext uri="{FF2B5EF4-FFF2-40B4-BE49-F238E27FC236}">
-                <a16:creationId xmlns:a16="http://schemas.microsoft.com/office/drawing/2014/main" id="{16A1B5B7-76F8-F9B4-E54E-8DD8E5125887}"/>
+                <ns2:creationId id="{16A1B5B7-76F8-F9B4-E54E-8DD8E5125887}"/>
               </a:ext>
             </a:extLst>
           </p:cNvPr>
@@ -28407,19 +28285,18 @@
           </a:solidFill>
           <a:ln w="25400" cap="flat" cmpd="sng" algn="ctr">
             <a:noFill/>
-            <a:prstDash val="solid"/>
           </a:ln>
           <a:effectLst/>
           <a:extLst>
             <a:ext uri="{91240B29-F687-4F45-9708-019B960494DF}">
-              <a14:hiddenLine xmlns:a14="http://schemas.microsoft.com/office/drawing/2010/main" w="25400" cap="flat" cmpd="sng" algn="ctr">
+              <ns3:hiddenLine w="25400" cap="flat" cmpd="sng" algn="ctr">
                 <a:solidFill>
                   <a:schemeClr val="accent1">
                     <a:shade val="15000"/>
                   </a:schemeClr>
                 </a:solidFill>
                 <a:prstDash val="solid"/>
-              </a14:hiddenLine>
+              </ns3:hiddenLine>
             </a:ext>
           </a:extLst>
         </p:spPr>
@@ -28469,8 +28346,6 @@
           </a:solidFill>
           <a:ln w="15875" cap="flat" cmpd="sng">
             <a:noFill/>
-            <a:prstDash val="solid"/>
-            <a:round/>
           </a:ln>
           <a:effectLst/>
         </p:spPr>
@@ -28512,7 +28387,7 @@
           <p:cNvPr id="5" name="Picture 4">
             <a:extLst>
               <a:ext uri="{FF2B5EF4-FFF2-40B4-BE49-F238E27FC236}">
-                <a16:creationId xmlns:a16="http://schemas.microsoft.com/office/drawing/2014/main" id="{516D21A3-64AC-19BD-D8A6-F6EF6907F85A}"/>
+                <ns2:creationId id="{516D21A3-64AC-19BD-D8A6-F6EF6907F85A}"/>
               </a:ext>
             </a:extLst>
           </p:cNvPr>
@@ -28536,9 +28411,7 @@
             <a:avLst/>
           </a:prstGeom>
           <a:ln w="15875">
-            <a:solidFill>
-              <a:srgbClr val="D6E8F6"/>
-            </a:solidFill>
+            <a:noFill/>
           </a:ln>
           <a:effectLst>
             <a:outerShdw blurRad="63500" dist="28398" dir="3806086" rotWithShape="0">
@@ -28554,7 +28427,7 @@
           <p:cNvPr id="8" name="AutoShape 3">
             <a:extLst>
               <a:ext uri="{FF2B5EF4-FFF2-40B4-BE49-F238E27FC236}">
-                <a16:creationId xmlns:a16="http://schemas.microsoft.com/office/drawing/2014/main" id="{1FDF8705-6977-B5A8-B505-D170F210B421}"/>
+                <ns2:creationId id="{1FDF8705-6977-B5A8-B505-D170F210B421}"/>
               </a:ext>
             </a:extLst>
           </p:cNvPr>
@@ -28571,11 +28444,7 @@
           </a:prstGeom>
           <a:noFill/>
           <a:ln w="15875" cap="flat" cmpd="sng">
-            <a:solidFill>
-              <a:srgbClr val="D6E8F6"/>
-            </a:solidFill>
-            <a:prstDash val="solid"/>
-            <a:round/>
+            <a:noFill/>
           </a:ln>
           <a:effectLst>
             <a:outerShdw blurRad="63500" dist="28398" dir="3806086" rotWithShape="0">
@@ -28710,7 +28579,7 @@
           <p:cNvPr id="7" name="codex_template_top_accent">
             <a:extLst>
               <a:ext uri="{FF2B5EF4-FFF2-40B4-BE49-F238E27FC236}">
-                <a16:creationId xmlns:a16="http://schemas.microsoft.com/office/drawing/2014/main" id="{6B47816A-C7B4-466A-287A-F3A4D407B430}"/>
+                <ns2:creationId id="{6B47816A-C7B4-466A-287A-F3A4D407B430}"/>
               </a:ext>
             </a:extLst>
           </p:cNvPr>
@@ -28730,19 +28599,18 @@
           </a:solidFill>
           <a:ln w="25400" cap="flat" cmpd="sng" algn="ctr">
             <a:noFill/>
-            <a:prstDash val="solid"/>
           </a:ln>
           <a:effectLst/>
           <a:extLst>
             <a:ext uri="{91240B29-F687-4F45-9708-019B960494DF}">
-              <a14:hiddenLine xmlns:a14="http://schemas.microsoft.com/office/drawing/2010/main" w="25400" cap="flat" cmpd="sng" algn="ctr">
+              <ns3:hiddenLine w="25400" cap="flat" cmpd="sng" algn="ctr">
                 <a:solidFill>
                   <a:schemeClr val="accent1">
                     <a:shade val="15000"/>
                   </a:schemeClr>
                 </a:solidFill>
                 <a:prstDash val="solid"/>
-              </a14:hiddenLine>
+              </ns3:hiddenLine>
             </a:ext>
           </a:extLst>
         </p:spPr>
@@ -28776,7 +28644,7 @@
           <p:cNvPr id="10" name="codex_template_footer">
             <a:extLst>
               <a:ext uri="{FF2B5EF4-FFF2-40B4-BE49-F238E27FC236}">
-                <a16:creationId xmlns:a16="http://schemas.microsoft.com/office/drawing/2014/main" id="{D6903FC7-DAC0-526E-E335-7EFCE39935B2}"/>
+                <ns2:creationId id="{D6903FC7-DAC0-526E-E335-7EFCE39935B2}"/>
               </a:ext>
             </a:extLst>
           </p:cNvPr>
@@ -28816,7 +28684,7 @@
           <p:cNvPr id="11" name="codex_template_slide_number">
             <a:extLst>
               <a:ext uri="{FF2B5EF4-FFF2-40B4-BE49-F238E27FC236}">
-                <a16:creationId xmlns:a16="http://schemas.microsoft.com/office/drawing/2014/main" id="{5A0CB67E-69DF-7927-EC8C-88E68CBA44B8}"/>
+                <ns2:creationId id="{5A0CB67E-69DF-7927-EC8C-88E68CBA44B8}"/>
               </a:ext>
             </a:extLst>
           </p:cNvPr>
@@ -28856,7 +28724,7 @@
           <p:cNvPr id="12" name="codex_template_title_rule">
             <a:extLst>
               <a:ext uri="{FF2B5EF4-FFF2-40B4-BE49-F238E27FC236}">
-                <a16:creationId xmlns:a16="http://schemas.microsoft.com/office/drawing/2014/main" id="{C2AA7974-0AF7-7E05-D4B3-4938671AB611}"/>
+                <ns2:creationId id="{C2AA7974-0AF7-7E05-D4B3-4938671AB611}"/>
               </a:ext>
             </a:extLst>
           </p:cNvPr>
@@ -28901,7 +28769,7 @@
 </file>
 
 <file path=ppt/slides/slide4.xml><?xml version="1.0" encoding="utf-8"?>
-<p:sld xmlns:a="http://schemas.openxmlformats.org/drawingml/2006/main" xmlns:r="http://schemas.openxmlformats.org/officeDocument/2006/relationships" xmlns:p="http://schemas.openxmlformats.org/presentationml/2006/main">
+<p:sld xmlns:a="http://schemas.openxmlformats.org/drawingml/2006/main" xmlns:ns2="http://schemas.microsoft.com/office/drawing/2014/main" xmlns:ns3="http://schemas.microsoft.com/office/drawing/2010/main" xmlns:ns5="http://schemas.microsoft.com/office/powerpoint/2010/main" xmlns:p="http://schemas.openxmlformats.org/presentationml/2006/main" xmlns:r="http://schemas.openxmlformats.org/officeDocument/2006/relationships">
   <p:cSld>
     <p:bg>
       <p:bgPr>
@@ -28918,7 +28786,7 @@
         <p:cNvPr id="1" name="">
           <a:extLst>
             <a:ext uri="{FF2B5EF4-FFF2-40B4-BE49-F238E27FC236}">
-              <a16:creationId xmlns:a16="http://schemas.microsoft.com/office/drawing/2014/main" id="{D70F3E62-A581-20EA-E3E5-12D203413A96}"/>
+              <ns2:creationId id="{D70F3E62-A581-20EA-E3E5-12D203413A96}"/>
             </a:ext>
           </a:extLst>
         </p:cNvPr>
@@ -28938,7 +28806,7 @@
           <p:cNvPr id="7" name="codex_template_right_wash">
             <a:extLst>
               <a:ext uri="{FF2B5EF4-FFF2-40B4-BE49-F238E27FC236}">
-                <a16:creationId xmlns:a16="http://schemas.microsoft.com/office/drawing/2014/main" id="{E0C8B624-7775-3261-390E-321F6D5FBFF2}"/>
+                <ns2:creationId id="{E0C8B624-7775-3261-390E-321F6D5FBFF2}"/>
               </a:ext>
             </a:extLst>
           </p:cNvPr>
@@ -28960,19 +28828,18 @@
           </a:solidFill>
           <a:ln w="25400" cap="flat" cmpd="sng" algn="ctr">
             <a:noFill/>
-            <a:prstDash val="solid"/>
           </a:ln>
           <a:effectLst/>
           <a:extLst>
             <a:ext uri="{91240B29-F687-4F45-9708-019B960494DF}">
-              <a14:hiddenLine xmlns:a14="http://schemas.microsoft.com/office/drawing/2010/main" w="25400" cap="flat" cmpd="sng" algn="ctr">
+              <ns3:hiddenLine w="25400" cap="flat" cmpd="sng" algn="ctr">
                 <a:solidFill>
                   <a:schemeClr val="accent1">
                     <a:shade val="15000"/>
                   </a:schemeClr>
                 </a:solidFill>
                 <a:prstDash val="solid"/>
-              </a14:hiddenLine>
+              </ns3:hiddenLine>
             </a:ext>
           </a:extLst>
         </p:spPr>
@@ -29006,7 +28873,7 @@
           <p:cNvPr id="4" name="codex_template_header_band">
             <a:extLst>
               <a:ext uri="{FF2B5EF4-FFF2-40B4-BE49-F238E27FC236}">
-                <a16:creationId xmlns:a16="http://schemas.microsoft.com/office/drawing/2014/main" id="{D7083C5C-E8BE-3012-9D0C-68C925E7AFF9}"/>
+                <ns2:creationId id="{D7083C5C-E8BE-3012-9D0C-68C925E7AFF9}"/>
               </a:ext>
             </a:extLst>
           </p:cNvPr>
@@ -29028,19 +28895,18 @@
           </a:solidFill>
           <a:ln w="25400" cap="flat" cmpd="sng" algn="ctr">
             <a:noFill/>
-            <a:prstDash val="solid"/>
           </a:ln>
           <a:effectLst/>
           <a:extLst>
             <a:ext uri="{91240B29-F687-4F45-9708-019B960494DF}">
-              <a14:hiddenLine xmlns:a14="http://schemas.microsoft.com/office/drawing/2010/main" w="25400" cap="flat" cmpd="sng" algn="ctr">
+              <ns3:hiddenLine w="25400" cap="flat" cmpd="sng" algn="ctr">
                 <a:solidFill>
                   <a:schemeClr val="accent1">
                     <a:shade val="15000"/>
                   </a:schemeClr>
                 </a:solidFill>
                 <a:prstDash val="solid"/>
-              </a14:hiddenLine>
+              </ns3:hiddenLine>
             </a:ext>
           </a:extLst>
         </p:spPr>
@@ -29074,7 +28940,7 @@
           <p:cNvPr id="3" name="codex_template_background">
             <a:extLst>
               <a:ext uri="{FF2B5EF4-FFF2-40B4-BE49-F238E27FC236}">
-                <a16:creationId xmlns:a16="http://schemas.microsoft.com/office/drawing/2014/main" id="{3E490B9D-334A-7363-E06B-31C6AC4AF8D4}"/>
+                <ns2:creationId id="{3E490B9D-334A-7363-E06B-31C6AC4AF8D4}"/>
               </a:ext>
             </a:extLst>
           </p:cNvPr>
@@ -29094,19 +28960,18 @@
           </a:solidFill>
           <a:ln w="25400" cap="flat" cmpd="sng" algn="ctr">
             <a:noFill/>
-            <a:prstDash val="solid"/>
           </a:ln>
           <a:effectLst/>
           <a:extLst>
             <a:ext uri="{91240B29-F687-4F45-9708-019B960494DF}">
-              <a14:hiddenLine xmlns:a14="http://schemas.microsoft.com/office/drawing/2010/main" w="25400" cap="flat" cmpd="sng" algn="ctr">
+              <ns3:hiddenLine w="25400" cap="flat" cmpd="sng" algn="ctr">
                 <a:solidFill>
                   <a:schemeClr val="accent1">
                     <a:shade val="15000"/>
                   </a:schemeClr>
                 </a:solidFill>
                 <a:prstDash val="solid"/>
-              </a14:hiddenLine>
+              </ns3:hiddenLine>
             </a:ext>
           </a:extLst>
         </p:spPr>
@@ -29140,7 +29005,7 @@
           <p:cNvPr id="2" name="AutoShape 2">
             <a:extLst>
               <a:ext uri="{FF2B5EF4-FFF2-40B4-BE49-F238E27FC236}">
-                <a16:creationId xmlns:a16="http://schemas.microsoft.com/office/drawing/2014/main" id="{D76E8053-46C1-1FDC-38F1-DF6182D09ACF}"/>
+                <ns2:creationId id="{D76E8053-46C1-1FDC-38F1-DF6182D09ACF}"/>
               </a:ext>
             </a:extLst>
           </p:cNvPr>
@@ -29162,8 +29027,6 @@
           </a:solidFill>
           <a:ln w="15875" cap="flat" cmpd="sng">
             <a:noFill/>
-            <a:prstDash val="solid"/>
-            <a:round/>
           </a:ln>
           <a:effectLst/>
         </p:spPr>
@@ -29205,7 +29068,7 @@
           <p:cNvPr id="6" name="AutoShape 3">
             <a:extLst>
               <a:ext uri="{FF2B5EF4-FFF2-40B4-BE49-F238E27FC236}">
-                <a16:creationId xmlns:a16="http://schemas.microsoft.com/office/drawing/2014/main" id="{7BABED48-DAEB-0456-ACC0-3BE5D0592CDC}"/>
+                <ns2:creationId id="{7BABED48-DAEB-0456-ACC0-3BE5D0592CDC}"/>
               </a:ext>
             </a:extLst>
           </p:cNvPr>
@@ -29222,11 +29085,7 @@
           </a:prstGeom>
           <a:noFill/>
           <a:ln w="15875" cap="flat" cmpd="sng">
-            <a:solidFill>
-              <a:srgbClr val="D6E8F6"/>
-            </a:solidFill>
-            <a:prstDash val="solid"/>
-            <a:round/>
+            <a:noFill/>
           </a:ln>
           <a:effectLst>
             <a:outerShdw blurRad="63500" dist="28398" dir="3806086" rotWithShape="0">
@@ -29302,7 +29161,7 @@
           <p:cNvPr id="8" name="codex_template_top_accent">
             <a:extLst>
               <a:ext uri="{FF2B5EF4-FFF2-40B4-BE49-F238E27FC236}">
-                <a16:creationId xmlns:a16="http://schemas.microsoft.com/office/drawing/2014/main" id="{62DE8D3C-0D23-1D0B-7910-7E9B8134C964}"/>
+                <ns2:creationId id="{62DE8D3C-0D23-1D0B-7910-7E9B8134C964}"/>
               </a:ext>
             </a:extLst>
           </p:cNvPr>
@@ -29322,19 +29181,18 @@
           </a:solidFill>
           <a:ln w="25400" cap="flat" cmpd="sng" algn="ctr">
             <a:noFill/>
-            <a:prstDash val="solid"/>
           </a:ln>
           <a:effectLst/>
           <a:extLst>
             <a:ext uri="{91240B29-F687-4F45-9708-019B960494DF}">
-              <a14:hiddenLine xmlns:a14="http://schemas.microsoft.com/office/drawing/2010/main" w="25400" cap="flat" cmpd="sng" algn="ctr">
+              <ns3:hiddenLine w="25400" cap="flat" cmpd="sng" algn="ctr">
                 <a:solidFill>
                   <a:schemeClr val="accent1">
                     <a:shade val="15000"/>
                   </a:schemeClr>
                 </a:solidFill>
                 <a:prstDash val="solid"/>
-              </a14:hiddenLine>
+              </ns3:hiddenLine>
             </a:ext>
           </a:extLst>
         </p:spPr>
@@ -29368,7 +29226,7 @@
           <p:cNvPr id="10" name="codex_template_footer">
             <a:extLst>
               <a:ext uri="{FF2B5EF4-FFF2-40B4-BE49-F238E27FC236}">
-                <a16:creationId xmlns:a16="http://schemas.microsoft.com/office/drawing/2014/main" id="{FF30A71E-E544-D5B5-8E1A-E7308E817266}"/>
+                <ns2:creationId id="{FF30A71E-E544-D5B5-8E1A-E7308E817266}"/>
               </a:ext>
             </a:extLst>
           </p:cNvPr>
@@ -29408,7 +29266,7 @@
           <p:cNvPr id="11" name="codex_template_slide_number">
             <a:extLst>
               <a:ext uri="{FF2B5EF4-FFF2-40B4-BE49-F238E27FC236}">
-                <a16:creationId xmlns:a16="http://schemas.microsoft.com/office/drawing/2014/main" id="{547FD8A8-D132-5FED-EF0F-48ACF47F6C4D}"/>
+                <ns2:creationId id="{547FD8A8-D132-5FED-EF0F-48ACF47F6C4D}"/>
               </a:ext>
             </a:extLst>
           </p:cNvPr>
@@ -29448,7 +29306,7 @@
           <p:cNvPr id="12" name="codex_template_title_rule">
             <a:extLst>
               <a:ext uri="{FF2B5EF4-FFF2-40B4-BE49-F238E27FC236}">
-                <a16:creationId xmlns:a16="http://schemas.microsoft.com/office/drawing/2014/main" id="{9B46C064-CD11-163B-6BC8-0899FEEC7ED3}"/>
+                <ns2:creationId id="{9B46C064-CD11-163B-6BC8-0899FEEC7ED3}"/>
               </a:ext>
             </a:extLst>
           </p:cNvPr>
@@ -29489,7 +29347,7 @@
           <p:cNvPr id="14" name="Picture 13">
             <a:extLst>
               <a:ext uri="{FF2B5EF4-FFF2-40B4-BE49-F238E27FC236}">
-                <a16:creationId xmlns:a16="http://schemas.microsoft.com/office/drawing/2014/main" id="{3468C420-5AEF-EA40-C7DF-4B789DA1B50B}"/>
+                <ns2:creationId id="{3468C420-5AEF-EA40-C7DF-4B789DA1B50B}"/>
               </a:ext>
             </a:extLst>
           </p:cNvPr>
@@ -29517,7 +29375,7 @@
     </p:spTree>
     <p:extLst>
       <p:ext uri="{BB962C8B-B14F-4D97-AF65-F5344CB8AC3E}">
-        <p14:creationId xmlns:p14="http://schemas.microsoft.com/office/powerpoint/2010/main" val="3699613715"/>
+        <ns5:creationId val="3699613715"/>
       </p:ext>
     </p:extLst>
   </p:cSld>
@@ -29528,7 +29386,7 @@
 </file>
 
 <file path=ppt/slides/slide5.xml><?xml version="1.0" encoding="utf-8"?>
-<p:sld xmlns:a="http://schemas.openxmlformats.org/drawingml/2006/main" xmlns:r="http://schemas.openxmlformats.org/officeDocument/2006/relationships" xmlns:p="http://schemas.openxmlformats.org/presentationml/2006/main">
+<p:sld xmlns:a="http://schemas.openxmlformats.org/drawingml/2006/main" xmlns:ns2="http://schemas.microsoft.com/office/drawing/2014/main" xmlns:ns3="http://schemas.microsoft.com/office/drawing/2010/main" xmlns:ns5="http://schemas.microsoft.com/office/powerpoint/2010/main" xmlns:p="http://schemas.openxmlformats.org/presentationml/2006/main" xmlns:r="http://schemas.openxmlformats.org/officeDocument/2006/relationships">
   <p:cSld>
     <p:bg>
       <p:bgPr>
@@ -29545,7 +29403,7 @@
         <p:cNvPr id="1" name="">
           <a:extLst>
             <a:ext uri="{FF2B5EF4-FFF2-40B4-BE49-F238E27FC236}">
-              <a16:creationId xmlns:a16="http://schemas.microsoft.com/office/drawing/2014/main" id="{6C6AE876-F04E-E1B3-B9D0-9D644B5C8AE3}"/>
+              <ns2:creationId id="{6C6AE876-F04E-E1B3-B9D0-9D644B5C8AE3}"/>
             </a:ext>
           </a:extLst>
         </p:cNvPr>
@@ -29565,7 +29423,7 @@
           <p:cNvPr id="5" name="codex_template_right_wash">
             <a:extLst>
               <a:ext uri="{FF2B5EF4-FFF2-40B4-BE49-F238E27FC236}">
-                <a16:creationId xmlns:a16="http://schemas.microsoft.com/office/drawing/2014/main" id="{84E27C99-E891-CE46-BD6A-17A133FD9213}"/>
+                <ns2:creationId id="{84E27C99-E891-CE46-BD6A-17A133FD9213}"/>
               </a:ext>
             </a:extLst>
           </p:cNvPr>
@@ -29587,19 +29445,18 @@
           </a:solidFill>
           <a:ln w="25400" cap="flat" cmpd="sng" algn="ctr">
             <a:noFill/>
-            <a:prstDash val="solid"/>
           </a:ln>
           <a:effectLst/>
           <a:extLst>
             <a:ext uri="{91240B29-F687-4F45-9708-019B960494DF}">
-              <a14:hiddenLine xmlns:a14="http://schemas.microsoft.com/office/drawing/2010/main" w="25400" cap="flat" cmpd="sng" algn="ctr">
+              <ns3:hiddenLine w="25400" cap="flat" cmpd="sng" algn="ctr">
                 <a:solidFill>
                   <a:schemeClr val="accent1">
                     <a:shade val="15000"/>
                   </a:schemeClr>
                 </a:solidFill>
                 <a:prstDash val="solid"/>
-              </a14:hiddenLine>
+              </ns3:hiddenLine>
             </a:ext>
           </a:extLst>
         </p:spPr>
@@ -29633,7 +29490,7 @@
           <p:cNvPr id="4" name="codex_template_header_band">
             <a:extLst>
               <a:ext uri="{FF2B5EF4-FFF2-40B4-BE49-F238E27FC236}">
-                <a16:creationId xmlns:a16="http://schemas.microsoft.com/office/drawing/2014/main" id="{6A95F72E-F50C-471D-10EA-D3364B19B473}"/>
+                <ns2:creationId id="{6A95F72E-F50C-471D-10EA-D3364B19B473}"/>
               </a:ext>
             </a:extLst>
           </p:cNvPr>
@@ -29655,19 +29512,18 @@
           </a:solidFill>
           <a:ln w="25400" cap="flat" cmpd="sng" algn="ctr">
             <a:noFill/>
-            <a:prstDash val="solid"/>
           </a:ln>
           <a:effectLst/>
           <a:extLst>
             <a:ext uri="{91240B29-F687-4F45-9708-019B960494DF}">
-              <a14:hiddenLine xmlns:a14="http://schemas.microsoft.com/office/drawing/2010/main" w="25400" cap="flat" cmpd="sng" algn="ctr">
+              <ns3:hiddenLine w="25400" cap="flat" cmpd="sng" algn="ctr">
                 <a:solidFill>
                   <a:schemeClr val="accent1">
                     <a:shade val="15000"/>
                   </a:schemeClr>
                 </a:solidFill>
                 <a:prstDash val="solid"/>
-              </a14:hiddenLine>
+              </ns3:hiddenLine>
             </a:ext>
           </a:extLst>
         </p:spPr>
@@ -29701,7 +29557,7 @@
           <p:cNvPr id="3" name="codex_template_background">
             <a:extLst>
               <a:ext uri="{FF2B5EF4-FFF2-40B4-BE49-F238E27FC236}">
-                <a16:creationId xmlns:a16="http://schemas.microsoft.com/office/drawing/2014/main" id="{B44660F2-6476-BC34-3CCC-EDF3792564DD}"/>
+                <ns2:creationId id="{B44660F2-6476-BC34-3CCC-EDF3792564DD}"/>
               </a:ext>
             </a:extLst>
           </p:cNvPr>
@@ -29721,19 +29577,18 @@
           </a:solidFill>
           <a:ln w="25400" cap="flat" cmpd="sng" algn="ctr">
             <a:noFill/>
-            <a:prstDash val="solid"/>
           </a:ln>
           <a:effectLst/>
           <a:extLst>
             <a:ext uri="{91240B29-F687-4F45-9708-019B960494DF}">
-              <a14:hiddenLine xmlns:a14="http://schemas.microsoft.com/office/drawing/2010/main" w="25400" cap="flat" cmpd="sng" algn="ctr">
+              <ns3:hiddenLine w="25400" cap="flat" cmpd="sng" algn="ctr">
                 <a:solidFill>
                   <a:schemeClr val="accent1">
                     <a:shade val="15000"/>
                   </a:schemeClr>
                 </a:solidFill>
                 <a:prstDash val="solid"/>
-              </a14:hiddenLine>
+              </ns3:hiddenLine>
             </a:ext>
           </a:extLst>
         </p:spPr>
@@ -29767,7 +29622,7 @@
           <p:cNvPr id="2" name="AutoShape 2">
             <a:extLst>
               <a:ext uri="{FF2B5EF4-FFF2-40B4-BE49-F238E27FC236}">
-                <a16:creationId xmlns:a16="http://schemas.microsoft.com/office/drawing/2014/main" id="{B79E406D-5E37-D4E3-C1BA-654DD26B6175}"/>
+                <ns2:creationId id="{B79E406D-5E37-D4E3-C1BA-654DD26B6175}"/>
               </a:ext>
             </a:extLst>
           </p:cNvPr>
@@ -29789,8 +29644,6 @@
           </a:solidFill>
           <a:ln w="15875" cap="flat" cmpd="sng">
             <a:noFill/>
-            <a:prstDash val="solid"/>
-            <a:round/>
           </a:ln>
           <a:effectLst/>
         </p:spPr>
@@ -29832,7 +29685,7 @@
           <p:cNvPr id="6" name="Picture 5">
             <a:extLst>
               <a:ext uri="{FF2B5EF4-FFF2-40B4-BE49-F238E27FC236}">
-                <a16:creationId xmlns:a16="http://schemas.microsoft.com/office/drawing/2014/main" id="{D3FFCFC4-EC35-CAD2-6C4B-E9FD3AFB116C}"/>
+                <ns2:creationId id="{D3FFCFC4-EC35-CAD2-6C4B-E9FD3AFB116C}"/>
               </a:ext>
             </a:extLst>
           </p:cNvPr>
@@ -29856,9 +29709,7 @@
             <a:avLst/>
           </a:prstGeom>
           <a:ln w="15875">
-            <a:solidFill>
-              <a:srgbClr val="D6E8F6"/>
-            </a:solidFill>
+            <a:noFill/>
           </a:ln>
           <a:effectLst>
             <a:outerShdw blurRad="63500" dist="28398" dir="3806086" rotWithShape="0">
@@ -29874,7 +29725,7 @@
           <p:cNvPr id="7" name="codex_template_top_accent">
             <a:extLst>
               <a:ext uri="{FF2B5EF4-FFF2-40B4-BE49-F238E27FC236}">
-                <a16:creationId xmlns:a16="http://schemas.microsoft.com/office/drawing/2014/main" id="{11468EC5-7B03-728C-D480-4C65770530DF}"/>
+                <ns2:creationId id="{11468EC5-7B03-728C-D480-4C65770530DF}"/>
               </a:ext>
             </a:extLst>
           </p:cNvPr>
@@ -29894,19 +29745,18 @@
           </a:solidFill>
           <a:ln w="25400" cap="flat" cmpd="sng" algn="ctr">
             <a:noFill/>
-            <a:prstDash val="solid"/>
           </a:ln>
           <a:effectLst/>
           <a:extLst>
             <a:ext uri="{91240B29-F687-4F45-9708-019B960494DF}">
-              <a14:hiddenLine xmlns:a14="http://schemas.microsoft.com/office/drawing/2010/main" w="25400" cap="flat" cmpd="sng" algn="ctr">
+              <ns3:hiddenLine w="25400" cap="flat" cmpd="sng" algn="ctr">
                 <a:solidFill>
                   <a:schemeClr val="accent1">
                     <a:shade val="15000"/>
                   </a:schemeClr>
                 </a:solidFill>
                 <a:prstDash val="solid"/>
-              </a14:hiddenLine>
+              </ns3:hiddenLine>
             </a:ext>
           </a:extLst>
         </p:spPr>
@@ -29940,7 +29790,7 @@
           <p:cNvPr id="9" name="codex_template_footer">
             <a:extLst>
               <a:ext uri="{FF2B5EF4-FFF2-40B4-BE49-F238E27FC236}">
-                <a16:creationId xmlns:a16="http://schemas.microsoft.com/office/drawing/2014/main" id="{240539CD-68F0-9586-2040-61049CAEAD73}"/>
+                <ns2:creationId id="{240539CD-68F0-9586-2040-61049CAEAD73}"/>
               </a:ext>
             </a:extLst>
           </p:cNvPr>
@@ -29980,7 +29830,7 @@
           <p:cNvPr id="10" name="codex_template_slide_number">
             <a:extLst>
               <a:ext uri="{FF2B5EF4-FFF2-40B4-BE49-F238E27FC236}">
-                <a16:creationId xmlns:a16="http://schemas.microsoft.com/office/drawing/2014/main" id="{7DBD281F-8F0F-DDD6-FAC1-26CE67CF2CE8}"/>
+                <ns2:creationId id="{7DBD281F-8F0F-DDD6-FAC1-26CE67CF2CE8}"/>
               </a:ext>
             </a:extLst>
           </p:cNvPr>
@@ -30020,7 +29870,7 @@
           <p:cNvPr id="11" name="codex_template_title_rule">
             <a:extLst>
               <a:ext uri="{FF2B5EF4-FFF2-40B4-BE49-F238E27FC236}">
-                <a16:creationId xmlns:a16="http://schemas.microsoft.com/office/drawing/2014/main" id="{CE115411-2256-8C0F-12F8-9CF0AB00845A}"/>
+                <ns2:creationId id="{CE115411-2256-8C0F-12F8-9CF0AB00845A}"/>
               </a:ext>
             </a:extLst>
           </p:cNvPr>
@@ -30061,7 +29911,7 @@
           <p:cNvPr id="12" name="AutoShape 3">
             <a:extLst>
               <a:ext uri="{FF2B5EF4-FFF2-40B4-BE49-F238E27FC236}">
-                <a16:creationId xmlns:a16="http://schemas.microsoft.com/office/drawing/2014/main" id="{79254302-A816-57FF-D4A2-874440E1D8CC}"/>
+                <ns2:creationId id="{79254302-A816-57FF-D4A2-874440E1D8CC}"/>
               </a:ext>
             </a:extLst>
           </p:cNvPr>
@@ -30078,11 +29928,7 @@
           </a:prstGeom>
           <a:noFill/>
           <a:ln w="15875" cap="flat" cmpd="sng">
-            <a:solidFill>
-              <a:srgbClr val="D6E8F6"/>
-            </a:solidFill>
-            <a:prstDash val="solid"/>
-            <a:round/>
+            <a:noFill/>
           </a:ln>
           <a:effectLst>
             <a:outerShdw blurRad="63500" dist="28398" dir="3806086" rotWithShape="0">
@@ -30191,7 +30037,7 @@
     </p:spTree>
     <p:extLst>
       <p:ext uri="{BB962C8B-B14F-4D97-AF65-F5344CB8AC3E}">
-        <p14:creationId xmlns:p14="http://schemas.microsoft.com/office/powerpoint/2010/main" val="1117809852"/>
+        <ns5:creationId val="1117809852"/>
       </p:ext>
     </p:extLst>
   </p:cSld>
@@ -30202,7 +30048,7 @@
 </file>
 
 <file path=ppt/slides/slide6.xml><?xml version="1.0" encoding="utf-8"?>
-<p:sld xmlns:a="http://schemas.openxmlformats.org/drawingml/2006/main" xmlns:r="http://schemas.openxmlformats.org/officeDocument/2006/relationships" xmlns:p="http://schemas.openxmlformats.org/presentationml/2006/main">
+<p:sld xmlns:a="http://schemas.openxmlformats.org/drawingml/2006/main" xmlns:ns2="http://schemas.microsoft.com/office/drawing/2014/main" xmlns:ns3="http://schemas.microsoft.com/office/drawing/2010/main" xmlns:ns4="http://schemas.microsoft.com/office/powerpoint/2010/main" xmlns:p="http://schemas.openxmlformats.org/presentationml/2006/main">
   <p:cSld>
     <p:spTree>
       <p:nvGrpSpPr>
@@ -30223,7 +30069,7 @@
           <p:cNvPr id="29" name="codex_template_right_wash">
             <a:extLst>
               <a:ext uri="{FF2B5EF4-FFF2-40B4-BE49-F238E27FC236}">
-                <a16:creationId xmlns:a16="http://schemas.microsoft.com/office/drawing/2014/main" id="{938D850B-BBCB-4507-02DF-08DF3EA567A9}"/>
+                <ns2:creationId id="{938D850B-BBCB-4507-02DF-08DF3EA567A9}"/>
               </a:ext>
             </a:extLst>
           </p:cNvPr>
@@ -30245,19 +30091,18 @@
           </a:solidFill>
           <a:ln w="25400" cap="flat" cmpd="sng" algn="ctr">
             <a:noFill/>
-            <a:prstDash val="solid"/>
           </a:ln>
           <a:effectLst/>
           <a:extLst>
             <a:ext uri="{91240B29-F687-4F45-9708-019B960494DF}">
-              <a14:hiddenLine xmlns:a14="http://schemas.microsoft.com/office/drawing/2010/main" w="25400" cap="flat" cmpd="sng" algn="ctr">
+              <ns3:hiddenLine w="25400" cap="flat" cmpd="sng" algn="ctr">
                 <a:solidFill>
                   <a:schemeClr val="accent1">
                     <a:shade val="15000"/>
                   </a:schemeClr>
                 </a:solidFill>
                 <a:prstDash val="solid"/>
-              </a14:hiddenLine>
+              </ns3:hiddenLine>
             </a:ext>
           </a:extLst>
         </p:spPr>
@@ -30291,7 +30136,7 @@
           <p:cNvPr id="13" name="codex_template_header_band">
             <a:extLst>
               <a:ext uri="{FF2B5EF4-FFF2-40B4-BE49-F238E27FC236}">
-                <a16:creationId xmlns:a16="http://schemas.microsoft.com/office/drawing/2014/main" id="{A2EA9034-7171-6AC2-CEBA-6648F7945534}"/>
+                <ns2:creationId id="{A2EA9034-7171-6AC2-CEBA-6648F7945534}"/>
               </a:ext>
             </a:extLst>
           </p:cNvPr>
@@ -30313,19 +30158,18 @@
           </a:solidFill>
           <a:ln w="25400" cap="flat" cmpd="sng" algn="ctr">
             <a:noFill/>
-            <a:prstDash val="solid"/>
           </a:ln>
           <a:effectLst/>
           <a:extLst>
             <a:ext uri="{91240B29-F687-4F45-9708-019B960494DF}">
-              <a14:hiddenLine xmlns:a14="http://schemas.microsoft.com/office/drawing/2010/main" w="25400" cap="flat" cmpd="sng" algn="ctr">
+              <ns3:hiddenLine w="25400" cap="flat" cmpd="sng" algn="ctr">
                 <a:solidFill>
                   <a:schemeClr val="accent1">
                     <a:shade val="15000"/>
                   </a:schemeClr>
                 </a:solidFill>
                 <a:prstDash val="solid"/>
-              </a14:hiddenLine>
+              </ns3:hiddenLine>
             </a:ext>
           </a:extLst>
         </p:spPr>
@@ -30359,7 +30203,7 @@
           <p:cNvPr id="10" name="codex_template_background">
             <a:extLst>
               <a:ext uri="{FF2B5EF4-FFF2-40B4-BE49-F238E27FC236}">
-                <a16:creationId xmlns:a16="http://schemas.microsoft.com/office/drawing/2014/main" id="{445B3358-FE74-499A-8EAC-E4574DF067BE}"/>
+                <ns2:creationId id="{445B3358-FE74-499A-8EAC-E4574DF067BE}"/>
               </a:ext>
             </a:extLst>
           </p:cNvPr>
@@ -30379,19 +30223,18 @@
           </a:solidFill>
           <a:ln w="25400" cap="flat" cmpd="sng" algn="ctr">
             <a:noFill/>
-            <a:prstDash val="solid"/>
           </a:ln>
           <a:effectLst/>
           <a:extLst>
             <a:ext uri="{91240B29-F687-4F45-9708-019B960494DF}">
-              <a14:hiddenLine xmlns:a14="http://schemas.microsoft.com/office/drawing/2010/main" w="25400" cap="flat" cmpd="sng" algn="ctr">
+              <ns3:hiddenLine w="25400" cap="flat" cmpd="sng" algn="ctr">
                 <a:solidFill>
                   <a:schemeClr val="accent1">
                     <a:shade val="15000"/>
                   </a:schemeClr>
                 </a:solidFill>
                 <a:prstDash val="solid"/>
-              </a14:hiddenLine>
+              </ns3:hiddenLine>
             </a:ext>
           </a:extLst>
         </p:spPr>
@@ -30425,7 +30268,7 @@
           <p:cNvPr id="11" name="TextBox 10">
             <a:extLst>
               <a:ext uri="{FF2B5EF4-FFF2-40B4-BE49-F238E27FC236}">
-                <a16:creationId xmlns:a16="http://schemas.microsoft.com/office/drawing/2014/main" id="{26D8D296-3529-F8C2-F77A-99AF9FF22BC7}"/>
+                <ns2:creationId id="{26D8D296-3529-F8C2-F77A-99AF9FF22BC7}"/>
               </a:ext>
             </a:extLst>
           </p:cNvPr>
@@ -30473,7 +30316,7 @@
           <p:cNvPr id="14" name="Rectangle: Rounded Corners 13">
             <a:extLst>
               <a:ext uri="{FF2B5EF4-FFF2-40B4-BE49-F238E27FC236}">
-                <a16:creationId xmlns:a16="http://schemas.microsoft.com/office/drawing/2014/main" id="{4CCF5B9A-2BF4-4142-9A41-618E6840680D}"/>
+                <ns2:creationId id="{4CCF5B9A-2BF4-4142-9A41-618E6840680D}"/>
               </a:ext>
             </a:extLst>
           </p:cNvPr>
@@ -30504,12 +30347,12 @@
           </a:effectLst>
           <a:extLst>
             <a:ext uri="{91240B29-F687-4F45-9708-019B960494DF}">
-              <a14:hiddenLine xmlns:a14="http://schemas.microsoft.com/office/drawing/2010/main" w="15875" cap="flat" cmpd="sng" algn="ctr">
+              <ns3:hiddenLine w="15875" cap="flat" cmpd="sng" algn="ctr">
                 <a:solidFill>
                   <a:srgbClr val="0076D2"/>
                 </a:solidFill>
                 <a:prstDash val="solid"/>
-              </a14:hiddenLine>
+              </ns3:hiddenLine>
             </a:ext>
           </a:extLst>
         </p:spPr>
@@ -30577,7 +30420,7 @@
           <p:cNvPr id="15" name="Rectangle: Rounded Corners 14">
             <a:extLst>
               <a:ext uri="{FF2B5EF4-FFF2-40B4-BE49-F238E27FC236}">
-                <a16:creationId xmlns:a16="http://schemas.microsoft.com/office/drawing/2014/main" id="{D3F54D78-350F-B0FB-734B-05C35FB156DF}"/>
+                <ns2:creationId id="{D3F54D78-350F-B0FB-734B-05C35FB156DF}"/>
               </a:ext>
             </a:extLst>
           </p:cNvPr>
@@ -30608,12 +30451,12 @@
           </a:effectLst>
           <a:extLst>
             <a:ext uri="{91240B29-F687-4F45-9708-019B960494DF}">
-              <a14:hiddenLine xmlns:a14="http://schemas.microsoft.com/office/drawing/2010/main" w="15875" cap="flat" cmpd="sng" algn="ctr">
+              <ns3:hiddenLine w="15875" cap="flat" cmpd="sng" algn="ctr">
                 <a:solidFill>
                   <a:srgbClr val="EE9726"/>
                 </a:solidFill>
                 <a:prstDash val="solid"/>
-              </a14:hiddenLine>
+              </ns3:hiddenLine>
             </a:ext>
           </a:extLst>
         </p:spPr>
@@ -30687,7 +30530,7 @@
           <p:cNvPr id="16" name="Rectangle: Rounded Corners 15">
             <a:extLst>
               <a:ext uri="{FF2B5EF4-FFF2-40B4-BE49-F238E27FC236}">
-                <a16:creationId xmlns:a16="http://schemas.microsoft.com/office/drawing/2014/main" id="{339A2ACB-9B13-10C8-76B1-8387CDE9001B}"/>
+                <ns2:creationId id="{339A2ACB-9B13-10C8-76B1-8387CDE9001B}"/>
               </a:ext>
             </a:extLst>
           </p:cNvPr>
@@ -30718,12 +30561,12 @@
           </a:effectLst>
           <a:extLst>
             <a:ext uri="{91240B29-F687-4F45-9708-019B960494DF}">
-              <a14:hiddenLine xmlns:a14="http://schemas.microsoft.com/office/drawing/2010/main" w="15875" cap="flat" cmpd="sng" algn="ctr">
+              <ns3:hiddenLine w="15875" cap="flat" cmpd="sng" algn="ctr">
                 <a:solidFill>
                   <a:srgbClr val="009988"/>
                 </a:solidFill>
                 <a:prstDash val="solid"/>
-              </a14:hiddenLine>
+              </ns3:hiddenLine>
             </a:ext>
           </a:extLst>
         </p:spPr>
@@ -30791,7 +30634,7 @@
           <p:cNvPr id="17" name="Rectangle: Rounded Corners 16">
             <a:extLst>
               <a:ext uri="{FF2B5EF4-FFF2-40B4-BE49-F238E27FC236}">
-                <a16:creationId xmlns:a16="http://schemas.microsoft.com/office/drawing/2014/main" id="{29FC7821-9640-8593-F2FE-40E6D942797C}"/>
+                <ns2:creationId id="{29FC7821-9640-8593-F2FE-40E6D942797C}"/>
               </a:ext>
             </a:extLst>
           </p:cNvPr>
@@ -30822,12 +30665,12 @@
           </a:effectLst>
           <a:extLst>
             <a:ext uri="{91240B29-F687-4F45-9708-019B960494DF}">
-              <a14:hiddenLine xmlns:a14="http://schemas.microsoft.com/office/drawing/2010/main" w="15875" cap="flat" cmpd="sng" algn="ctr">
+              <ns3:hiddenLine w="15875" cap="flat" cmpd="sng" algn="ctr">
                 <a:solidFill>
                   <a:srgbClr val="705EC6"/>
                 </a:solidFill>
                 <a:prstDash val="solid"/>
-              </a14:hiddenLine>
+              </ns3:hiddenLine>
             </a:ext>
           </a:extLst>
         </p:spPr>
@@ -30901,7 +30744,7 @@
           <p:cNvPr id="18" name="Rectangle: Rounded Corners 17">
             <a:extLst>
               <a:ext uri="{FF2B5EF4-FFF2-40B4-BE49-F238E27FC236}">
-                <a16:creationId xmlns:a16="http://schemas.microsoft.com/office/drawing/2014/main" id="{0114FF1E-55B6-4BAE-B774-B0594B5B7D33}"/>
+                <ns2:creationId id="{0114FF1E-55B6-4BAE-B774-B0594B5B7D33}"/>
               </a:ext>
             </a:extLst>
           </p:cNvPr>
@@ -30932,12 +30775,12 @@
           </a:effectLst>
           <a:extLst>
             <a:ext uri="{91240B29-F687-4F45-9708-019B960494DF}">
-              <a14:hiddenLine xmlns:a14="http://schemas.microsoft.com/office/drawing/2010/main" w="15875" cap="flat" cmpd="sng" algn="ctr">
+              <ns3:hiddenLine w="15875" cap="flat" cmpd="sng" algn="ctr">
                 <a:solidFill>
                   <a:srgbClr val="5B6E86"/>
                 </a:solidFill>
                 <a:prstDash val="solid"/>
-              </a14:hiddenLine>
+              </ns3:hiddenLine>
             </a:ext>
           </a:extLst>
         </p:spPr>
@@ -31005,7 +30848,7 @@
           <p:cNvPr id="19" name="Rectangle: Rounded Corners 18">
             <a:extLst>
               <a:ext uri="{FF2B5EF4-FFF2-40B4-BE49-F238E27FC236}">
-                <a16:creationId xmlns:a16="http://schemas.microsoft.com/office/drawing/2014/main" id="{1BB3F8C7-E085-86E2-3284-72D6431A46FC}"/>
+                <ns2:creationId id="{1BB3F8C7-E085-86E2-3284-72D6431A46FC}"/>
               </a:ext>
             </a:extLst>
           </p:cNvPr>
@@ -31036,12 +30879,12 @@
           </a:effectLst>
           <a:extLst>
             <a:ext uri="{91240B29-F687-4F45-9708-019B960494DF}">
-              <a14:hiddenLine xmlns:a14="http://schemas.microsoft.com/office/drawing/2010/main" w="15875" cap="flat" cmpd="sng" algn="ctr">
+              <ns3:hiddenLine w="15875" cap="flat" cmpd="sng" algn="ctr">
                 <a:solidFill>
                   <a:srgbClr val="D54F4F"/>
                 </a:solidFill>
                 <a:prstDash val="solid"/>
-              </a14:hiddenLine>
+              </ns3:hiddenLine>
             </a:ext>
           </a:extLst>
         </p:spPr>
@@ -31109,7 +30952,7 @@
           <p:cNvPr id="20" name="Straight Connector 19">
             <a:extLst>
               <a:ext uri="{FF2B5EF4-FFF2-40B4-BE49-F238E27FC236}">
-                <a16:creationId xmlns:a16="http://schemas.microsoft.com/office/drawing/2014/main" id="{F00A52CB-612A-CA73-BF1E-42410CC1F23A}"/>
+                <ns2:creationId id="{F00A52CB-612A-CA73-BF1E-42410CC1F23A}"/>
               </a:ext>
             </a:extLst>
           </p:cNvPr>
@@ -31151,7 +30994,7 @@
           <p:cNvPr id="21" name="Straight Connector 20">
             <a:extLst>
               <a:ext uri="{FF2B5EF4-FFF2-40B4-BE49-F238E27FC236}">
-                <a16:creationId xmlns:a16="http://schemas.microsoft.com/office/drawing/2014/main" id="{EE2D3916-4F1E-BECE-6119-DDF9FD8DD50C}"/>
+                <ns2:creationId id="{EE2D3916-4F1E-BECE-6119-DDF9FD8DD50C}"/>
               </a:ext>
             </a:extLst>
           </p:cNvPr>
@@ -31193,7 +31036,7 @@
           <p:cNvPr id="22" name="Straight Connector 21">
             <a:extLst>
               <a:ext uri="{FF2B5EF4-FFF2-40B4-BE49-F238E27FC236}">
-                <a16:creationId xmlns:a16="http://schemas.microsoft.com/office/drawing/2014/main" id="{7964E2EF-98A7-5AAD-A919-8AE9DB0DD95E}"/>
+                <ns2:creationId id="{7964E2EF-98A7-5AAD-A919-8AE9DB0DD95E}"/>
               </a:ext>
             </a:extLst>
           </p:cNvPr>
@@ -31235,7 +31078,7 @@
           <p:cNvPr id="23" name="Straight Connector 22">
             <a:extLst>
               <a:ext uri="{FF2B5EF4-FFF2-40B4-BE49-F238E27FC236}">
-                <a16:creationId xmlns:a16="http://schemas.microsoft.com/office/drawing/2014/main" id="{13CDC078-8B28-30F5-8753-AAF6133CFFD4}"/>
+                <ns2:creationId id="{13CDC078-8B28-30F5-8753-AAF6133CFFD4}"/>
               </a:ext>
             </a:extLst>
           </p:cNvPr>
@@ -31277,7 +31120,7 @@
           <p:cNvPr id="24" name="Straight Connector 23">
             <a:extLst>
               <a:ext uri="{FF2B5EF4-FFF2-40B4-BE49-F238E27FC236}">
-                <a16:creationId xmlns:a16="http://schemas.microsoft.com/office/drawing/2014/main" id="{B2E5399C-AFC6-93AB-F4DA-643941ABF638}"/>
+                <ns2:creationId id="{B2E5399C-AFC6-93AB-F4DA-643941ABF638}"/>
               </a:ext>
             </a:extLst>
           </p:cNvPr>
@@ -31319,7 +31162,7 @@
           <p:cNvPr id="25" name="TextBox 24">
             <a:extLst>
               <a:ext uri="{FF2B5EF4-FFF2-40B4-BE49-F238E27FC236}">
-                <a16:creationId xmlns:a16="http://schemas.microsoft.com/office/drawing/2014/main" id="{F079ED0A-A276-DF9E-4F8D-9466F917944F}"/>
+                <ns2:creationId id="{F079ED0A-A276-DF9E-4F8D-9466F917944F}"/>
               </a:ext>
             </a:extLst>
           </p:cNvPr>
@@ -31367,7 +31210,7 @@
           <p:cNvPr id="26" name="TextBox 25">
             <a:extLst>
               <a:ext uri="{FF2B5EF4-FFF2-40B4-BE49-F238E27FC236}">
-                <a16:creationId xmlns:a16="http://schemas.microsoft.com/office/drawing/2014/main" id="{89F734B7-FB28-3BA9-BBEF-96395195D0B2}"/>
+                <ns2:creationId id="{89F734B7-FB28-3BA9-BBEF-96395195D0B2}"/>
               </a:ext>
             </a:extLst>
           </p:cNvPr>
@@ -31388,9 +31231,7 @@
             </a:scrgbClr>
           </a:solidFill>
           <a:ln w="15875">
-            <a:solidFill>
-              <a:srgbClr val="D6E8F6"/>
-            </a:solidFill>
+            <a:noFill/>
           </a:ln>
           <a:effectLst>
             <a:outerShdw blurRad="63500" dist="28398" dir="3806086" rotWithShape="0">
@@ -31445,7 +31286,7 @@
           <p:cNvPr id="30" name="codex_template_top_accent">
             <a:extLst>
               <a:ext uri="{FF2B5EF4-FFF2-40B4-BE49-F238E27FC236}">
-                <a16:creationId xmlns:a16="http://schemas.microsoft.com/office/drawing/2014/main" id="{A96FA859-D83F-E56C-4D5F-7B2CA64F9BFA}"/>
+                <ns2:creationId id="{A96FA859-D83F-E56C-4D5F-7B2CA64F9BFA}"/>
               </a:ext>
             </a:extLst>
           </p:cNvPr>
@@ -31465,19 +31306,18 @@
           </a:solidFill>
           <a:ln w="25400" cap="flat" cmpd="sng" algn="ctr">
             <a:noFill/>
-            <a:prstDash val="solid"/>
           </a:ln>
           <a:effectLst/>
           <a:extLst>
             <a:ext uri="{91240B29-F687-4F45-9708-019B960494DF}">
-              <a14:hiddenLine xmlns:a14="http://schemas.microsoft.com/office/drawing/2010/main" w="25400" cap="flat" cmpd="sng" algn="ctr">
+              <ns3:hiddenLine w="25400" cap="flat" cmpd="sng" algn="ctr">
                 <a:solidFill>
                   <a:schemeClr val="accent1">
                     <a:shade val="15000"/>
                   </a:schemeClr>
                 </a:solidFill>
                 <a:prstDash val="solid"/>
-              </a14:hiddenLine>
+              </ns3:hiddenLine>
             </a:ext>
           </a:extLst>
         </p:spPr>
@@ -31511,7 +31351,7 @@
           <p:cNvPr id="32" name="codex_template_footer">
             <a:extLst>
               <a:ext uri="{FF2B5EF4-FFF2-40B4-BE49-F238E27FC236}">
-                <a16:creationId xmlns:a16="http://schemas.microsoft.com/office/drawing/2014/main" id="{FCCB8017-19A9-2F21-0F6C-7CA3A89B208D}"/>
+                <ns2:creationId id="{FCCB8017-19A9-2F21-0F6C-7CA3A89B208D}"/>
               </a:ext>
             </a:extLst>
           </p:cNvPr>
@@ -31551,7 +31391,7 @@
           <p:cNvPr id="33" name="codex_template_slide_number">
             <a:extLst>
               <a:ext uri="{FF2B5EF4-FFF2-40B4-BE49-F238E27FC236}">
-                <a16:creationId xmlns:a16="http://schemas.microsoft.com/office/drawing/2014/main" id="{26799BD8-FC68-B606-0426-20C95733C4F5}"/>
+                <ns2:creationId id="{26799BD8-FC68-B606-0426-20C95733C4F5}"/>
               </a:ext>
             </a:extLst>
           </p:cNvPr>
@@ -31591,7 +31431,7 @@
           <p:cNvPr id="34" name="codex_template_title_rule">
             <a:extLst>
               <a:ext uri="{FF2B5EF4-FFF2-40B4-BE49-F238E27FC236}">
-                <a16:creationId xmlns:a16="http://schemas.microsoft.com/office/drawing/2014/main" id="{5899E1A5-A97E-E944-E331-9AA6A23C8FAF}"/>
+                <ns2:creationId id="{5899E1A5-A97E-E944-E331-9AA6A23C8FAF}"/>
               </a:ext>
             </a:extLst>
           </p:cNvPr>
@@ -31630,7 +31470,7 @@
     </p:spTree>
     <p:extLst>
       <p:ext uri="{BB962C8B-B14F-4D97-AF65-F5344CB8AC3E}">
-        <p14:creationId xmlns:p14="http://schemas.microsoft.com/office/powerpoint/2010/main" val="3679915180"/>
+        <ns4:creationId val="3679915180"/>
       </p:ext>
     </p:extLst>
   </p:cSld>
@@ -31641,7 +31481,7 @@
 </file>
 
 <file path=ppt/slides/slide7.xml><?xml version="1.0" encoding="utf-8"?>
-<p:sld xmlns:a="http://schemas.openxmlformats.org/drawingml/2006/main" xmlns:r="http://schemas.openxmlformats.org/officeDocument/2006/relationships" xmlns:p="http://schemas.openxmlformats.org/presentationml/2006/main">
+<p:sld xmlns:a="http://schemas.openxmlformats.org/drawingml/2006/main" xmlns:ns2="http://schemas.microsoft.com/office/drawing/2014/main" xmlns:ns3="http://schemas.microsoft.com/office/drawing/2010/main" xmlns:ns4="http://schemas.microsoft.com/office/powerpoint/2010/main" xmlns:p="http://schemas.openxmlformats.org/presentationml/2006/main">
   <p:cSld>
     <p:spTree>
       <p:nvGrpSpPr>
@@ -31662,7 +31502,7 @@
           <p:cNvPr id="25" name="codex_template_right_wash">
             <a:extLst>
               <a:ext uri="{FF2B5EF4-FFF2-40B4-BE49-F238E27FC236}">
-                <a16:creationId xmlns:a16="http://schemas.microsoft.com/office/drawing/2014/main" id="{E5B8FD6D-741D-B5D8-ADE8-1B688C7B5CDF}"/>
+                <ns2:creationId id="{E5B8FD6D-741D-B5D8-ADE8-1B688C7B5CDF}"/>
               </a:ext>
             </a:extLst>
           </p:cNvPr>
@@ -31684,19 +31524,18 @@
           </a:solidFill>
           <a:ln w="25400" cap="flat" cmpd="sng" algn="ctr">
             <a:noFill/>
-            <a:prstDash val="solid"/>
           </a:ln>
           <a:effectLst/>
           <a:extLst>
             <a:ext uri="{91240B29-F687-4F45-9708-019B960494DF}">
-              <a14:hiddenLine xmlns:a14="http://schemas.microsoft.com/office/drawing/2010/main" w="25400" cap="flat" cmpd="sng" algn="ctr">
+              <ns3:hiddenLine w="25400" cap="flat" cmpd="sng" algn="ctr">
                 <a:solidFill>
                   <a:schemeClr val="accent1">
                     <a:shade val="15000"/>
                   </a:schemeClr>
                 </a:solidFill>
                 <a:prstDash val="solid"/>
-              </a14:hiddenLine>
+              </ns3:hiddenLine>
             </a:ext>
           </a:extLst>
         </p:spPr>
@@ -31730,7 +31569,7 @@
           <p:cNvPr id="24" name="codex_template_header_band">
             <a:extLst>
               <a:ext uri="{FF2B5EF4-FFF2-40B4-BE49-F238E27FC236}">
-                <a16:creationId xmlns:a16="http://schemas.microsoft.com/office/drawing/2014/main" id="{178960AB-1AF0-83E9-74B5-EF917BD4F425}"/>
+                <ns2:creationId id="{178960AB-1AF0-83E9-74B5-EF917BD4F425}"/>
               </a:ext>
             </a:extLst>
           </p:cNvPr>
@@ -31752,19 +31591,18 @@
           </a:solidFill>
           <a:ln w="25400" cap="flat" cmpd="sng" algn="ctr">
             <a:noFill/>
-            <a:prstDash val="solid"/>
           </a:ln>
           <a:effectLst/>
           <a:extLst>
             <a:ext uri="{91240B29-F687-4F45-9708-019B960494DF}">
-              <a14:hiddenLine xmlns:a14="http://schemas.microsoft.com/office/drawing/2010/main" w="25400" cap="flat" cmpd="sng" algn="ctr">
+              <ns3:hiddenLine w="25400" cap="flat" cmpd="sng" algn="ctr">
                 <a:solidFill>
                   <a:schemeClr val="accent1">
                     <a:shade val="15000"/>
                   </a:schemeClr>
                 </a:solidFill>
                 <a:prstDash val="solid"/>
-              </a14:hiddenLine>
+              </ns3:hiddenLine>
             </a:ext>
           </a:extLst>
         </p:spPr>
@@ -31798,7 +31636,7 @@
           <p:cNvPr id="23" name="codex_template_background">
             <a:extLst>
               <a:ext uri="{FF2B5EF4-FFF2-40B4-BE49-F238E27FC236}">
-                <a16:creationId xmlns:a16="http://schemas.microsoft.com/office/drawing/2014/main" id="{F88461EC-4F7D-11A6-DA15-79F934D7857A}"/>
+                <ns2:creationId id="{F88461EC-4F7D-11A6-DA15-79F934D7857A}"/>
               </a:ext>
             </a:extLst>
           </p:cNvPr>
@@ -31818,19 +31656,18 @@
           </a:solidFill>
           <a:ln w="25400" cap="flat" cmpd="sng" algn="ctr">
             <a:noFill/>
-            <a:prstDash val="solid"/>
           </a:ln>
           <a:effectLst/>
           <a:extLst>
             <a:ext uri="{91240B29-F687-4F45-9708-019B960494DF}">
-              <a14:hiddenLine xmlns:a14="http://schemas.microsoft.com/office/drawing/2010/main" w="25400" cap="flat" cmpd="sng" algn="ctr">
+              <ns3:hiddenLine w="25400" cap="flat" cmpd="sng" algn="ctr">
                 <a:solidFill>
                   <a:schemeClr val="accent1">
                     <a:shade val="15000"/>
                   </a:schemeClr>
                 </a:solidFill>
                 <a:prstDash val="solid"/>
-              </a14:hiddenLine>
+              </ns3:hiddenLine>
             </a:ext>
           </a:extLst>
         </p:spPr>
@@ -31864,7 +31701,7 @@
           <p:cNvPr id="11" name="TextBox 10">
             <a:extLst>
               <a:ext uri="{FF2B5EF4-FFF2-40B4-BE49-F238E27FC236}">
-                <a16:creationId xmlns:a16="http://schemas.microsoft.com/office/drawing/2014/main" id="{F809DA32-C6FF-9E30-6413-E4740134D23A}"/>
+                <ns2:creationId id="{F809DA32-C6FF-9E30-6413-E4740134D23A}"/>
               </a:ext>
             </a:extLst>
           </p:cNvPr>
@@ -31912,7 +31749,7 @@
           <p:cNvPr id="14" name="Rectangle: Rounded Corners 13">
             <a:extLst>
               <a:ext uri="{FF2B5EF4-FFF2-40B4-BE49-F238E27FC236}">
-                <a16:creationId xmlns:a16="http://schemas.microsoft.com/office/drawing/2014/main" id="{9062A608-FEFA-6538-30A1-B2B9F900FD25}"/>
+                <ns2:creationId id="{9062A608-FEFA-6538-30A1-B2B9F900FD25}"/>
               </a:ext>
             </a:extLst>
           </p:cNvPr>
@@ -31931,9 +31768,7 @@
             <a:srgbClr val="E2F1FF"/>
           </a:solidFill>
           <a:ln w="15875">
-            <a:solidFill>
-              <a:srgbClr val="D6E8F6"/>
-            </a:solidFill>
+            <a:noFill/>
           </a:ln>
           <a:effectLst>
             <a:outerShdw blurRad="63500" dist="28398" dir="3806086" rotWithShape="0">
@@ -31978,7 +31813,7 @@
           <p:cNvPr id="15" name="TextBox 14">
             <a:extLst>
               <a:ext uri="{FF2B5EF4-FFF2-40B4-BE49-F238E27FC236}">
-                <a16:creationId xmlns:a16="http://schemas.microsoft.com/office/drawing/2014/main" id="{FBA95231-89DE-B0F2-16C4-82911202E6EF}"/>
+                <ns2:creationId id="{FBA95231-89DE-B0F2-16C4-82911202E6EF}"/>
               </a:ext>
             </a:extLst>
           </p:cNvPr>
@@ -31995,9 +31830,7 @@
           </a:prstGeom>
           <a:noFill/>
           <a:ln w="15875">
-            <a:solidFill>
-              <a:srgbClr val="D6E8F6"/>
-            </a:solidFill>
+            <a:noFill/>
           </a:ln>
           <a:effectLst>
             <a:outerShdw blurRad="63500" dist="28398" dir="3806086" rotWithShape="0">
@@ -32125,7 +31958,7 @@
           <p:cNvPr id="16" name="Rectangle: Rounded Corners 15">
             <a:extLst>
               <a:ext uri="{FF2B5EF4-FFF2-40B4-BE49-F238E27FC236}">
-                <a16:creationId xmlns:a16="http://schemas.microsoft.com/office/drawing/2014/main" id="{82B5A5A3-44E3-D4BF-34DD-4129361AB859}"/>
+                <ns2:creationId id="{82B5A5A3-44E3-D4BF-34DD-4129361AB859}"/>
               </a:ext>
             </a:extLst>
           </p:cNvPr>
@@ -32144,9 +31977,7 @@
             <a:srgbClr val="E1F8F4"/>
           </a:solidFill>
           <a:ln w="15875">
-            <a:solidFill>
-              <a:srgbClr val="D6E8F6"/>
-            </a:solidFill>
+            <a:noFill/>
           </a:ln>
           <a:effectLst>
             <a:outerShdw blurRad="63500" dist="28398" dir="3806086" rotWithShape="0">
@@ -32191,7 +32022,7 @@
           <p:cNvPr id="17" name="TextBox 16">
             <a:extLst>
               <a:ext uri="{FF2B5EF4-FFF2-40B4-BE49-F238E27FC236}">
-                <a16:creationId xmlns:a16="http://schemas.microsoft.com/office/drawing/2014/main" id="{BB400ABD-3EC1-74D4-B1A4-8D2A946A27C7}"/>
+                <ns2:creationId id="{BB400ABD-3EC1-74D4-B1A4-8D2A946A27C7}"/>
               </a:ext>
             </a:extLst>
           </p:cNvPr>
@@ -32208,9 +32039,7 @@
           </a:prstGeom>
           <a:noFill/>
           <a:ln w="15875">
-            <a:solidFill>
-              <a:srgbClr val="D6E8F6"/>
-            </a:solidFill>
+            <a:noFill/>
           </a:ln>
           <a:effectLst>
             <a:outerShdw blurRad="63500" dist="28398" dir="3806086" rotWithShape="0">
@@ -32302,7 +32131,7 @@
           <p:cNvPr id="21" name="TextBox 20">
             <a:extLst>
               <a:ext uri="{FF2B5EF4-FFF2-40B4-BE49-F238E27FC236}">
-                <a16:creationId xmlns:a16="http://schemas.microsoft.com/office/drawing/2014/main" id="{15E868E8-DA43-F3B8-E874-6CF54A3A77AF}"/>
+                <ns2:creationId id="{15E868E8-DA43-F3B8-E874-6CF54A3A77AF}"/>
               </a:ext>
             </a:extLst>
           </p:cNvPr>
@@ -32319,9 +32148,7 @@
           </a:prstGeom>
           <a:noFill/>
           <a:ln w="15875">
-            <a:solidFill>
-              <a:srgbClr val="D6E8F6"/>
-            </a:solidFill>
+            <a:noFill/>
           </a:ln>
           <a:effectLst>
             <a:outerShdw blurRad="63500" dist="28398" dir="3806086" rotWithShape="0">
@@ -32354,7 +32181,7 @@
           <p:cNvPr id="22" name="TextBox 21">
             <a:extLst>
               <a:ext uri="{FF2B5EF4-FFF2-40B4-BE49-F238E27FC236}">
-                <a16:creationId xmlns:a16="http://schemas.microsoft.com/office/drawing/2014/main" id="{16661D12-54B3-7417-E4EF-4DAC4C148DDF}"/>
+                <ns2:creationId id="{16661D12-54B3-7417-E4EF-4DAC4C148DDF}"/>
               </a:ext>
             </a:extLst>
           </p:cNvPr>
@@ -32371,9 +32198,7 @@
           </a:prstGeom>
           <a:noFill/>
           <a:ln w="15875">
-            <a:solidFill>
-              <a:srgbClr val="D6E8F6"/>
-            </a:solidFill>
+            <a:noFill/>
           </a:ln>
           <a:effectLst>
             <a:outerShdw blurRad="63500" dist="28398" dir="3806086" rotWithShape="0">
@@ -32406,7 +32231,7 @@
           <p:cNvPr id="26" name="codex_template_top_accent">
             <a:extLst>
               <a:ext uri="{FF2B5EF4-FFF2-40B4-BE49-F238E27FC236}">
-                <a16:creationId xmlns:a16="http://schemas.microsoft.com/office/drawing/2014/main" id="{515753E2-9FF8-CC69-C002-BE9DDBBD8BC8}"/>
+                <ns2:creationId id="{515753E2-9FF8-CC69-C002-BE9DDBBD8BC8}"/>
               </a:ext>
             </a:extLst>
           </p:cNvPr>
@@ -32426,19 +32251,18 @@
           </a:solidFill>
           <a:ln w="25400" cap="flat" cmpd="sng" algn="ctr">
             <a:noFill/>
-            <a:prstDash val="solid"/>
           </a:ln>
           <a:effectLst/>
           <a:extLst>
             <a:ext uri="{91240B29-F687-4F45-9708-019B960494DF}">
-              <a14:hiddenLine xmlns:a14="http://schemas.microsoft.com/office/drawing/2010/main" w="25400" cap="flat" cmpd="sng" algn="ctr">
+              <ns3:hiddenLine w="25400" cap="flat" cmpd="sng" algn="ctr">
                 <a:solidFill>
                   <a:schemeClr val="accent1">
                     <a:shade val="15000"/>
                   </a:schemeClr>
                 </a:solidFill>
                 <a:prstDash val="solid"/>
-              </a14:hiddenLine>
+              </ns3:hiddenLine>
             </a:ext>
           </a:extLst>
         </p:spPr>
@@ -32472,7 +32296,7 @@
           <p:cNvPr id="28" name="codex_template_footer">
             <a:extLst>
               <a:ext uri="{FF2B5EF4-FFF2-40B4-BE49-F238E27FC236}">
-                <a16:creationId xmlns:a16="http://schemas.microsoft.com/office/drawing/2014/main" id="{8F6D15E1-94A4-9C2C-0500-A7C4B48B5956}"/>
+                <ns2:creationId id="{8F6D15E1-94A4-9C2C-0500-A7C4B48B5956}"/>
               </a:ext>
             </a:extLst>
           </p:cNvPr>
@@ -32512,7 +32336,7 @@
           <p:cNvPr id="29" name="codex_template_slide_number">
             <a:extLst>
               <a:ext uri="{FF2B5EF4-FFF2-40B4-BE49-F238E27FC236}">
-                <a16:creationId xmlns:a16="http://schemas.microsoft.com/office/drawing/2014/main" id="{A2362B3C-FF22-AD4F-115B-12B4E2E5DEC1}"/>
+                <ns2:creationId id="{A2362B3C-FF22-AD4F-115B-12B4E2E5DEC1}"/>
               </a:ext>
             </a:extLst>
           </p:cNvPr>
@@ -32552,7 +32376,7 @@
           <p:cNvPr id="30" name="codex_template_title_rule">
             <a:extLst>
               <a:ext uri="{FF2B5EF4-FFF2-40B4-BE49-F238E27FC236}">
-                <a16:creationId xmlns:a16="http://schemas.microsoft.com/office/drawing/2014/main" id="{ADC1E059-9EC9-3BDA-1EEC-D315EFA09141}"/>
+                <ns2:creationId id="{ADC1E059-9EC9-3BDA-1EEC-D315EFA09141}"/>
               </a:ext>
             </a:extLst>
           </p:cNvPr>
@@ -32591,7 +32415,7 @@
     </p:spTree>
     <p:extLst>
       <p:ext uri="{BB962C8B-B14F-4D97-AF65-F5344CB8AC3E}">
-        <p14:creationId xmlns:p14="http://schemas.microsoft.com/office/powerpoint/2010/main" val="3864244934"/>
+        <ns4:creationId val="3864244934"/>
       </p:ext>
     </p:extLst>
   </p:cSld>
@@ -32602,7 +32426,7 @@
 </file>
 
 <file path=ppt/slides/slide8.xml><?xml version="1.0" encoding="utf-8"?>
-<p:sld xmlns:a="http://schemas.openxmlformats.org/drawingml/2006/main" xmlns:r="http://schemas.openxmlformats.org/officeDocument/2006/relationships" xmlns:p="http://schemas.openxmlformats.org/presentationml/2006/main">
+<p:sld xmlns:a="http://schemas.openxmlformats.org/drawingml/2006/main" xmlns:ns2="http://schemas.microsoft.com/office/drawing/2014/main" xmlns:ns3="http://schemas.microsoft.com/office/drawing/2010/main" xmlns:ns4="http://schemas.microsoft.com/office/powerpoint/2010/main" xmlns:p="http://schemas.openxmlformats.org/presentationml/2006/main">
   <p:cSld>
     <p:spTree>
       <p:nvGrpSpPr>
@@ -32623,7 +32447,7 @@
           <p:cNvPr id="24" name="codex_template_right_wash">
             <a:extLst>
               <a:ext uri="{FF2B5EF4-FFF2-40B4-BE49-F238E27FC236}">
-                <a16:creationId xmlns:a16="http://schemas.microsoft.com/office/drawing/2014/main" id="{8A2C8D93-009C-61F8-D38D-645E535B083E}"/>
+                <ns2:creationId id="{8A2C8D93-009C-61F8-D38D-645E535B083E}"/>
               </a:ext>
             </a:extLst>
           </p:cNvPr>
@@ -32645,19 +32469,18 @@
           </a:solidFill>
           <a:ln w="25400" cap="flat" cmpd="sng" algn="ctr">
             <a:noFill/>
-            <a:prstDash val="solid"/>
           </a:ln>
           <a:effectLst/>
           <a:extLst>
             <a:ext uri="{91240B29-F687-4F45-9708-019B960494DF}">
-              <a14:hiddenLine xmlns:a14="http://schemas.microsoft.com/office/drawing/2010/main" w="25400" cap="flat" cmpd="sng" algn="ctr">
+              <ns3:hiddenLine w="25400" cap="flat" cmpd="sng" algn="ctr">
                 <a:solidFill>
                   <a:schemeClr val="accent1">
                     <a:shade val="15000"/>
                   </a:schemeClr>
                 </a:solidFill>
                 <a:prstDash val="solid"/>
-              </a14:hiddenLine>
+              </ns3:hiddenLine>
             </a:ext>
           </a:extLst>
         </p:spPr>
@@ -32691,7 +32514,7 @@
           <p:cNvPr id="23" name="codex_template_header_band">
             <a:extLst>
               <a:ext uri="{FF2B5EF4-FFF2-40B4-BE49-F238E27FC236}">
-                <a16:creationId xmlns:a16="http://schemas.microsoft.com/office/drawing/2014/main" id="{270019E0-9FBC-4705-DB68-05C77658C49A}"/>
+                <ns2:creationId id="{270019E0-9FBC-4705-DB68-05C77658C49A}"/>
               </a:ext>
             </a:extLst>
           </p:cNvPr>
@@ -32713,19 +32536,18 @@
           </a:solidFill>
           <a:ln w="25400" cap="flat" cmpd="sng" algn="ctr">
             <a:noFill/>
-            <a:prstDash val="solid"/>
           </a:ln>
           <a:effectLst/>
           <a:extLst>
             <a:ext uri="{91240B29-F687-4F45-9708-019B960494DF}">
-              <a14:hiddenLine xmlns:a14="http://schemas.microsoft.com/office/drawing/2010/main" w="25400" cap="flat" cmpd="sng" algn="ctr">
+              <ns3:hiddenLine w="25400" cap="flat" cmpd="sng" algn="ctr">
                 <a:solidFill>
                   <a:schemeClr val="accent1">
                     <a:shade val="15000"/>
                   </a:schemeClr>
                 </a:solidFill>
                 <a:prstDash val="solid"/>
-              </a14:hiddenLine>
+              </ns3:hiddenLine>
             </a:ext>
           </a:extLst>
         </p:spPr>
@@ -32759,7 +32581,7 @@
           <p:cNvPr id="22" name="codex_template_background">
             <a:extLst>
               <a:ext uri="{FF2B5EF4-FFF2-40B4-BE49-F238E27FC236}">
-                <a16:creationId xmlns:a16="http://schemas.microsoft.com/office/drawing/2014/main" id="{BC45044B-96F8-46FA-5143-0B857F4CE765}"/>
+                <ns2:creationId id="{BC45044B-96F8-46FA-5143-0B857F4CE765}"/>
               </a:ext>
             </a:extLst>
           </p:cNvPr>
@@ -32779,19 +32601,18 @@
           </a:solidFill>
           <a:ln w="25400" cap="flat" cmpd="sng" algn="ctr">
             <a:noFill/>
-            <a:prstDash val="solid"/>
           </a:ln>
           <a:effectLst/>
           <a:extLst>
             <a:ext uri="{91240B29-F687-4F45-9708-019B960494DF}">
-              <a14:hiddenLine xmlns:a14="http://schemas.microsoft.com/office/drawing/2010/main" w="25400" cap="flat" cmpd="sng" algn="ctr">
+              <ns3:hiddenLine w="25400" cap="flat" cmpd="sng" algn="ctr">
                 <a:solidFill>
                   <a:schemeClr val="accent1">
                     <a:shade val="15000"/>
                   </a:schemeClr>
                 </a:solidFill>
                 <a:prstDash val="solid"/>
-              </a14:hiddenLine>
+              </ns3:hiddenLine>
             </a:ext>
           </a:extLst>
         </p:spPr>
@@ -32825,7 +32646,7 @@
           <p:cNvPr id="11" name="TextBox 10">
             <a:extLst>
               <a:ext uri="{FF2B5EF4-FFF2-40B4-BE49-F238E27FC236}">
-                <a16:creationId xmlns:a16="http://schemas.microsoft.com/office/drawing/2014/main" id="{BCF484BB-BBBD-73F4-563E-FE699CE519B8}"/>
+                <ns2:creationId id="{BCF484BB-BBBD-73F4-563E-FE699CE519B8}"/>
               </a:ext>
             </a:extLst>
           </p:cNvPr>
@@ -32873,7 +32694,7 @@
           <p:cNvPr id="14" name="Rectangle: Rounded Corners 13">
             <a:extLst>
               <a:ext uri="{FF2B5EF4-FFF2-40B4-BE49-F238E27FC236}">
-                <a16:creationId xmlns:a16="http://schemas.microsoft.com/office/drawing/2014/main" id="{37BFAE2B-1A37-5CEF-A071-5D8CBE12DA1B}"/>
+                <ns2:creationId id="{37BFAE2B-1A37-5CEF-A071-5D8CBE12DA1B}"/>
               </a:ext>
             </a:extLst>
           </p:cNvPr>
@@ -32892,9 +32713,7 @@
             <a:srgbClr val="E2F1FF"/>
           </a:solidFill>
           <a:ln w="15875">
-            <a:solidFill>
-              <a:srgbClr val="D6E8F6"/>
-            </a:solidFill>
+            <a:noFill/>
           </a:ln>
           <a:effectLst>
             <a:outerShdw blurRad="63500" dist="28398" dir="3806086" rotWithShape="0">
@@ -32939,7 +32758,7 @@
           <p:cNvPr id="15" name="TextBox 14">
             <a:extLst>
               <a:ext uri="{FF2B5EF4-FFF2-40B4-BE49-F238E27FC236}">
-                <a16:creationId xmlns:a16="http://schemas.microsoft.com/office/drawing/2014/main" id="{9167F9A8-EBA1-340B-F202-52DBD4D2B7FC}"/>
+                <ns2:creationId id="{9167F9A8-EBA1-340B-F202-52DBD4D2B7FC}"/>
               </a:ext>
             </a:extLst>
           </p:cNvPr>
@@ -32956,9 +32775,7 @@
           </a:prstGeom>
           <a:noFill/>
           <a:ln w="15875">
-            <a:solidFill>
-              <a:srgbClr val="D6E8F6"/>
-            </a:solidFill>
+            <a:noFill/>
           </a:ln>
           <a:effectLst>
             <a:outerShdw blurRad="63500" dist="28398" dir="3806086" rotWithShape="0">
@@ -33035,7 +32852,7 @@
           <p:cNvPr id="16" name="Rectangle: Rounded Corners 15">
             <a:extLst>
               <a:ext uri="{FF2B5EF4-FFF2-40B4-BE49-F238E27FC236}">
-                <a16:creationId xmlns:a16="http://schemas.microsoft.com/office/drawing/2014/main" id="{C05DBAD8-755A-2A4E-97BD-B202CAC48795}"/>
+                <ns2:creationId id="{C05DBAD8-755A-2A4E-97BD-B202CAC48795}"/>
               </a:ext>
             </a:extLst>
           </p:cNvPr>
@@ -33054,9 +32871,7 @@
             <a:srgbClr val="E1F8F4"/>
           </a:solidFill>
           <a:ln w="15875">
-            <a:solidFill>
-              <a:srgbClr val="D6E8F6"/>
-            </a:solidFill>
+            <a:noFill/>
           </a:ln>
           <a:effectLst>
             <a:outerShdw blurRad="63500" dist="28398" dir="3806086" rotWithShape="0">
@@ -33101,7 +32916,7 @@
           <p:cNvPr id="17" name="TextBox 16">
             <a:extLst>
               <a:ext uri="{FF2B5EF4-FFF2-40B4-BE49-F238E27FC236}">
-                <a16:creationId xmlns:a16="http://schemas.microsoft.com/office/drawing/2014/main" id="{A24376C8-44CA-2ED3-0BF0-EF574CE0BC07}"/>
+                <ns2:creationId id="{A24376C8-44CA-2ED3-0BF0-EF574CE0BC07}"/>
               </a:ext>
             </a:extLst>
           </p:cNvPr>
@@ -33118,9 +32933,7 @@
           </a:prstGeom>
           <a:noFill/>
           <a:ln w="15875">
-            <a:solidFill>
-              <a:srgbClr val="D6E8F6"/>
-            </a:solidFill>
+            <a:noFill/>
           </a:ln>
           <a:effectLst>
             <a:outerShdw blurRad="63500" dist="28398" dir="3806086" rotWithShape="0">
@@ -33197,7 +33010,7 @@
           <p:cNvPr id="20" name="TextBox 19">
             <a:extLst>
               <a:ext uri="{FF2B5EF4-FFF2-40B4-BE49-F238E27FC236}">
-                <a16:creationId xmlns:a16="http://schemas.microsoft.com/office/drawing/2014/main" id="{FB14062C-FFEC-A301-9805-A9D3285A42E9}"/>
+                <ns2:creationId id="{FB14062C-FFEC-A301-9805-A9D3285A42E9}"/>
               </a:ext>
             </a:extLst>
           </p:cNvPr>
@@ -33214,9 +33027,7 @@
           </a:prstGeom>
           <a:noFill/>
           <a:ln w="15875">
-            <a:solidFill>
-              <a:srgbClr val="D6E8F6"/>
-            </a:solidFill>
+            <a:noFill/>
           </a:ln>
           <a:effectLst>
             <a:outerShdw blurRad="63500" dist="28398" dir="3806086" rotWithShape="0">
@@ -33249,7 +33060,7 @@
           <p:cNvPr id="21" name="TextBox 20">
             <a:extLst>
               <a:ext uri="{FF2B5EF4-FFF2-40B4-BE49-F238E27FC236}">
-                <a16:creationId xmlns:a16="http://schemas.microsoft.com/office/drawing/2014/main" id="{72F92C16-0F0A-6AC9-8A10-5E502ADD89FC}"/>
+                <ns2:creationId id="{72F92C16-0F0A-6AC9-8A10-5E502ADD89FC}"/>
               </a:ext>
             </a:extLst>
           </p:cNvPr>
@@ -33266,9 +33077,7 @@
           </a:prstGeom>
           <a:noFill/>
           <a:ln w="15875">
-            <a:solidFill>
-              <a:srgbClr val="D6E8F6"/>
-            </a:solidFill>
+            <a:noFill/>
           </a:ln>
           <a:effectLst>
             <a:outerShdw blurRad="63500" dist="28398" dir="3806086" rotWithShape="0">
@@ -33302,7 +33111,7 @@
           <p:cNvPr id="25" name="codex_template_top_accent">
             <a:extLst>
               <a:ext uri="{FF2B5EF4-FFF2-40B4-BE49-F238E27FC236}">
-                <a16:creationId xmlns:a16="http://schemas.microsoft.com/office/drawing/2014/main" id="{1F12394A-330C-A43D-3C4B-218E9DFED924}"/>
+                <ns2:creationId id="{1F12394A-330C-A43D-3C4B-218E9DFED924}"/>
               </a:ext>
             </a:extLst>
           </p:cNvPr>
@@ -33322,19 +33131,18 @@
           </a:solidFill>
           <a:ln w="25400" cap="flat" cmpd="sng" algn="ctr">
             <a:noFill/>
-            <a:prstDash val="solid"/>
           </a:ln>
           <a:effectLst/>
           <a:extLst>
             <a:ext uri="{91240B29-F687-4F45-9708-019B960494DF}">
-              <a14:hiddenLine xmlns:a14="http://schemas.microsoft.com/office/drawing/2010/main" w="25400" cap="flat" cmpd="sng" algn="ctr">
+              <ns3:hiddenLine w="25400" cap="flat" cmpd="sng" algn="ctr">
                 <a:solidFill>
                   <a:schemeClr val="accent1">
                     <a:shade val="15000"/>
                   </a:schemeClr>
                 </a:solidFill>
                 <a:prstDash val="solid"/>
-              </a14:hiddenLine>
+              </ns3:hiddenLine>
             </a:ext>
           </a:extLst>
         </p:spPr>
@@ -33368,7 +33176,7 @@
           <p:cNvPr id="27" name="codex_template_footer">
             <a:extLst>
               <a:ext uri="{FF2B5EF4-FFF2-40B4-BE49-F238E27FC236}">
-                <a16:creationId xmlns:a16="http://schemas.microsoft.com/office/drawing/2014/main" id="{0389412C-8311-7388-A136-0E95744B88FC}"/>
+                <ns2:creationId id="{0389412C-8311-7388-A136-0E95744B88FC}"/>
               </a:ext>
             </a:extLst>
           </p:cNvPr>
@@ -33408,7 +33216,7 @@
           <p:cNvPr id="28" name="codex_template_slide_number">
             <a:extLst>
               <a:ext uri="{FF2B5EF4-FFF2-40B4-BE49-F238E27FC236}">
-                <a16:creationId xmlns:a16="http://schemas.microsoft.com/office/drawing/2014/main" id="{BE12846E-8B9B-D2DE-9F38-A9F28648C136}"/>
+                <ns2:creationId id="{BE12846E-8B9B-D2DE-9F38-A9F28648C136}"/>
               </a:ext>
             </a:extLst>
           </p:cNvPr>
@@ -33448,7 +33256,7 @@
           <p:cNvPr id="29" name="codex_template_title_rule">
             <a:extLst>
               <a:ext uri="{FF2B5EF4-FFF2-40B4-BE49-F238E27FC236}">
-                <a16:creationId xmlns:a16="http://schemas.microsoft.com/office/drawing/2014/main" id="{1DB528AD-F284-9BA5-2C96-0DC70ABF0126}"/>
+                <ns2:creationId id="{1DB528AD-F284-9BA5-2C96-0DC70ABF0126}"/>
               </a:ext>
             </a:extLst>
           </p:cNvPr>
@@ -33487,7 +33295,7 @@
     </p:spTree>
     <p:extLst>
       <p:ext uri="{BB962C8B-B14F-4D97-AF65-F5344CB8AC3E}">
-        <p14:creationId xmlns:p14="http://schemas.microsoft.com/office/powerpoint/2010/main" val="3681249511"/>
+        <ns4:creationId val="3681249511"/>
       </p:ext>
     </p:extLst>
   </p:cSld>
@@ -33498,7 +33306,7 @@
 </file>
 
 <file path=ppt/slides/slide9.xml><?xml version="1.0" encoding="utf-8"?>
-<p:sld xmlns:a="http://schemas.openxmlformats.org/drawingml/2006/main" xmlns:r="http://schemas.openxmlformats.org/officeDocument/2006/relationships" xmlns:p="http://schemas.openxmlformats.org/presentationml/2006/main">
+<p:sld xmlns:a="http://schemas.openxmlformats.org/drawingml/2006/main" xmlns:ns2="http://schemas.microsoft.com/office/drawing/2014/main" xmlns:ns3="http://schemas.microsoft.com/office/drawing/2010/main" xmlns:ns4="http://schemas.microsoft.com/office/powerpoint/2010/main" xmlns:p="http://schemas.openxmlformats.org/presentationml/2006/main">
   <p:cSld>
     <p:spTree>
       <p:nvGrpSpPr>
@@ -33519,7 +33327,7 @@
           <p:cNvPr id="24" name="codex_template_right_wash">
             <a:extLst>
               <a:ext uri="{FF2B5EF4-FFF2-40B4-BE49-F238E27FC236}">
-                <a16:creationId xmlns:a16="http://schemas.microsoft.com/office/drawing/2014/main" id="{DCF687E9-A5A9-6C40-4C1E-3B3E46FA92E5}"/>
+                <ns2:creationId id="{DCF687E9-A5A9-6C40-4C1E-3B3E46FA92E5}"/>
               </a:ext>
             </a:extLst>
           </p:cNvPr>
@@ -33541,19 +33349,18 @@
           </a:solidFill>
           <a:ln w="25400" cap="flat" cmpd="sng" algn="ctr">
             <a:noFill/>
-            <a:prstDash val="solid"/>
           </a:ln>
           <a:effectLst/>
           <a:extLst>
             <a:ext uri="{91240B29-F687-4F45-9708-019B960494DF}">
-              <a14:hiddenLine xmlns:a14="http://schemas.microsoft.com/office/drawing/2010/main" w="25400" cap="flat" cmpd="sng" algn="ctr">
+              <ns3:hiddenLine w="25400" cap="flat" cmpd="sng" algn="ctr">
                 <a:solidFill>
                   <a:schemeClr val="accent1">
                     <a:shade val="15000"/>
                   </a:schemeClr>
                 </a:solidFill>
                 <a:prstDash val="solid"/>
-              </a14:hiddenLine>
+              </ns3:hiddenLine>
             </a:ext>
           </a:extLst>
         </p:spPr>
@@ -33587,7 +33394,7 @@
           <p:cNvPr id="23" name="codex_template_header_band">
             <a:extLst>
               <a:ext uri="{FF2B5EF4-FFF2-40B4-BE49-F238E27FC236}">
-                <a16:creationId xmlns:a16="http://schemas.microsoft.com/office/drawing/2014/main" id="{9284BEB5-E84E-D206-1310-15FCF0416904}"/>
+                <ns2:creationId id="{9284BEB5-E84E-D206-1310-15FCF0416904}"/>
               </a:ext>
             </a:extLst>
           </p:cNvPr>
@@ -33609,19 +33416,18 @@
           </a:solidFill>
           <a:ln w="25400" cap="flat" cmpd="sng" algn="ctr">
             <a:noFill/>
-            <a:prstDash val="solid"/>
           </a:ln>
           <a:effectLst/>
           <a:extLst>
             <a:ext uri="{91240B29-F687-4F45-9708-019B960494DF}">
-              <a14:hiddenLine xmlns:a14="http://schemas.microsoft.com/office/drawing/2010/main" w="25400" cap="flat" cmpd="sng" algn="ctr">
+              <ns3:hiddenLine w="25400" cap="flat" cmpd="sng" algn="ctr">
                 <a:solidFill>
                   <a:schemeClr val="accent1">
                     <a:shade val="15000"/>
                   </a:schemeClr>
                 </a:solidFill>
                 <a:prstDash val="solid"/>
-              </a14:hiddenLine>
+              </ns3:hiddenLine>
             </a:ext>
           </a:extLst>
         </p:spPr>
@@ -33655,7 +33461,7 @@
           <p:cNvPr id="22" name="codex_template_background">
             <a:extLst>
               <a:ext uri="{FF2B5EF4-FFF2-40B4-BE49-F238E27FC236}">
-                <a16:creationId xmlns:a16="http://schemas.microsoft.com/office/drawing/2014/main" id="{5377DFAB-6888-7946-8B2D-E449AE9E8921}"/>
+                <ns2:creationId id="{5377DFAB-6888-7946-8B2D-E449AE9E8921}"/>
               </a:ext>
             </a:extLst>
           </p:cNvPr>
@@ -33675,19 +33481,18 @@
           </a:solidFill>
           <a:ln w="25400" cap="flat" cmpd="sng" algn="ctr">
             <a:noFill/>
-            <a:prstDash val="solid"/>
           </a:ln>
           <a:effectLst/>
           <a:extLst>
             <a:ext uri="{91240B29-F687-4F45-9708-019B960494DF}">
-              <a14:hiddenLine xmlns:a14="http://schemas.microsoft.com/office/drawing/2010/main" w="25400" cap="flat" cmpd="sng" algn="ctr">
+              <ns3:hiddenLine w="25400" cap="flat" cmpd="sng" algn="ctr">
                 <a:solidFill>
                   <a:schemeClr val="accent1">
                     <a:shade val="15000"/>
                   </a:schemeClr>
                 </a:solidFill>
                 <a:prstDash val="solid"/>
-              </a14:hiddenLine>
+              </ns3:hiddenLine>
             </a:ext>
           </a:extLst>
         </p:spPr>
@@ -33721,7 +33526,7 @@
           <p:cNvPr id="11" name="TextBox 10">
             <a:extLst>
               <a:ext uri="{FF2B5EF4-FFF2-40B4-BE49-F238E27FC236}">
-                <a16:creationId xmlns:a16="http://schemas.microsoft.com/office/drawing/2014/main" id="{6C702179-3441-1DB1-C9DF-AA75C7E6A1B0}"/>
+                <ns2:creationId id="{6C702179-3441-1DB1-C9DF-AA75C7E6A1B0}"/>
               </a:ext>
             </a:extLst>
           </p:cNvPr>
@@ -33769,7 +33574,7 @@
           <p:cNvPr id="14" name="Rectangle: Rounded Corners 13">
             <a:extLst>
               <a:ext uri="{FF2B5EF4-FFF2-40B4-BE49-F238E27FC236}">
-                <a16:creationId xmlns:a16="http://schemas.microsoft.com/office/drawing/2014/main" id="{8CF3B2F1-ADBB-BF2C-24F6-9A992A472DF9}"/>
+                <ns2:creationId id="{8CF3B2F1-ADBB-BF2C-24F6-9A992A472DF9}"/>
               </a:ext>
             </a:extLst>
           </p:cNvPr>
@@ -33788,9 +33593,7 @@
             <a:srgbClr val="E2F1FF"/>
           </a:solidFill>
           <a:ln w="15875">
-            <a:solidFill>
-              <a:srgbClr val="D6E8F6"/>
-            </a:solidFill>
+            <a:noFill/>
           </a:ln>
           <a:effectLst>
             <a:outerShdw blurRad="63500" dist="28398" dir="3806086" rotWithShape="0">
@@ -33835,7 +33638,7 @@
           <p:cNvPr id="15" name="TextBox 14">
             <a:extLst>
               <a:ext uri="{FF2B5EF4-FFF2-40B4-BE49-F238E27FC236}">
-                <a16:creationId xmlns:a16="http://schemas.microsoft.com/office/drawing/2014/main" id="{22F83FA9-43A3-C76E-CCAF-8A6CD5164639}"/>
+                <ns2:creationId id="{22F83FA9-43A3-C76E-CCAF-8A6CD5164639}"/>
               </a:ext>
             </a:extLst>
           </p:cNvPr>
@@ -33852,9 +33655,7 @@
           </a:prstGeom>
           <a:noFill/>
           <a:ln w="15875">
-            <a:solidFill>
-              <a:srgbClr val="D6E8F6"/>
-            </a:solidFill>
+            <a:noFill/>
           </a:ln>
           <a:effectLst>
             <a:outerShdw blurRad="63500" dist="28398" dir="3806086" rotWithShape="0">
@@ -34003,7 +33804,7 @@
           <p:cNvPr id="16" name="Rectangle: Rounded Corners 15">
             <a:extLst>
               <a:ext uri="{FF2B5EF4-FFF2-40B4-BE49-F238E27FC236}">
-                <a16:creationId xmlns:a16="http://schemas.microsoft.com/office/drawing/2014/main" id="{820AA12D-A545-4C0A-4FDD-38703C8F770A}"/>
+                <ns2:creationId id="{820AA12D-A545-4C0A-4FDD-38703C8F770A}"/>
               </a:ext>
             </a:extLst>
           </p:cNvPr>
@@ -34022,9 +33823,7 @@
             <a:srgbClr val="E1F8F4"/>
           </a:solidFill>
           <a:ln w="15875">
-            <a:solidFill>
-              <a:srgbClr val="D6E8F6"/>
-            </a:solidFill>
+            <a:noFill/>
           </a:ln>
           <a:effectLst>
             <a:outerShdw blurRad="63500" dist="28398" dir="3806086" rotWithShape="0">
@@ -34069,7 +33868,7 @@
           <p:cNvPr id="17" name="TextBox 16">
             <a:extLst>
               <a:ext uri="{FF2B5EF4-FFF2-40B4-BE49-F238E27FC236}">
-                <a16:creationId xmlns:a16="http://schemas.microsoft.com/office/drawing/2014/main" id="{11063BA3-54A8-F35D-1859-05606FE6E415}"/>
+                <ns2:creationId id="{11063BA3-54A8-F35D-1859-05606FE6E415}"/>
               </a:ext>
             </a:extLst>
           </p:cNvPr>
@@ -34086,9 +33885,7 @@
           </a:prstGeom>
           <a:noFill/>
           <a:ln w="15875">
-            <a:solidFill>
-              <a:srgbClr val="D6E8F6"/>
-            </a:solidFill>
+            <a:noFill/>
           </a:ln>
           <a:effectLst>
             <a:outerShdw blurRad="63500" dist="28398" dir="3806086" rotWithShape="0">
@@ -34165,7 +33962,7 @@
           <p:cNvPr id="20" name="TextBox 19">
             <a:extLst>
               <a:ext uri="{FF2B5EF4-FFF2-40B4-BE49-F238E27FC236}">
-                <a16:creationId xmlns:a16="http://schemas.microsoft.com/office/drawing/2014/main" id="{B498BECF-8378-F536-ABC7-EF785C535D65}"/>
+                <ns2:creationId id="{B498BECF-8378-F536-ABC7-EF785C535D65}"/>
               </a:ext>
             </a:extLst>
           </p:cNvPr>
@@ -34182,9 +33979,7 @@
           </a:prstGeom>
           <a:noFill/>
           <a:ln w="15875">
-            <a:solidFill>
-              <a:srgbClr val="D6E8F6"/>
-            </a:solidFill>
+            <a:noFill/>
           </a:ln>
           <a:effectLst>
             <a:outerShdw blurRad="63500" dist="28398" dir="3806086" rotWithShape="0">
@@ -34217,7 +34012,7 @@
           <p:cNvPr id="21" name="TextBox 20">
             <a:extLst>
               <a:ext uri="{FF2B5EF4-FFF2-40B4-BE49-F238E27FC236}">
-                <a16:creationId xmlns:a16="http://schemas.microsoft.com/office/drawing/2014/main" id="{E08346AB-46C8-5A0C-C1CD-68E2A0F95EB0}"/>
+                <ns2:creationId id="{E08346AB-46C8-5A0C-C1CD-68E2A0F95EB0}"/>
               </a:ext>
             </a:extLst>
           </p:cNvPr>
@@ -34234,9 +34029,7 @@
           </a:prstGeom>
           <a:noFill/>
           <a:ln w="15875">
-            <a:solidFill>
-              <a:srgbClr val="D6E8F6"/>
-            </a:solidFill>
+            <a:noFill/>
           </a:ln>
           <a:effectLst>
             <a:outerShdw blurRad="63500" dist="28398" dir="3806086" rotWithShape="0">
@@ -34270,7 +34063,7 @@
           <p:cNvPr id="25" name="codex_template_top_accent">
             <a:extLst>
               <a:ext uri="{FF2B5EF4-FFF2-40B4-BE49-F238E27FC236}">
-                <a16:creationId xmlns:a16="http://schemas.microsoft.com/office/drawing/2014/main" id="{E8B58934-DFAA-230C-720B-C311E6ADBFD6}"/>
+                <ns2:creationId id="{E8B58934-DFAA-230C-720B-C311E6ADBFD6}"/>
               </a:ext>
             </a:extLst>
           </p:cNvPr>
@@ -34290,19 +34083,18 @@
           </a:solidFill>
           <a:ln w="25400" cap="flat" cmpd="sng" algn="ctr">
             <a:noFill/>
-            <a:prstDash val="solid"/>
           </a:ln>
           <a:effectLst/>
           <a:extLst>
             <a:ext uri="{91240B29-F687-4F45-9708-019B960494DF}">
-              <a14:hiddenLine xmlns:a14="http://schemas.microsoft.com/office/drawing/2010/main" w="25400" cap="flat" cmpd="sng" algn="ctr">
+              <ns3:hiddenLine w="25400" cap="flat" cmpd="sng" algn="ctr">
                 <a:solidFill>
                   <a:schemeClr val="accent1">
                     <a:shade val="15000"/>
                   </a:schemeClr>
                 </a:solidFill>
                 <a:prstDash val="solid"/>
-              </a14:hiddenLine>
+              </ns3:hiddenLine>
             </a:ext>
           </a:extLst>
         </p:spPr>
@@ -34336,7 +34128,7 @@
           <p:cNvPr id="27" name="codex_template_footer">
             <a:extLst>
               <a:ext uri="{FF2B5EF4-FFF2-40B4-BE49-F238E27FC236}">
-                <a16:creationId xmlns:a16="http://schemas.microsoft.com/office/drawing/2014/main" id="{4E365636-BFD6-629B-A5B3-5F29E0C2F93B}"/>
+                <ns2:creationId id="{4E365636-BFD6-629B-A5B3-5F29E0C2F93B}"/>
               </a:ext>
             </a:extLst>
           </p:cNvPr>
@@ -34376,7 +34168,7 @@
           <p:cNvPr id="28" name="codex_template_slide_number">
             <a:extLst>
               <a:ext uri="{FF2B5EF4-FFF2-40B4-BE49-F238E27FC236}">
-                <a16:creationId xmlns:a16="http://schemas.microsoft.com/office/drawing/2014/main" id="{BB043ADA-183B-AA6E-2DA5-3050036E9DA3}"/>
+                <ns2:creationId id="{BB043ADA-183B-AA6E-2DA5-3050036E9DA3}"/>
               </a:ext>
             </a:extLst>
           </p:cNvPr>
@@ -34416,7 +34208,7 @@
           <p:cNvPr id="29" name="codex_template_title_rule">
             <a:extLst>
               <a:ext uri="{FF2B5EF4-FFF2-40B4-BE49-F238E27FC236}">
-                <a16:creationId xmlns:a16="http://schemas.microsoft.com/office/drawing/2014/main" id="{0CB5F525-179C-3375-D3A6-43F33C769CF5}"/>
+                <ns2:creationId id="{0CB5F525-179C-3375-D3A6-43F33C769CF5}"/>
               </a:ext>
             </a:extLst>
           </p:cNvPr>
@@ -34455,7 +34247,7 @@
     </p:spTree>
     <p:extLst>
       <p:ext uri="{BB962C8B-B14F-4D97-AF65-F5344CB8AC3E}">
-        <p14:creationId xmlns:p14="http://schemas.microsoft.com/office/powerpoint/2010/main" val="2413147224"/>
+        <ns4:creationId val="2413147224"/>
       </p:ext>
     </p:extLst>
   </p:cSld>
